--- a/doc-mk/ppt/vllm-dp1-full.pptx
+++ b/doc-mk/ppt/vllm-dp1-full.pptx
@@ -22,9 +22,11 @@
     <p:sldId id="270" r:id="rId16"/>
     <p:sldId id="271" r:id="rId17"/>
     <p:sldId id="272" r:id="rId18"/>
+    <p:sldId id="273" r:id="rId19"/>
+    <p:sldId id="274" r:id="rId20"/>
   </p:sldIdLst>
   <p:notesMasterIdLst>
-    <p:notesMasterId r:id="rId19"/>
+    <p:notesMasterId r:id="rId21"/>
   </p:notesMasterIdLst>
   <p:sldSz cx="12192000" cy="6858000"/>
   <p:notesSz cx="6858000" cy="12192000"/>
@@ -1134,7 +1136,7 @@
           <a:p>
             <a:r>
               <a:rPr lang="en-US" dirty="0"/>
-              <a:t>DP 간 결합을 명시하는 것이 DP 문서의 가치를 높인다.</a:t>
+              <a:t>C1은 A만 필요하다. C2는 A도 B도 필요하다 — 이것이 C2가 추가로 지는 구현·운영 부담이다.</a:t>
             </a:r>
             <a:endParaRPr lang="en-US" dirty="0"/>
           </a:p>
@@ -1222,7 +1224,7 @@
           <a:p>
             <a:r>
               <a:rPr lang="en-US" dirty="0"/>
-              <a:t>결론은 조건부 선택 + 재검증 계획 + 잔여 인계 세 가지로 닫는다.</a:t>
+              <a:t>네 건 모두 코드를 돌려보지 않았으면 나오지 않았을 발견이다.</a:t>
             </a:r>
             <a:endParaRPr lang="en-US" dirty="0"/>
           </a:p>
@@ -1246,6 +1248,182 @@
             <a:fld id="{F7021451-1387-4CA6-816F-3879F97B5CBC}" type="slidenum">
               <a:rPr lang="en-US"/>
               <a:t>17</a:t>
+            </a:fld>
+            <a:endParaRPr lang="en-US"/>
+          </a:p>
+        </p:txBody>
+      </p:sp>
+    </p:spTree>
+    <p:extLst>
+      <p:ext uri="{BB962C8B-B14F-4D97-AF65-F5344CB8AC3E}">
+        <p14:creationId xmlns:p14="http://schemas.microsoft.com/office/powerpoint/2010/main" val="1024086991"/>
+      </p:ext>
+    </p:extLst>
+  </p:cSld>
+  <p:clrMapOvr>
+    <a:masterClrMapping/>
+  </p:clrMapOvr>
+</p:notes>
+</file>
+
+<file path=ppt/notesSlides/notesSlide18.xml><?xml version="1.0" encoding="utf-8"?>
+<p:notes xmlns:a="http://schemas.openxmlformats.org/drawingml/2006/main" xmlns:r="http://schemas.openxmlformats.org/officeDocument/2006/relationships" xmlns:p="http://schemas.openxmlformats.org/presentationml/2006/main">
+  <p:cSld>
+    <p:spTree>
+      <p:nvGrpSpPr>
+        <p:cNvPr id="1" name=""/>
+        <p:cNvGrpSpPr/>
+        <p:nvPr/>
+      </p:nvGrpSpPr>
+      <p:grpSpPr>
+        <a:xfrm>
+          <a:off x="0" y="0"/>
+          <a:ext cx="0" cy="0"/>
+          <a:chOff x="0" y="0"/>
+          <a:chExt cx="0" cy="0"/>
+        </a:xfrm>
+      </p:grpSpPr>
+      <p:sp>
+        <p:nvSpPr>
+          <p:cNvPr id="2" name="Slide Image Placeholder 1"/>
+          <p:cNvSpPr>
+            <a:spLocks noGrp="1" noRot="1" noChangeAspect="1"/>
+          </p:cNvSpPr>
+          <p:nvPr>
+            <p:ph type="sldImg"/>
+          </p:nvPr>
+        </p:nvSpPr>
+        <p:spPr/>
+      </p:sp>
+      <p:sp>
+        <p:nvSpPr>
+          <p:cNvPr id="3" name="Notes Placeholder 2"/>
+          <p:cNvSpPr>
+            <a:spLocks noGrp="1"/>
+          </p:cNvSpPr>
+          <p:nvPr>
+            <p:ph type="body" idx="1"/>
+          </p:nvPr>
+        </p:nvSpPr>
+        <p:spPr/>
+        <p:txBody>
+          <a:bodyPr/>
+          <a:lstStyle/>
+          <a:p>
+            <a:r>
+              <a:rPr lang="en-US" dirty="0"/>
+              <a:t>DP 간 결합을 명시하는 것이 DP 문서의 가치를 높인다.</a:t>
+            </a:r>
+            <a:endParaRPr lang="en-US" dirty="0"/>
+          </a:p>
+        </p:txBody>
+      </p:sp>
+      <p:sp>
+        <p:nvSpPr>
+          <p:cNvPr id="4" name="Slide Number Placeholder 3"/>
+          <p:cNvSpPr>
+            <a:spLocks noGrp="1"/>
+          </p:cNvSpPr>
+          <p:nvPr>
+            <p:ph type="sldNum" sz="quarter" idx="10"/>
+          </p:nvPr>
+        </p:nvSpPr>
+        <p:spPr/>
+        <p:txBody>
+          <a:bodyPr/>
+          <a:lstStyle/>
+          <a:p>
+            <a:fld id="{F7021451-1387-4CA6-816F-3879F97B5CBC}" type="slidenum">
+              <a:rPr lang="en-US"/>
+              <a:t>18</a:t>
+            </a:fld>
+            <a:endParaRPr lang="en-US"/>
+          </a:p>
+        </p:txBody>
+      </p:sp>
+    </p:spTree>
+    <p:extLst>
+      <p:ext uri="{BB962C8B-B14F-4D97-AF65-F5344CB8AC3E}">
+        <p14:creationId xmlns:p14="http://schemas.microsoft.com/office/powerpoint/2010/main" val="1024086991"/>
+      </p:ext>
+    </p:extLst>
+  </p:cSld>
+  <p:clrMapOvr>
+    <a:masterClrMapping/>
+  </p:clrMapOvr>
+</p:notes>
+</file>
+
+<file path=ppt/notesSlides/notesSlide19.xml><?xml version="1.0" encoding="utf-8"?>
+<p:notes xmlns:a="http://schemas.openxmlformats.org/drawingml/2006/main" xmlns:r="http://schemas.openxmlformats.org/officeDocument/2006/relationships" xmlns:p="http://schemas.openxmlformats.org/presentationml/2006/main">
+  <p:cSld>
+    <p:spTree>
+      <p:nvGrpSpPr>
+        <p:cNvPr id="1" name=""/>
+        <p:cNvGrpSpPr/>
+        <p:nvPr/>
+      </p:nvGrpSpPr>
+      <p:grpSpPr>
+        <a:xfrm>
+          <a:off x="0" y="0"/>
+          <a:ext cx="0" cy="0"/>
+          <a:chOff x="0" y="0"/>
+          <a:chExt cx="0" cy="0"/>
+        </a:xfrm>
+      </p:grpSpPr>
+      <p:sp>
+        <p:nvSpPr>
+          <p:cNvPr id="2" name="Slide Image Placeholder 1"/>
+          <p:cNvSpPr>
+            <a:spLocks noGrp="1" noRot="1" noChangeAspect="1"/>
+          </p:cNvSpPr>
+          <p:nvPr>
+            <p:ph type="sldImg"/>
+          </p:nvPr>
+        </p:nvSpPr>
+        <p:spPr/>
+      </p:sp>
+      <p:sp>
+        <p:nvSpPr>
+          <p:cNvPr id="3" name="Notes Placeholder 2"/>
+          <p:cNvSpPr>
+            <a:spLocks noGrp="1"/>
+          </p:cNvSpPr>
+          <p:nvPr>
+            <p:ph type="body" idx="1"/>
+          </p:nvPr>
+        </p:nvSpPr>
+        <p:spPr/>
+        <p:txBody>
+          <a:bodyPr/>
+          <a:lstStyle/>
+          <a:p>
+            <a:r>
+              <a:rPr lang="en-US" dirty="0"/>
+              <a:t>결론은 조건부 선택 + 재검증 계획 + 잔여 인계 세 가지로 닫는다.</a:t>
+            </a:r>
+            <a:endParaRPr lang="en-US" dirty="0"/>
+          </a:p>
+        </p:txBody>
+      </p:sp>
+      <p:sp>
+        <p:nvSpPr>
+          <p:cNvPr id="4" name="Slide Number Placeholder 3"/>
+          <p:cNvSpPr>
+            <a:spLocks noGrp="1"/>
+          </p:cNvSpPr>
+          <p:nvPr>
+            <p:ph type="sldNum" sz="quarter" idx="10"/>
+          </p:nvPr>
+        </p:nvSpPr>
+        <p:spPr/>
+        <p:txBody>
+          <a:bodyPr/>
+          <a:lstStyle/>
+          <a:p>
+            <a:fld id="{F7021451-1387-4CA6-816F-3879F97B5CBC}" type="slidenum">
+              <a:rPr lang="en-US"/>
+              <a:t>19</a:t>
             </a:fld>
             <a:endParaRPr lang="en-US"/>
           </a:p>
@@ -2796,7 +2974,7 @@
                 <a:ea typeface="Arial" pitchFamily="34" charset="-122"/>
                 <a:cs typeface="Arial" pitchFamily="34" charset="-120"/>
               </a:rPr>
-              <a:t>DP1 · 9 / 17</a:t>
+              <a:t>DP1 · 9 / 19</a:t>
             </a:r>
             <a:endParaRPr lang="en-US" sz="850" dirty="0"/>
           </a:p>
@@ -5952,7 +6130,7 @@
                 <a:ea typeface="Arial" pitchFamily="34" charset="-122"/>
                 <a:cs typeface="Arial" pitchFamily="34" charset="-120"/>
               </a:rPr>
-              <a:t>DP1 · 10 / 17</a:t>
+              <a:t>DP1 · 10 / 19</a:t>
             </a:r>
             <a:endParaRPr lang="en-US" sz="850" dirty="0"/>
           </a:p>
@@ -6473,7 +6651,7 @@
                           <a:ea typeface="Arial" pitchFamily="34" charset="-122"/>
                           <a:cs typeface="Arial" pitchFamily="34" charset="-120"/>
                         </a:rPr>
-                        <a:t>구분 가능 등급 1종 vs 8종. C1은 상위 tier 점유가 도착 순서로 결정됨 (컴포넌트)</a:t>
+                        <a:t>구분 가능 등급 1종 vs 8종. C1은 상위 tier 점유가 도착 순서로 결정됨. C2의 ★★★는 분류가 맞고 유보량이 적절할 때의 값이다</a:t>
                       </a:r>
                       <a:endParaRPr lang="en-US" sz="950" dirty="0">
                         <a:latin typeface="Arial" charset="0"/>
@@ -7729,7 +7907,7 @@
                 <a:ea typeface="Arial" pitchFamily="34" charset="-122"/>
                 <a:cs typeface="Arial" pitchFamily="34" charset="-120"/>
               </a:rPr>
-              <a:t>DP1 · 11 / 17</a:t>
+              <a:t>DP1 · 11 / 19</a:t>
             </a:r>
             <a:endParaRPr lang="en-US" sz="850" dirty="0"/>
           </a:p>
@@ -9276,7 +9454,7 @@
                 <a:ea typeface="Arial" pitchFamily="34" charset="-122"/>
                 <a:cs typeface="Arial" pitchFamily="34" charset="-120"/>
               </a:rPr>
-              <a:t>DP1 · 12 / 17</a:t>
+              <a:t>DP1 · 12 / 19</a:t>
             </a:r>
             <a:endParaRPr lang="en-US" sz="850" dirty="0"/>
           </a:p>
@@ -12569,7 +12747,7 @@
                 <a:ea typeface="Arial" pitchFamily="34" charset="-122"/>
                 <a:cs typeface="Arial" pitchFamily="34" charset="-120"/>
               </a:rPr>
-              <a:t>DP1 · 13 / 17</a:t>
+              <a:t>DP1 · 13 / 19</a:t>
             </a:r>
             <a:endParaRPr lang="en-US" sz="850" dirty="0"/>
           </a:p>
@@ -12700,7 +12878,7 @@
                 <a:ea typeface="Arial" pitchFamily="34" charset="-122"/>
                 <a:cs typeface="Arial" pitchFamily="34" charset="-120"/>
               </a:rPr>
-              <a:t>그리고 C2가 QA1에서 얻는 이득은 출력 길이·재사용 예측 정확도에 전적으로 의존하는데, 그 값이 아직 측정되지 않았다. 미측정 상태에서 C2를 고르면 QA2 비용과 QA3 고착은 확실히 지불하고 QA1 이득은 불확실하다.</a:t>
+              <a:t>그리고 C2를 최선 형태(블록 단위 비용 모델)로 세워 실측해도, C2가 QA1에서 얻는 이득은 아직 알 수 없는 값 두 가지에 걸려 있다.</a:t>
             </a:r>
             <a:endParaRPr lang="en-US" sz="1050" dirty="0"/>
           </a:p>
@@ -12708,14 +12886,41 @@
       </p:sp>
       <p:sp>
         <p:nvSpPr>
-          <p:cNvPr id="8" name="Text 6"/>
+          <p:cNvPr id="8" name="Shape 6"/>
+          <p:cNvSpPr/>
+          <p:nvPr/>
+        </p:nvSpPr>
+        <p:spPr>
+          <a:xfrm>
+            <a:off x="457200" y="2578608"/>
+            <a:ext cx="5495544" cy="859536"/>
+          </a:xfrm>
+          <a:prstGeom prst="roundRect">
+            <a:avLst>
+              <a:gd name="adj" fmla="val 5319"/>
+            </a:avLst>
+          </a:prstGeom>
+          <a:solidFill>
+            <a:srgbClr val="FFFFFF"/>
+          </a:solidFill>
+          <a:ln w="9525">
+            <a:solidFill>
+              <a:srgbClr val="B0503F"/>
+            </a:solidFill>
+            <a:prstDash val="solid"/>
+          </a:ln>
+        </p:spPr>
+      </p:sp>
+      <p:sp>
+        <p:nvSpPr>
+          <p:cNvPr id="9" name="Text 7"/>
           <p:cNvSpPr txBox="1"/>
           <p:nvPr/>
         </p:nvSpPr>
         <p:spPr>
           <a:xfrm>
-            <a:off x="457200" y="2688336"/>
-            <a:ext cx="5486400" cy="237744"/>
+            <a:off x="603504" y="2651760"/>
+            <a:ext cx="5202936" cy="237744"/>
           </a:xfrm>
           <a:prstGeom prst="rect">
             <a:avLst/>
@@ -12734,34 +12939,271 @@
               <a:buNone/>
             </a:pPr>
             <a:r>
-              <a:rPr lang="en-US" sz="1050" b="1" dirty="0">
-                <a:solidFill>
-                  <a:srgbClr val="7B8794"/>
-                </a:solidFill>
-                <a:latin typeface="Arial" pitchFamily="34" charset="0"/>
-                <a:ea typeface="Arial" pitchFamily="34" charset="-122"/>
-                <a:cs typeface="Arial" pitchFamily="34" charset="-120"/>
-              </a:rPr>
-              <a:t>포기한 축과 완화책</a:t>
-            </a:r>
-            <a:endParaRPr lang="en-US" sz="1050" dirty="0"/>
-          </a:p>
-        </p:txBody>
-      </p:sp>
-      <p:sp>
-        <p:nvSpPr>
-          <p:cNvPr id="9" name="Shape 7"/>
+              <a:rPr lang="en-US" sz="1100" b="1" dirty="0">
+                <a:solidFill>
+                  <a:srgbClr val="B0503F"/>
+                </a:solidFill>
+                <a:latin typeface="Arial" pitchFamily="34" charset="0"/>
+                <a:ea typeface="Arial" pitchFamily="34" charset="-122"/>
+                <a:cs typeface="Arial" pitchFamily="34" charset="-120"/>
+              </a:rPr>
+              <a:t>① 수명 예측 정확도</a:t>
+            </a:r>
+            <a:endParaRPr lang="en-US" sz="1100" dirty="0"/>
+          </a:p>
+        </p:txBody>
+      </p:sp>
+      <p:sp>
+        <p:nvSpPr>
+          <p:cNvPr id="10" name="Text 8"/>
+          <p:cNvSpPr txBox="1"/>
+          <p:nvPr/>
+        </p:nvSpPr>
+        <p:spPr>
+          <a:xfrm>
+            <a:off x="603504" y="2889504"/>
+            <a:ext cx="5202936" cy="512064"/>
+          </a:xfrm>
+          <a:prstGeom prst="rect">
+            <a:avLst/>
+          </a:prstGeom>
+          <a:noFill/>
+          <a:ln/>
+        </p:spPr>
+        <p:txBody>
+          <a:bodyPr wrap="square" lIns="0" tIns="0" rIns="0" bIns="0" rtlCol="0" anchor="t"/>
+          <a:lstStyle/>
+          <a:p>
+            <a:pPr algn="l" indent="0" marL="0">
+              <a:lnSpc>
+                <a:spcPct val="118000"/>
+              </a:lnSpc>
+              <a:buNone/>
+            </a:pPr>
+            <a:r>
+              <a:rPr lang="en-US" sz="950" dirty="0">
+                <a:solidFill>
+                  <a:srgbClr val="3E4C59"/>
+                </a:solidFill>
+                <a:latin typeface="Arial" pitchFamily="34" charset="0"/>
+                <a:ea typeface="Arial" pitchFamily="34" charset="-122"/>
+                <a:cs typeface="Arial" pitchFamily="34" charset="-120"/>
+              </a:rPr>
+              <a:t>크기가 가치·가격에서 상쇄되고 나면 배치를 가르는 것은 블록당 읽기 강도뿐인데, 그 주성분인 수명은 할당 시점에 관측 불가</a:t>
+            </a:r>
+            <a:endParaRPr lang="en-US" sz="950" dirty="0"/>
+          </a:p>
+        </p:txBody>
+      </p:sp>
+      <p:sp>
+        <p:nvSpPr>
+          <p:cNvPr id="11" name="Shape 9"/>
           <p:cNvSpPr/>
           <p:nvPr/>
         </p:nvSpPr>
         <p:spPr>
           <a:xfrm>
-            <a:off x="457200" y="2962656"/>
-            <a:ext cx="5486400" cy="1005840"/>
+            <a:off x="6208776" y="2578608"/>
+            <a:ext cx="5495544" cy="859536"/>
           </a:xfrm>
           <a:prstGeom prst="roundRect">
             <a:avLst>
-              <a:gd name="adj" fmla="val 4545"/>
+              <a:gd name="adj" fmla="val 5319"/>
+            </a:avLst>
+          </a:prstGeom>
+          <a:solidFill>
+            <a:srgbClr val="FFFFFF"/>
+          </a:solidFill>
+          <a:ln w="9525">
+            <a:solidFill>
+              <a:srgbClr val="B0503F"/>
+            </a:solidFill>
+            <a:prstDash val="solid"/>
+          </a:ln>
+        </p:spPr>
+      </p:sp>
+      <p:sp>
+        <p:nvSpPr>
+          <p:cNvPr id="12" name="Text 10"/>
+          <p:cNvSpPr txBox="1"/>
+          <p:nvPr/>
+        </p:nvSpPr>
+        <p:spPr>
+          <a:xfrm>
+            <a:off x="6355080" y="2651760"/>
+            <a:ext cx="5202936" cy="237744"/>
+          </a:xfrm>
+          <a:prstGeom prst="rect">
+            <a:avLst/>
+          </a:prstGeom>
+          <a:noFill/>
+          <a:ln/>
+        </p:spPr>
+        <p:txBody>
+          <a:bodyPr wrap="square" lIns="0" tIns="0" rIns="0" bIns="0" rtlCol="0" anchor="t"/>
+          <a:lstStyle/>
+          <a:p>
+            <a:pPr algn="l" indent="0" marL="0">
+              <a:lnSpc>
+                <a:spcPct val="115000"/>
+              </a:lnSpc>
+              <a:buNone/>
+            </a:pPr>
+            <a:r>
+              <a:rPr lang="en-US" sz="1100" b="1" dirty="0">
+                <a:solidFill>
+                  <a:srgbClr val="B0503F"/>
+                </a:solidFill>
+                <a:latin typeface="Arial" pitchFamily="34" charset="0"/>
+                <a:ea typeface="Arial" pitchFamily="34" charset="-122"/>
+                <a:cs typeface="Arial" pitchFamily="34" charset="-120"/>
+              </a:rPr>
+              <a:t>② 유보량</a:t>
+            </a:r>
+            <a:endParaRPr lang="en-US" sz="1100" dirty="0"/>
+          </a:p>
+        </p:txBody>
+      </p:sp>
+      <p:sp>
+        <p:nvSpPr>
+          <p:cNvPr id="13" name="Text 11"/>
+          <p:cNvSpPr txBox="1"/>
+          <p:nvPr/>
+        </p:nvSpPr>
+        <p:spPr>
+          <a:xfrm>
+            <a:off x="6355080" y="2889504"/>
+            <a:ext cx="5202936" cy="512064"/>
+          </a:xfrm>
+          <a:prstGeom prst="rect">
+            <a:avLst/>
+          </a:prstGeom>
+          <a:noFill/>
+          <a:ln/>
+        </p:spPr>
+        <p:txBody>
+          <a:bodyPr wrap="square" lIns="0" tIns="0" rIns="0" bIns="0" rtlCol="0" anchor="t"/>
+          <a:lstStyle/>
+          <a:p>
+            <a:pPr algn="l" indent="0" marL="0">
+              <a:lnSpc>
+                <a:spcPct val="118000"/>
+              </a:lnSpc>
+              <a:buNone/>
+            </a:pPr>
+            <a:r>
+              <a:rPr lang="en-US" sz="950" dirty="0">
+                <a:solidFill>
+                  <a:srgbClr val="3E4C59"/>
+                </a:solidFill>
+                <a:latin typeface="Arial" pitchFamily="34" charset="0"/>
+                <a:ea typeface="Arial" pitchFamily="34" charset="-122"/>
+                <a:cs typeface="Arial" pitchFamily="34" charset="-120"/>
+              </a:rPr>
+              <a:t>유보하지 않으면 구분 지표가 2.11로 C1(2.06)과 같아져 객체 축을 쓴 이득이 0이 된다</a:t>
+            </a:r>
+            <a:endParaRPr lang="en-US" sz="950" dirty="0"/>
+          </a:p>
+        </p:txBody>
+      </p:sp>
+      <p:sp>
+        <p:nvSpPr>
+          <p:cNvPr id="14" name="Text 12"/>
+          <p:cNvSpPr txBox="1"/>
+          <p:nvPr/>
+        </p:nvSpPr>
+        <p:spPr>
+          <a:xfrm>
+            <a:off x="457200" y="3529584"/>
+            <a:ext cx="11247120" cy="219456"/>
+          </a:xfrm>
+          <a:prstGeom prst="rect">
+            <a:avLst/>
+          </a:prstGeom>
+          <a:noFill/>
+          <a:ln/>
+        </p:spPr>
+        <p:txBody>
+          <a:bodyPr wrap="square" lIns="0" tIns="0" rIns="0" bIns="0" rtlCol="0" anchor="t"/>
+          <a:lstStyle/>
+          <a:p>
+            <a:pPr algn="l" indent="0" marL="0">
+              <a:lnSpc>
+                <a:spcPct val="115000"/>
+              </a:lnSpc>
+              <a:buNone/>
+            </a:pPr>
+            <a:r>
+              <a:rPr lang="en-US" sz="1000" i="1" dirty="0">
+                <a:solidFill>
+                  <a:srgbClr val="7B8794"/>
+                </a:solidFill>
+                <a:latin typeface="Arial" pitchFamily="34" charset="0"/>
+                <a:ea typeface="Arial" pitchFamily="34" charset="-122"/>
+                <a:cs typeface="Arial" pitchFamily="34" charset="-120"/>
+              </a:rPr>
+              <a:t>둘 중 ②가 더 나쁘다 — 예측 정확도는 로그로 사후 측정이라도 되지만, 적정 유보량은 아직 오지 않은 요청의 분포에 달려 있어 요청별로 잴 수조차 없다.</a:t>
+            </a:r>
+            <a:endParaRPr lang="en-US" sz="1000" dirty="0"/>
+          </a:p>
+        </p:txBody>
+      </p:sp>
+      <p:sp>
+        <p:nvSpPr>
+          <p:cNvPr id="15" name="Text 13"/>
+          <p:cNvSpPr txBox="1"/>
+          <p:nvPr/>
+        </p:nvSpPr>
+        <p:spPr>
+          <a:xfrm>
+            <a:off x="457200" y="3785616"/>
+            <a:ext cx="5486400" cy="237744"/>
+          </a:xfrm>
+          <a:prstGeom prst="rect">
+            <a:avLst/>
+          </a:prstGeom>
+          <a:noFill/>
+          <a:ln/>
+        </p:spPr>
+        <p:txBody>
+          <a:bodyPr wrap="square" lIns="0" tIns="0" rIns="0" bIns="0" rtlCol="0" anchor="t"/>
+          <a:lstStyle/>
+          <a:p>
+            <a:pPr algn="l" indent="0" marL="0">
+              <a:lnSpc>
+                <a:spcPct val="115000"/>
+              </a:lnSpc>
+              <a:buNone/>
+            </a:pPr>
+            <a:r>
+              <a:rPr lang="en-US" sz="1050" b="1" dirty="0">
+                <a:solidFill>
+                  <a:srgbClr val="7B8794"/>
+                </a:solidFill>
+                <a:latin typeface="Arial" pitchFamily="34" charset="0"/>
+                <a:ea typeface="Arial" pitchFamily="34" charset="-122"/>
+                <a:cs typeface="Arial" pitchFamily="34" charset="-120"/>
+              </a:rPr>
+              <a:t>포기한 축과 완화책</a:t>
+            </a:r>
+            <a:endParaRPr lang="en-US" sz="1050" dirty="0"/>
+          </a:p>
+        </p:txBody>
+      </p:sp>
+      <p:sp>
+        <p:nvSpPr>
+          <p:cNvPr id="16" name="Shape 14"/>
+          <p:cNvSpPr/>
+          <p:nvPr/>
+        </p:nvSpPr>
+        <p:spPr>
+          <a:xfrm>
+            <a:off x="457200" y="4059936"/>
+            <a:ext cx="5486400" cy="932688"/>
+          </a:xfrm>
+          <a:prstGeom prst="roundRect">
+            <a:avLst>
+              <a:gd name="adj" fmla="val 4902"/>
             </a:avLst>
           </a:prstGeom>
           <a:solidFill>
@@ -12777,13 +13219,13 @@
       </p:sp>
       <p:sp>
         <p:nvSpPr>
-          <p:cNvPr id="10" name="Text 8"/>
+          <p:cNvPr id="17" name="Text 15"/>
           <p:cNvSpPr txBox="1"/>
           <p:nvPr/>
         </p:nvSpPr>
         <p:spPr>
           <a:xfrm>
-            <a:off x="621792" y="3054096"/>
+            <a:off x="621792" y="4151376"/>
             <a:ext cx="5157216" cy="237744"/>
           </a:xfrm>
           <a:prstGeom prst="rect">
@@ -12819,13 +13261,13 @@
       </p:sp>
       <p:sp>
         <p:nvSpPr>
-          <p:cNvPr id="11" name="Text 9"/>
+          <p:cNvPr id="18" name="Text 16"/>
           <p:cNvSpPr txBox="1"/>
           <p:nvPr/>
         </p:nvSpPr>
         <p:spPr>
           <a:xfrm>
-            <a:off x="621792" y="3310128"/>
+            <a:off x="621792" y="4407408"/>
             <a:ext cx="5157216" cy="329184"/>
           </a:xfrm>
           <a:prstGeom prst="rect">
@@ -12861,14 +13303,14 @@
       </p:sp>
       <p:sp>
         <p:nvSpPr>
-          <p:cNvPr id="12" name="Text 10"/>
+          <p:cNvPr id="19" name="Text 17"/>
           <p:cNvSpPr txBox="1"/>
           <p:nvPr/>
         </p:nvSpPr>
         <p:spPr>
           <a:xfrm>
-            <a:off x="621792" y="3675888"/>
-            <a:ext cx="5157216" cy="237744"/>
+            <a:off x="621792" y="4736592"/>
+            <a:ext cx="5157216" cy="219456"/>
           </a:xfrm>
           <a:prstGeom prst="rect">
             <a:avLst/>
@@ -12903,18 +13345,18 @@
       </p:sp>
       <p:sp>
         <p:nvSpPr>
-          <p:cNvPr id="13" name="Shape 11"/>
+          <p:cNvPr id="20" name="Shape 18"/>
           <p:cNvSpPr/>
           <p:nvPr/>
         </p:nvSpPr>
         <p:spPr>
           <a:xfrm>
-            <a:off x="457200" y="4078224"/>
-            <a:ext cx="5486400" cy="1005840"/>
+            <a:off x="457200" y="5065776"/>
+            <a:ext cx="5486400" cy="932688"/>
           </a:xfrm>
           <a:prstGeom prst="roundRect">
             <a:avLst>
-              <a:gd name="adj" fmla="val 4545"/>
+              <a:gd name="adj" fmla="val 4902"/>
             </a:avLst>
           </a:prstGeom>
           <a:solidFill>
@@ -12930,13 +13372,13 @@
       </p:sp>
       <p:sp>
         <p:nvSpPr>
-          <p:cNvPr id="14" name="Text 12"/>
+          <p:cNvPr id="21" name="Text 19"/>
           <p:cNvSpPr txBox="1"/>
           <p:nvPr/>
         </p:nvSpPr>
         <p:spPr>
           <a:xfrm>
-            <a:off x="621792" y="4169664"/>
+            <a:off x="621792" y="5157216"/>
             <a:ext cx="5157216" cy="237744"/>
           </a:xfrm>
           <a:prstGeom prst="rect">
@@ -12972,13 +13414,13 @@
       </p:sp>
       <p:sp>
         <p:nvSpPr>
-          <p:cNvPr id="15" name="Text 13"/>
+          <p:cNvPr id="22" name="Text 20"/>
           <p:cNvSpPr txBox="1"/>
           <p:nvPr/>
         </p:nvSpPr>
         <p:spPr>
           <a:xfrm>
-            <a:off x="621792" y="4425696"/>
+            <a:off x="621792" y="5413248"/>
             <a:ext cx="5157216" cy="329184"/>
           </a:xfrm>
           <a:prstGeom prst="rect">
@@ -13014,14 +13456,14 @@
       </p:sp>
       <p:sp>
         <p:nvSpPr>
-          <p:cNvPr id="16" name="Text 14"/>
+          <p:cNvPr id="23" name="Text 21"/>
           <p:cNvSpPr txBox="1"/>
           <p:nvPr/>
         </p:nvSpPr>
         <p:spPr>
           <a:xfrm>
-            <a:off x="621792" y="4791456"/>
-            <a:ext cx="5157216" cy="237744"/>
+            <a:off x="621792" y="5742432"/>
+            <a:ext cx="5157216" cy="219456"/>
           </a:xfrm>
           <a:prstGeom prst="rect">
             <a:avLst/>
@@ -13056,13 +13498,13 @@
       </p:sp>
       <p:sp>
         <p:nvSpPr>
-          <p:cNvPr id="17" name="Text 15"/>
+          <p:cNvPr id="24" name="Text 22"/>
           <p:cNvSpPr txBox="1"/>
           <p:nvPr/>
         </p:nvSpPr>
         <p:spPr>
           <a:xfrm>
-            <a:off x="6217920" y="2688336"/>
+            <a:off x="6217920" y="3785616"/>
             <a:ext cx="5486400" cy="237744"/>
           </a:xfrm>
           <a:prstGeom prst="rect">
@@ -13098,18 +13540,18 @@
       </p:sp>
       <p:sp>
         <p:nvSpPr>
-          <p:cNvPr id="18" name="Shape 16"/>
+          <p:cNvPr id="25" name="Shape 23"/>
           <p:cNvSpPr/>
           <p:nvPr/>
         </p:nvSpPr>
         <p:spPr>
           <a:xfrm>
-            <a:off x="6217920" y="2962656"/>
-            <a:ext cx="5486400" cy="2121408"/>
+            <a:off x="6217920" y="4059936"/>
+            <a:ext cx="5486400" cy="2029968"/>
           </a:xfrm>
           <a:prstGeom prst="roundRect">
             <a:avLst>
-              <a:gd name="adj" fmla="val 2155"/>
+              <a:gd name="adj" fmla="val 2252"/>
             </a:avLst>
           </a:prstGeom>
           <a:solidFill>
@@ -13125,13 +13567,13 @@
       </p:sp>
       <p:sp>
         <p:nvSpPr>
-          <p:cNvPr id="19" name="Text 17"/>
+          <p:cNvPr id="26" name="Text 24"/>
           <p:cNvSpPr txBox="1"/>
           <p:nvPr/>
         </p:nvSpPr>
         <p:spPr>
           <a:xfrm>
-            <a:off x="6382512" y="3090672"/>
+            <a:off x="6382512" y="4169664"/>
             <a:ext cx="5157216" cy="274320"/>
           </a:xfrm>
           <a:prstGeom prst="rect">
@@ -13167,14 +13609,14 @@
       </p:sp>
       <p:sp>
         <p:nvSpPr>
-          <p:cNvPr id="20" name="Text 18"/>
+          <p:cNvPr id="27" name="Text 25"/>
           <p:cNvSpPr txBox="1"/>
           <p:nvPr/>
         </p:nvSpPr>
         <p:spPr>
           <a:xfrm>
-            <a:off x="6382512" y="3438144"/>
-            <a:ext cx="5157216" cy="1517904"/>
+            <a:off x="6382512" y="4498848"/>
+            <a:ext cx="5157216" cy="1481328"/>
           </a:xfrm>
           <a:prstGeom prst="rect">
             <a:avLst/>
@@ -13280,75 +13722,6 @@
               <a:t>인덱스 축이 바뀌지 않았으므로 3.3장의 배타성 논증은 그대로 유효하다</a:t>
             </a:r>
             <a:endParaRPr lang="en-US" sz="950" dirty="0"/>
-          </a:p>
-        </p:txBody>
-      </p:sp>
-      <p:sp>
-        <p:nvSpPr>
-          <p:cNvPr id="21" name="Shape 19"/>
-          <p:cNvSpPr/>
-          <p:nvPr/>
-        </p:nvSpPr>
-        <p:spPr>
-          <a:xfrm>
-            <a:off x="457200" y="5230368"/>
-            <a:ext cx="11247120" cy="822960"/>
-          </a:xfrm>
-          <a:prstGeom prst="roundRect">
-            <a:avLst>
-              <a:gd name="adj" fmla="val 5556"/>
-            </a:avLst>
-          </a:prstGeom>
-          <a:solidFill>
-            <a:srgbClr val="FDF6E7"/>
-          </a:solidFill>
-          <a:ln w="9525">
-            <a:solidFill>
-              <a:srgbClr val="B7791F"/>
-            </a:solidFill>
-            <a:prstDash val="solid"/>
-          </a:ln>
-        </p:spPr>
-      </p:sp>
-      <p:sp>
-        <p:nvSpPr>
-          <p:cNvPr id="22" name="Text 20"/>
-          <p:cNvSpPr txBox="1"/>
-          <p:nvPr/>
-        </p:nvSpPr>
-        <p:spPr>
-          <a:xfrm>
-            <a:off x="658368" y="5230368"/>
-            <a:ext cx="10844784" cy="822960"/>
-          </a:xfrm>
-          <a:prstGeom prst="rect">
-            <a:avLst/>
-          </a:prstGeom>
-          <a:noFill/>
-          <a:ln/>
-        </p:spPr>
-        <p:txBody>
-          <a:bodyPr wrap="square" lIns="0" tIns="0" rIns="0" bIns="0" rtlCol="0" anchor="ctr"/>
-          <a:lstStyle/>
-          <a:p>
-            <a:pPr algn="l" indent="0" marL="0">
-              <a:lnSpc>
-                <a:spcPct val="115000"/>
-              </a:lnSpc>
-              <a:buNone/>
-            </a:pPr>
-            <a:r>
-              <a:rPr lang="en-US" sz="1100" b="1" dirty="0">
-                <a:solidFill>
-                  <a:srgbClr val="1F2933"/>
-                </a:solidFill>
-                <a:latin typeface="Arial" pitchFamily="34" charset="0"/>
-                <a:ea typeface="Arial" pitchFamily="34" charset="-122"/>
-                <a:cs typeface="Arial" pitchFamily="34" charset="-120"/>
-              </a:rPr>
-              <a:t>혼합을 최종안으로 삼는다면 "왜 처음부터 후보가 아니었는가"에 답해야 한다. 여기서는 진짜 혼합이 아니므로 그 부담이 없다 — 정직하게 "C1 선택 + 보강"으로 부른다.</a:t>
-            </a:r>
-            <a:endParaRPr lang="en-US" sz="1100" dirty="0"/>
           </a:p>
         </p:txBody>
       </p:sp>
@@ -13534,7 +13907,7 @@
                 <a:ea typeface="Arial" pitchFamily="34" charset="-122"/>
                 <a:cs typeface="Arial" pitchFamily="34" charset="-120"/>
               </a:rPr>
-              <a:t>DP1 · 14 / 17</a:t>
+              <a:t>DP1 · 14 / 19</a:t>
             </a:r>
             <a:endParaRPr lang="en-US" sz="850" dirty="0"/>
           </a:p>
@@ -13555,7 +13928,7 @@
           </p:nvPr>
         </p:nvGraphicFramePr>
         <p:xfrm>
-          <a:off x="457200" y="1572768"/>
+          <a:off x="457200" y="1517904"/>
           <a:ext cx="11247120" cy="914400"/>
         </p:xfrm>
         <a:graphic>
@@ -13567,7 +13940,7 @@
                 <a:gridCol w="4663440"/>
                 <a:gridCol w="3749040"/>
               </a:tblGrid>
-              <a:tr h="347472">
+              <a:tr h="310896">
                 <a:tc>
                   <a:txBody>
                     <a:bodyPr/>
@@ -13773,7 +14146,7 @@
                   </a:tcPr>
                 </a:tc>
               </a:tr>
-              <a:tr h="841248">
+              <a:tr h="676656">
                 <a:tc>
                   <a:txBody>
                     <a:bodyPr/>
@@ -13970,7 +14343,7 @@
                   </a:tcPr>
                 </a:tc>
               </a:tr>
-              <a:tr h="841248">
+              <a:tr h="621792">
                 <a:tc>
                   <a:txBody>
                     <a:bodyPr/>
@@ -14167,7 +14540,7 @@
                   </a:tcPr>
                 </a:tc>
               </a:tr>
-              <a:tr h="841248">
+              <a:tr h="621792">
                 <a:tc>
                   <a:txBody>
                     <a:bodyPr/>
@@ -14364,6 +14737,203 @@
                   </a:tcPr>
                 </a:tc>
               </a:tr>
+              <a:tr h="731520">
+                <a:tc>
+                  <a:txBody>
+                    <a:bodyPr/>
+                    <a:lstStyle/>
+                    <a:p>
+                      <a:pPr indent="0" marL="0">
+                        <a:buNone/>
+                      </a:pPr>
+                      <a:r>
+                        <a:rPr lang="en-US" sz="1000" b="1" dirty="0">
+                          <a:solidFill>
+                            <a:srgbClr val="1F2933"/>
+                          </a:solidFill>
+                          <a:latin typeface="Arial" pitchFamily="34" charset="0"/>
+                          <a:ea typeface="Arial" pitchFamily="34" charset="-122"/>
+                          <a:cs typeface="Arial" pitchFamily="34" charset="-120"/>
+                        </a:rPr>
+                        <a:t>유보량 민감도</a:t>
+                      </a:r>
+                      <a:endParaRPr lang="en-US" sz="1000" dirty="0">
+                        <a:latin typeface="Arial" charset="0"/>
+                        <a:ea typeface="Arial" charset="0"/>
+                        <a:cs typeface="Arial" charset="0"/>
+                      </a:endParaRPr>
+                    </a:p>
+                  </a:txBody>
+                  <a:tcPr marL="101600" marR="101600" marT="63500" marB="63500" anchor="ctr">
+                    <a:lnL w="9525" cap="flat" cmpd="sng" algn="ctr">
+                      <a:solidFill>
+                        <a:srgbClr val="DCE1E7"/>
+                      </a:solidFill>
+                      <a:prstDash val="solid"/>
+                      <a:round/>
+                      <a:headEnd type="none" w="med" len="med"/>
+                      <a:tailEnd type="none" w="med" len="med"/>
+                    </a:lnL>
+                    <a:lnR w="9525" cap="flat" cmpd="sng" algn="ctr">
+                      <a:solidFill>
+                        <a:srgbClr val="DCE1E7"/>
+                      </a:solidFill>
+                      <a:prstDash val="solid"/>
+                      <a:round/>
+                      <a:headEnd type="none" w="med" len="med"/>
+                      <a:tailEnd type="none" w="med" len="med"/>
+                    </a:lnR>
+                    <a:lnT w="9525" cap="flat" cmpd="sng" algn="ctr">
+                      <a:solidFill>
+                        <a:srgbClr val="DCE1E7"/>
+                      </a:solidFill>
+                      <a:prstDash val="solid"/>
+                      <a:round/>
+                      <a:headEnd type="none" w="med" len="med"/>
+                      <a:tailEnd type="none" w="med" len="med"/>
+                    </a:lnT>
+                    <a:lnB w="9525" cap="flat" cmpd="sng" algn="ctr">
+                      <a:solidFill>
+                        <a:srgbClr val="DCE1E7"/>
+                      </a:solidFill>
+                      <a:prstDash val="solid"/>
+                      <a:round/>
+                      <a:headEnd type="none" w="med" len="med"/>
+                      <a:tailEnd type="none" w="med" len="med"/>
+                    </a:lnB>
+                  </a:tcPr>
+                </a:tc>
+                <a:tc>
+                  <a:txBody>
+                    <a:bodyPr/>
+                    <a:lstStyle/>
+                    <a:p>
+                      <a:pPr indent="0" marL="0">
+                        <a:buNone/>
+                      </a:pPr>
+                      <a:r>
+                        <a:rPr lang="en-US" sz="950" dirty="0">
+                          <a:solidFill>
+                            <a:srgbClr val="3E4C59"/>
+                          </a:solidFill>
+                          <a:latin typeface="Arial" pitchFamily="34" charset="0"/>
+                          <a:ea typeface="Arial" pitchFamily="34" charset="-122"/>
+                          <a:cs typeface="Arial" pitchFamily="34" charset="-120"/>
+                        </a:rPr>
+                        <a:t>C2 비용 모델에서 상위 tier 유보 비율을 0~50 %로 훑으며 구분 지표와 활용률 곡선을 그린다</a:t>
+                      </a:r>
+                      <a:endParaRPr lang="en-US" sz="950" dirty="0">
+                        <a:latin typeface="Arial" charset="0"/>
+                        <a:ea typeface="Arial" charset="0"/>
+                        <a:cs typeface="Arial" charset="0"/>
+                      </a:endParaRPr>
+                    </a:p>
+                  </a:txBody>
+                  <a:tcPr marL="101600" marR="101600" marT="63500" marB="63500" anchor="ctr">
+                    <a:lnL w="9525" cap="flat" cmpd="sng" algn="ctr">
+                      <a:solidFill>
+                        <a:srgbClr val="DCE1E7"/>
+                      </a:solidFill>
+                      <a:prstDash val="solid"/>
+                      <a:round/>
+                      <a:headEnd type="none" w="med" len="med"/>
+                      <a:tailEnd type="none" w="med" len="med"/>
+                    </a:lnL>
+                    <a:lnR w="9525" cap="flat" cmpd="sng" algn="ctr">
+                      <a:solidFill>
+                        <a:srgbClr val="DCE1E7"/>
+                      </a:solidFill>
+                      <a:prstDash val="solid"/>
+                      <a:round/>
+                      <a:headEnd type="none" w="med" len="med"/>
+                      <a:tailEnd type="none" w="med" len="med"/>
+                    </a:lnR>
+                    <a:lnT w="9525" cap="flat" cmpd="sng" algn="ctr">
+                      <a:solidFill>
+                        <a:srgbClr val="DCE1E7"/>
+                      </a:solidFill>
+                      <a:prstDash val="solid"/>
+                      <a:round/>
+                      <a:headEnd type="none" w="med" len="med"/>
+                      <a:tailEnd type="none" w="med" len="med"/>
+                    </a:lnT>
+                    <a:lnB w="9525" cap="flat" cmpd="sng" algn="ctr">
+                      <a:solidFill>
+                        <a:srgbClr val="DCE1E7"/>
+                      </a:solidFill>
+                      <a:prstDash val="solid"/>
+                      <a:round/>
+                      <a:headEnd type="none" w="med" len="med"/>
+                      <a:tailEnd type="none" w="med" len="med"/>
+                    </a:lnB>
+                  </a:tcPr>
+                </a:tc>
+                <a:tc>
+                  <a:txBody>
+                    <a:bodyPr/>
+                    <a:lstStyle/>
+                    <a:p>
+                      <a:pPr indent="0" marL="0">
+                        <a:buNone/>
+                      </a:pPr>
+                      <a:r>
+                        <a:rPr lang="en-US" sz="950" b="1" dirty="0">
+                          <a:solidFill>
+                            <a:srgbClr val="0B6E6E"/>
+                          </a:solidFill>
+                          <a:latin typeface="Arial" pitchFamily="34" charset="0"/>
+                          <a:ea typeface="Arial" pitchFamily="34" charset="-122"/>
+                          <a:cs typeface="Arial" pitchFamily="34" charset="-120"/>
+                        </a:rPr>
+                        <a:t>두 지표가 동시에 허용치를 넘는 유보 비율이 없으면 C2는 튜닝 불가능한 구조 → C1 확정</a:t>
+                      </a:r>
+                      <a:endParaRPr lang="en-US" sz="950" dirty="0">
+                        <a:latin typeface="Arial" charset="0"/>
+                        <a:ea typeface="Arial" charset="0"/>
+                        <a:cs typeface="Arial" charset="0"/>
+                      </a:endParaRPr>
+                    </a:p>
+                  </a:txBody>
+                  <a:tcPr marL="101600" marR="101600" marT="63500" marB="63500" anchor="ctr">
+                    <a:lnL w="9525" cap="flat" cmpd="sng" algn="ctr">
+                      <a:solidFill>
+                        <a:srgbClr val="DCE1E7"/>
+                      </a:solidFill>
+                      <a:prstDash val="solid"/>
+                      <a:round/>
+                      <a:headEnd type="none" w="med" len="med"/>
+                      <a:tailEnd type="none" w="med" len="med"/>
+                    </a:lnL>
+                    <a:lnR w="9525" cap="flat" cmpd="sng" algn="ctr">
+                      <a:solidFill>
+                        <a:srgbClr val="DCE1E7"/>
+                      </a:solidFill>
+                      <a:prstDash val="solid"/>
+                      <a:round/>
+                      <a:headEnd type="none" w="med" len="med"/>
+                      <a:tailEnd type="none" w="med" len="med"/>
+                    </a:lnR>
+                    <a:lnT w="9525" cap="flat" cmpd="sng" algn="ctr">
+                      <a:solidFill>
+                        <a:srgbClr val="DCE1E7"/>
+                      </a:solidFill>
+                      <a:prstDash val="solid"/>
+                      <a:round/>
+                      <a:headEnd type="none" w="med" len="med"/>
+                      <a:tailEnd type="none" w="med" len="med"/>
+                    </a:lnT>
+                    <a:lnB w="9525" cap="flat" cmpd="sng" algn="ctr">
+                      <a:solidFill>
+                        <a:srgbClr val="DCE1E7"/>
+                      </a:solidFill>
+                      <a:prstDash val="solid"/>
+                      <a:round/>
+                      <a:headEnd type="none" w="med" len="med"/>
+                      <a:tailEnd type="none" w="med" len="med"/>
+                    </a:lnB>
+                  </a:tcPr>
+                </a:tc>
+              </a:tr>
             </a:tbl>
           </a:graphicData>
         </a:graphic>
@@ -14376,8 +14946,8 @@
         </p:nvSpPr>
         <p:spPr>
           <a:xfrm>
-            <a:off x="457200" y="4553712"/>
-            <a:ext cx="11247120" cy="256032"/>
+            <a:off x="457200" y="4882896"/>
+            <a:ext cx="11247120" cy="237744"/>
           </a:xfrm>
           <a:prstGeom prst="rect">
             <a:avLst/>
@@ -14418,12 +14988,12 @@
         </p:nvSpPr>
         <p:spPr>
           <a:xfrm>
-            <a:off x="457200" y="4864608"/>
-            <a:ext cx="3590544" cy="1207008"/>
+            <a:off x="457200" y="5157216"/>
+            <a:ext cx="3590544" cy="969264"/>
           </a:xfrm>
           <a:prstGeom prst="roundRect">
             <a:avLst>
-              <a:gd name="adj" fmla="val 3788"/>
+              <a:gd name="adj" fmla="val 4717"/>
             </a:avLst>
           </a:prstGeom>
           <a:solidFill>
@@ -14445,8 +15015,8 @@
         </p:nvSpPr>
         <p:spPr>
           <a:xfrm>
-            <a:off x="621792" y="4992624"/>
-            <a:ext cx="219456" cy="219456"/>
+            <a:off x="621792" y="5266944"/>
+            <a:ext cx="201168" cy="201168"/>
           </a:xfrm>
           <a:prstGeom prst="ellipse">
             <a:avLst/>
@@ -14470,8 +15040,8 @@
         </p:nvSpPr>
         <p:spPr>
           <a:xfrm>
-            <a:off x="621792" y="4992624"/>
-            <a:ext cx="219456" cy="219456"/>
+            <a:off x="621792" y="5266944"/>
+            <a:ext cx="201168" cy="201168"/>
           </a:xfrm>
           <a:prstGeom prst="rect">
             <a:avLst/>
@@ -14490,7 +15060,7 @@
               <a:buNone/>
             </a:pPr>
             <a:r>
-              <a:rPr lang="en-US" sz="900" b="1" dirty="0">
+              <a:rPr lang="en-US" sz="850" b="1" dirty="0">
                 <a:solidFill>
                   <a:srgbClr val="FFFFFF"/>
                 </a:solidFill>
@@ -14500,7 +15070,7 @@
               </a:rPr>
               <a:t>1</a:t>
             </a:r>
-            <a:endParaRPr lang="en-US" sz="900" dirty="0"/>
+            <a:endParaRPr lang="en-US" sz="850" dirty="0"/>
           </a:p>
         </p:txBody>
       </p:sp>
@@ -14512,8 +15082,8 @@
         </p:nvSpPr>
         <p:spPr>
           <a:xfrm>
-            <a:off x="932688" y="4974336"/>
-            <a:ext cx="2950464" cy="457200"/>
+            <a:off x="896112" y="5248656"/>
+            <a:ext cx="2987040" cy="420624"/>
           </a:xfrm>
           <a:prstGeom prst="rect">
             <a:avLst/>
@@ -14527,12 +15097,12 @@
           <a:p>
             <a:pPr algn="l" indent="0" marL="0">
               <a:lnSpc>
-                <a:spcPct val="115000"/>
+                <a:spcPct val="112000"/>
               </a:lnSpc>
               <a:buNone/>
             </a:pPr>
             <a:r>
-              <a:rPr lang="en-US" sz="1000" b="1" dirty="0">
+              <a:rPr lang="en-US" sz="950" b="1" dirty="0">
                 <a:solidFill>
                   <a:srgbClr val="1F2933"/>
                 </a:solidFill>
@@ -14542,7 +15112,7 @@
               </a:rPr>
               <a:t>출력 길이 예측 정확도가 위 임계값을 넘는다</a:t>
             </a:r>
-            <a:endParaRPr lang="en-US" sz="1000" dirty="0"/>
+            <a:endParaRPr lang="en-US" sz="950" dirty="0"/>
           </a:p>
         </p:txBody>
       </p:sp>
@@ -14554,8 +15124,8 @@
         </p:nvSpPr>
         <p:spPr>
           <a:xfrm>
-            <a:off x="932688" y="5504688"/>
-            <a:ext cx="2950464" cy="420624"/>
+            <a:off x="896112" y="5705856"/>
+            <a:ext cx="2987040" cy="365760"/>
           </a:xfrm>
           <a:prstGeom prst="rect">
             <a:avLst/>
@@ -14569,12 +15139,12 @@
           <a:p>
             <a:pPr algn="l" indent="0" marL="0">
               <a:lnSpc>
-                <a:spcPct val="115000"/>
+                <a:spcPct val="112000"/>
               </a:lnSpc>
               <a:buNone/>
             </a:pPr>
             <a:r>
-              <a:rPr lang="en-US" sz="900" dirty="0">
+              <a:rPr lang="en-US" sz="850" dirty="0">
                 <a:solidFill>
                   <a:srgbClr val="B0503F"/>
                 </a:solidFill>
@@ -14584,7 +15154,7 @@
               </a:rPr>
               <a:t>→ C2의 QA1 이득이 확실해진다</a:t>
             </a:r>
-            <a:endParaRPr lang="en-US" sz="900" dirty="0"/>
+            <a:endParaRPr lang="en-US" sz="850" dirty="0"/>
           </a:p>
         </p:txBody>
       </p:sp>
@@ -14596,12 +15166,12 @@
         </p:nvSpPr>
         <p:spPr>
           <a:xfrm>
-            <a:off x="4285488" y="4864608"/>
-            <a:ext cx="3590544" cy="1207008"/>
+            <a:off x="4285488" y="5157216"/>
+            <a:ext cx="3590544" cy="969264"/>
           </a:xfrm>
           <a:prstGeom prst="roundRect">
             <a:avLst>
-              <a:gd name="adj" fmla="val 3788"/>
+              <a:gd name="adj" fmla="val 4717"/>
             </a:avLst>
           </a:prstGeom>
           <a:solidFill>
@@ -14623,8 +15193,8 @@
         </p:nvSpPr>
         <p:spPr>
           <a:xfrm>
-            <a:off x="4450080" y="4992624"/>
-            <a:ext cx="219456" cy="219456"/>
+            <a:off x="4450080" y="5266944"/>
+            <a:ext cx="201168" cy="201168"/>
           </a:xfrm>
           <a:prstGeom prst="ellipse">
             <a:avLst/>
@@ -14648,8 +15218,8 @@
         </p:nvSpPr>
         <p:spPr>
           <a:xfrm>
-            <a:off x="4450080" y="4992624"/>
-            <a:ext cx="219456" cy="219456"/>
+            <a:off x="4450080" y="5266944"/>
+            <a:ext cx="201168" cy="201168"/>
           </a:xfrm>
           <a:prstGeom prst="rect">
             <a:avLst/>
@@ -14668,7 +15238,7 @@
               <a:buNone/>
             </a:pPr>
             <a:r>
-              <a:rPr lang="en-US" sz="900" b="1" dirty="0">
+              <a:rPr lang="en-US" sz="850" b="1" dirty="0">
                 <a:solidFill>
                   <a:srgbClr val="FFFFFF"/>
                 </a:solidFill>
@@ -14678,7 +15248,7 @@
               </a:rPr>
               <a:t>2</a:t>
             </a:r>
-            <a:endParaRPr lang="en-US" sz="900" dirty="0"/>
+            <a:endParaRPr lang="en-US" sz="850" dirty="0"/>
           </a:p>
         </p:txBody>
       </p:sp>
@@ -14690,8 +15260,8 @@
         </p:nvSpPr>
         <p:spPr>
           <a:xfrm>
-            <a:off x="4760976" y="4974336"/>
-            <a:ext cx="2950464" cy="457200"/>
+            <a:off x="4724400" y="5248656"/>
+            <a:ext cx="2987040" cy="420624"/>
           </a:xfrm>
           <a:prstGeom prst="rect">
             <a:avLst/>
@@ -14705,12 +15275,12 @@
           <a:p>
             <a:pPr algn="l" indent="0" marL="0">
               <a:lnSpc>
-                <a:spcPct val="115000"/>
+                <a:spcPct val="112000"/>
               </a:lnSpc>
               <a:buNone/>
             </a:pPr>
             <a:r>
-              <a:rPr lang="en-US" sz="1000" b="1" dirty="0">
+              <a:rPr lang="en-US" sz="950" b="1" dirty="0">
                 <a:solidFill>
                   <a:srgbClr val="1F2933"/>
                 </a:solidFill>
@@ -14720,7 +15290,7 @@
               </a:rPr>
               <a:t>배치 재현성이 SLA · 과금 근거로 요구된다</a:t>
             </a:r>
-            <a:endParaRPr lang="en-US" sz="1000" dirty="0"/>
+            <a:endParaRPr lang="en-US" sz="950" dirty="0"/>
           </a:p>
         </p:txBody>
       </p:sp>
@@ -14732,8 +15302,8 @@
         </p:nvSpPr>
         <p:spPr>
           <a:xfrm>
-            <a:off x="4760976" y="5504688"/>
-            <a:ext cx="2950464" cy="420624"/>
+            <a:off x="4724400" y="5705856"/>
+            <a:ext cx="2987040" cy="365760"/>
           </a:xfrm>
           <a:prstGeom prst="rect">
             <a:avLst/>
@@ -14747,12 +15317,12 @@
           <a:p>
             <a:pPr algn="l" indent="0" marL="0">
               <a:lnSpc>
-                <a:spcPct val="115000"/>
+                <a:spcPct val="112000"/>
               </a:lnSpc>
               <a:buNone/>
             </a:pPr>
             <a:r>
-              <a:rPr lang="en-US" sz="900" dirty="0">
+              <a:rPr lang="en-US" sz="850" dirty="0">
                 <a:solidFill>
                   <a:srgbClr val="B0503F"/>
                 </a:solidFill>
@@ -14762,7 +15332,7 @@
               </a:rPr>
               <a:t>→ QA4가 수용 불가 축이 된다</a:t>
             </a:r>
-            <a:endParaRPr lang="en-US" sz="900" dirty="0"/>
+            <a:endParaRPr lang="en-US" sz="850" dirty="0"/>
           </a:p>
         </p:txBody>
       </p:sp>
@@ -14774,12 +15344,12 @@
         </p:nvSpPr>
         <p:spPr>
           <a:xfrm>
-            <a:off x="8113776" y="4864608"/>
-            <a:ext cx="3590544" cy="1207008"/>
+            <a:off x="8113776" y="5157216"/>
+            <a:ext cx="3590544" cy="969264"/>
           </a:xfrm>
           <a:prstGeom prst="roundRect">
             <a:avLst>
-              <a:gd name="adj" fmla="val 3788"/>
+              <a:gd name="adj" fmla="val 4717"/>
             </a:avLst>
           </a:prstGeom>
           <a:solidFill>
@@ -14801,8 +15371,8 @@
         </p:nvSpPr>
         <p:spPr>
           <a:xfrm>
-            <a:off x="8278368" y="4992624"/>
-            <a:ext cx="219456" cy="219456"/>
+            <a:off x="8278368" y="5266944"/>
+            <a:ext cx="201168" cy="201168"/>
           </a:xfrm>
           <a:prstGeom prst="ellipse">
             <a:avLst/>
@@ -14826,8 +15396,8 @@
         </p:nvSpPr>
         <p:spPr>
           <a:xfrm>
-            <a:off x="8278368" y="4992624"/>
-            <a:ext cx="219456" cy="219456"/>
+            <a:off x="8278368" y="5266944"/>
+            <a:ext cx="201168" cy="201168"/>
           </a:xfrm>
           <a:prstGeom prst="rect">
             <a:avLst/>
@@ -14846,7 +15416,7 @@
               <a:buNone/>
             </a:pPr>
             <a:r>
-              <a:rPr lang="en-US" sz="900" b="1" dirty="0">
+              <a:rPr lang="en-US" sz="850" b="1" dirty="0">
                 <a:solidFill>
                   <a:srgbClr val="FFFFFF"/>
                 </a:solidFill>
@@ -14856,7 +15426,7 @@
               </a:rPr>
               <a:t>3</a:t>
             </a:r>
-            <a:endParaRPr lang="en-US" sz="900" dirty="0"/>
+            <a:endParaRPr lang="en-US" sz="850" dirty="0"/>
           </a:p>
         </p:txBody>
       </p:sp>
@@ -14868,8 +15438,8 @@
         </p:nvSpPr>
         <p:spPr>
           <a:xfrm>
-            <a:off x="8589264" y="4974336"/>
-            <a:ext cx="2950464" cy="457200"/>
+            <a:off x="8552688" y="5248656"/>
+            <a:ext cx="2987040" cy="420624"/>
           </a:xfrm>
           <a:prstGeom prst="rect">
             <a:avLst/>
@@ -14883,12 +15453,12 @@
           <a:p>
             <a:pPr algn="l" indent="0" marL="0">
               <a:lnSpc>
-                <a:spcPct val="115000"/>
+                <a:spcPct val="112000"/>
               </a:lnSpc>
               <a:buNone/>
             </a:pPr>
             <a:r>
-              <a:rPr lang="en-US" sz="1000" b="1" dirty="0">
+              <a:rPr lang="en-US" sz="950" b="1" dirty="0">
                 <a:solidFill>
                   <a:srgbClr val="1F2933"/>
                 </a:solidFill>
@@ -14898,7 +15468,7 @@
               </a:rPr>
               <a:t>한 메모리에 여러 실행 리소스가 붙는 토폴로지가 확정된다</a:t>
             </a:r>
-            <a:endParaRPr lang="en-US" sz="1000" dirty="0"/>
+            <a:endParaRPr lang="en-US" sz="950" dirty="0"/>
           </a:p>
         </p:txBody>
       </p:sp>
@@ -14910,8 +15480,8 @@
         </p:nvSpPr>
         <p:spPr>
           <a:xfrm>
-            <a:off x="8589264" y="5504688"/>
-            <a:ext cx="2950464" cy="420624"/>
+            <a:off x="8552688" y="5705856"/>
+            <a:ext cx="2987040" cy="365760"/>
           </a:xfrm>
           <a:prstGeom prst="rect">
             <a:avLst/>
@@ -14925,12 +15495,12 @@
           <a:p>
             <a:pPr algn="l" indent="0" marL="0">
               <a:lnSpc>
-                <a:spcPct val="115000"/>
+                <a:spcPct val="112000"/>
               </a:lnSpc>
               <a:buNone/>
             </a:pPr>
             <a:r>
-              <a:rPr lang="en-US" sz="900" dirty="0">
+              <a:rPr lang="en-US" sz="850" dirty="0">
                 <a:solidFill>
                   <a:srgbClr val="B0503F"/>
                 </a:solidFill>
@@ -14940,7 +15510,7 @@
               </a:rPr>
               <a:t>→ 객체별 목표 지정이 필요해진다</a:t>
             </a:r>
-            <a:endParaRPr lang="en-US" sz="900" dirty="0"/>
+            <a:endParaRPr lang="en-US" sz="850" dirty="0"/>
           </a:p>
         </p:txBody>
       </p:sp>
@@ -15009,7 +15579,7 @@
                 <a:ea typeface="Arial" pitchFamily="34" charset="-122"/>
                 <a:cs typeface="Arial" pitchFamily="34" charset="-120"/>
               </a:rPr>
-              <a:t>DP1 · 12장 잔여 문제와 DP 연결</a:t>
+              <a:t>DP1 · 부록 D.3 / 실측</a:t>
             </a:r>
             <a:endParaRPr lang="en-US" sz="1050" dirty="0"/>
           </a:p>
@@ -15048,7 +15618,7 @@
                 <a:ea typeface="Arial" pitchFamily="34" charset="-122"/>
                 <a:cs typeface="Arial" pitchFamily="34" charset="-120"/>
               </a:rPr>
-              <a:t>무엇을 남겼고, 어디서 푸는가</a:t>
+              <a:t>두 종류의 유보 — 같은 단어, 다른 메커니즘</a:t>
             </a:r>
             <a:endParaRPr lang="en-US" sz="2300" dirty="0"/>
           </a:p>
@@ -15087,7 +15657,7 @@
                 <a:ea typeface="Arial" pitchFamily="34" charset="-122"/>
                 <a:cs typeface="Arial" pitchFamily="34" charset="-120"/>
               </a:rPr>
-              <a:t>"왜 이 DP에서 풀 수 없는가"에 답하지 못하면 잔여 인계는 회피로 읽힌다</a:t>
+              <a:t>구현 시 두 개를 한 코드로 합치려 들면 안 된다. 대비 대상도, 유보량을 정하는 방법도 다르다.</a:t>
             </a:r>
             <a:endParaRPr lang="en-US" sz="1100" dirty="0"/>
           </a:p>
@@ -15126,7 +15696,2150 @@
                 <a:ea typeface="Arial" pitchFamily="34" charset="-122"/>
                 <a:cs typeface="Arial" pitchFamily="34" charset="-120"/>
               </a:rPr>
-              <a:t>DP1 · 15 / 17</a:t>
+              <a:t>DP1 · 15 / 19</a:t>
+            </a:r>
+            <a:endParaRPr lang="en-US" sz="850" dirty="0"/>
+          </a:p>
+        </p:txBody>
+      </p:sp>
+      <p:graphicFrame>
+        <p:nvGraphicFramePr>
+          <p:cNvPr id="17" name="Table 0"/>
+          <p:cNvGraphicFramePr>
+            <a:graphicFrameLocks noGrp="1"/>
+          </p:cNvGraphicFramePr>
+          <p:nvPr>
+            <p:extLst>
+              <p:ext uri="{D42A27DB-BD31-4B8C-83A1-F6EECF244321}">
+                <p14:modId xmlns:p14="http://schemas.microsoft.com/office/powerpoint/2010/main" val="1579011935"/>
+              </p:ext>
+            </p:extLst>
+          </p:nvPr>
+        </p:nvGraphicFramePr>
+        <p:xfrm>
+          <a:off x="457200" y="1572768"/>
+          <a:ext cx="11247120" cy="914400"/>
+        </p:xfrm>
+        <a:graphic>
+          <a:graphicData uri="http://schemas.openxmlformats.org/drawingml/2006/table">
+            <a:tbl>
+              <a:tblPr/>
+              <a:tblGrid>
+                <a:gridCol w="2194560"/>
+                <a:gridCol w="4526280"/>
+                <a:gridCol w="4526280"/>
+              </a:tblGrid>
+              <a:tr h="310896">
+                <a:tc>
+                  <a:txBody>
+                    <a:bodyPr/>
+                    <a:lstStyle/>
+                    <a:p>
+                      <a:pPr algn="l" indent="0" marL="0">
+                        <a:buNone/>
+                      </a:pPr>
+                      <a:endParaRPr lang="en-US" sz="1050" dirty="0">
+                        <a:latin typeface="Arial" charset="0"/>
+                        <a:ea typeface="Arial" charset="0"/>
+                        <a:cs typeface="Arial" charset="0"/>
+                      </a:endParaRPr>
+                    </a:p>
+                  </a:txBody>
+                  <a:tcPr marL="101600" marR="101600" marT="63500" marB="63500" anchor="ctr">
+                    <a:lnL w="9525" cap="flat" cmpd="sng" algn="ctr">
+                      <a:solidFill>
+                        <a:srgbClr val="DCE1E7"/>
+                      </a:solidFill>
+                      <a:prstDash val="solid"/>
+                      <a:round/>
+                      <a:headEnd type="none" w="med" len="med"/>
+                      <a:tailEnd type="none" w="med" len="med"/>
+                    </a:lnL>
+                    <a:lnR w="9525" cap="flat" cmpd="sng" algn="ctr">
+                      <a:solidFill>
+                        <a:srgbClr val="DCE1E7"/>
+                      </a:solidFill>
+                      <a:prstDash val="solid"/>
+                      <a:round/>
+                      <a:headEnd type="none" w="med" len="med"/>
+                      <a:tailEnd type="none" w="med" len="med"/>
+                    </a:lnR>
+                    <a:lnT w="9525" cap="flat" cmpd="sng" algn="ctr">
+                      <a:solidFill>
+                        <a:srgbClr val="DCE1E7"/>
+                      </a:solidFill>
+                      <a:prstDash val="solid"/>
+                      <a:round/>
+                      <a:headEnd type="none" w="med" len="med"/>
+                      <a:tailEnd type="none" w="med" len="med"/>
+                    </a:lnT>
+                    <a:lnB w="9525" cap="flat" cmpd="sng" algn="ctr">
+                      <a:solidFill>
+                        <a:srgbClr val="DCE1E7"/>
+                      </a:solidFill>
+                      <a:prstDash val="solid"/>
+                      <a:round/>
+                      <a:headEnd type="none" w="med" len="med"/>
+                      <a:tailEnd type="none" w="med" len="med"/>
+                    </a:lnB>
+                    <a:solidFill>
+                      <a:srgbClr val="1F2933"/>
+                    </a:solidFill>
+                  </a:tcPr>
+                </a:tc>
+                <a:tc>
+                  <a:txBody>
+                    <a:bodyPr/>
+                    <a:lstStyle/>
+                    <a:p>
+                      <a:pPr algn="ctr" indent="0" marL="0">
+                        <a:buNone/>
+                      </a:pPr>
+                      <a:r>
+                        <a:rPr lang="en-US" sz="1050" b="1" dirty="0">
+                          <a:solidFill>
+                            <a:srgbClr val="FFFFFF"/>
+                          </a:solidFill>
+                          <a:latin typeface="Arial" pitchFamily="34" charset="0"/>
+                          <a:ea typeface="Arial" pitchFamily="34" charset="-122"/>
+                          <a:cs typeface="Arial" pitchFamily="34" charset="-120"/>
+                        </a:rPr>
+                        <a:t>유보 A — 스텝 내 예약</a:t>
+                      </a:r>
+                      <a:endParaRPr lang="en-US" sz="1050" dirty="0">
+                        <a:latin typeface="Arial" charset="0"/>
+                        <a:ea typeface="Arial" charset="0"/>
+                        <a:cs typeface="Arial" charset="0"/>
+                      </a:endParaRPr>
+                    </a:p>
+                  </a:txBody>
+                  <a:tcPr marL="101600" marR="101600" marT="63500" marB="63500" anchor="ctr">
+                    <a:lnL w="9525" cap="flat" cmpd="sng" algn="ctr">
+                      <a:solidFill>
+                        <a:srgbClr val="DCE1E7"/>
+                      </a:solidFill>
+                      <a:prstDash val="solid"/>
+                      <a:round/>
+                      <a:headEnd type="none" w="med" len="med"/>
+                      <a:tailEnd type="none" w="med" len="med"/>
+                    </a:lnL>
+                    <a:lnR w="9525" cap="flat" cmpd="sng" algn="ctr">
+                      <a:solidFill>
+                        <a:srgbClr val="DCE1E7"/>
+                      </a:solidFill>
+                      <a:prstDash val="solid"/>
+                      <a:round/>
+                      <a:headEnd type="none" w="med" len="med"/>
+                      <a:tailEnd type="none" w="med" len="med"/>
+                    </a:lnR>
+                    <a:lnT w="9525" cap="flat" cmpd="sng" algn="ctr">
+                      <a:solidFill>
+                        <a:srgbClr val="DCE1E7"/>
+                      </a:solidFill>
+                      <a:prstDash val="solid"/>
+                      <a:round/>
+                      <a:headEnd type="none" w="med" len="med"/>
+                      <a:tailEnd type="none" w="med" len="med"/>
+                    </a:lnT>
+                    <a:lnB w="9525" cap="flat" cmpd="sng" algn="ctr">
+                      <a:solidFill>
+                        <a:srgbClr val="DCE1E7"/>
+                      </a:solidFill>
+                      <a:prstDash val="solid"/>
+                      <a:round/>
+                      <a:headEnd type="none" w="med" len="med"/>
+                      <a:tailEnd type="none" w="med" len="med"/>
+                    </a:lnB>
+                    <a:solidFill>
+                      <a:srgbClr val="1F2933"/>
+                    </a:solidFill>
+                  </a:tcPr>
+                </a:tc>
+                <a:tc>
+                  <a:txBody>
+                    <a:bodyPr/>
+                    <a:lstStyle/>
+                    <a:p>
+                      <a:pPr algn="ctr" indent="0" marL="0">
+                        <a:buNone/>
+                      </a:pPr>
+                      <a:r>
+                        <a:rPr lang="en-US" sz="1050" b="1" dirty="0">
+                          <a:solidFill>
+                            <a:srgbClr val="FFFFFF"/>
+                          </a:solidFill>
+                          <a:latin typeface="Arial" pitchFamily="34" charset="0"/>
+                          <a:ea typeface="Arial" pitchFamily="34" charset="-122"/>
+                          <a:cs typeface="Arial" pitchFamily="34" charset="-120"/>
+                        </a:rPr>
+                        <a:t>유보 B — 미래를 위한 여유</a:t>
+                      </a:r>
+                      <a:endParaRPr lang="en-US" sz="1050" dirty="0">
+                        <a:latin typeface="Arial" charset="0"/>
+                        <a:ea typeface="Arial" charset="0"/>
+                        <a:cs typeface="Arial" charset="0"/>
+                      </a:endParaRPr>
+                    </a:p>
+                  </a:txBody>
+                  <a:tcPr marL="101600" marR="101600" marT="63500" marB="63500" anchor="ctr">
+                    <a:lnL w="9525" cap="flat" cmpd="sng" algn="ctr">
+                      <a:solidFill>
+                        <a:srgbClr val="DCE1E7"/>
+                      </a:solidFill>
+                      <a:prstDash val="solid"/>
+                      <a:round/>
+                      <a:headEnd type="none" w="med" len="med"/>
+                      <a:tailEnd type="none" w="med" len="med"/>
+                    </a:lnL>
+                    <a:lnR w="9525" cap="flat" cmpd="sng" algn="ctr">
+                      <a:solidFill>
+                        <a:srgbClr val="DCE1E7"/>
+                      </a:solidFill>
+                      <a:prstDash val="solid"/>
+                      <a:round/>
+                      <a:headEnd type="none" w="med" len="med"/>
+                      <a:tailEnd type="none" w="med" len="med"/>
+                    </a:lnR>
+                    <a:lnT w="9525" cap="flat" cmpd="sng" algn="ctr">
+                      <a:solidFill>
+                        <a:srgbClr val="DCE1E7"/>
+                      </a:solidFill>
+                      <a:prstDash val="solid"/>
+                      <a:round/>
+                      <a:headEnd type="none" w="med" len="med"/>
+                      <a:tailEnd type="none" w="med" len="med"/>
+                    </a:lnT>
+                    <a:lnB w="9525" cap="flat" cmpd="sng" algn="ctr">
+                      <a:solidFill>
+                        <a:srgbClr val="DCE1E7"/>
+                      </a:solidFill>
+                      <a:prstDash val="solid"/>
+                      <a:round/>
+                      <a:headEnd type="none" w="med" len="med"/>
+                      <a:tailEnd type="none" w="med" len="med"/>
+                    </a:lnB>
+                    <a:solidFill>
+                      <a:srgbClr val="1F2933"/>
+                    </a:solidFill>
+                  </a:tcPr>
+                </a:tc>
+              </a:tr>
+              <a:tr h="457200">
+                <a:tc>
+                  <a:txBody>
+                    <a:bodyPr/>
+                    <a:lstStyle/>
+                    <a:p>
+                      <a:pPr indent="0" marL="0">
+                        <a:buNone/>
+                      </a:pPr>
+                      <a:r>
+                        <a:rPr lang="en-US" sz="950" b="1" dirty="0">
+                          <a:solidFill>
+                            <a:srgbClr val="7B8794"/>
+                          </a:solidFill>
+                          <a:latin typeface="Arial" pitchFamily="34" charset="0"/>
+                          <a:ea typeface="Arial" pitchFamily="34" charset="-122"/>
+                          <a:cs typeface="Arial" pitchFamily="34" charset="-120"/>
+                        </a:rPr>
+                        <a:t>누가 필요한가</a:t>
+                      </a:r>
+                      <a:endParaRPr lang="en-US" sz="950" dirty="0">
+                        <a:latin typeface="Arial" charset="0"/>
+                        <a:ea typeface="Arial" charset="0"/>
+                        <a:cs typeface="Arial" charset="0"/>
+                      </a:endParaRPr>
+                    </a:p>
+                  </a:txBody>
+                  <a:tcPr marL="101600" marR="101600" marT="63500" marB="63500" anchor="ctr">
+                    <a:lnL w="9525" cap="flat" cmpd="sng" algn="ctr">
+                      <a:solidFill>
+                        <a:srgbClr val="DCE1E7"/>
+                      </a:solidFill>
+                      <a:prstDash val="solid"/>
+                      <a:round/>
+                      <a:headEnd type="none" w="med" len="med"/>
+                      <a:tailEnd type="none" w="med" len="med"/>
+                    </a:lnL>
+                    <a:lnR w="9525" cap="flat" cmpd="sng" algn="ctr">
+                      <a:solidFill>
+                        <a:srgbClr val="DCE1E7"/>
+                      </a:solidFill>
+                      <a:prstDash val="solid"/>
+                      <a:round/>
+                      <a:headEnd type="none" w="med" len="med"/>
+                      <a:tailEnd type="none" w="med" len="med"/>
+                    </a:lnR>
+                    <a:lnT w="9525" cap="flat" cmpd="sng" algn="ctr">
+                      <a:solidFill>
+                        <a:srgbClr val="DCE1E7"/>
+                      </a:solidFill>
+                      <a:prstDash val="solid"/>
+                      <a:round/>
+                      <a:headEnd type="none" w="med" len="med"/>
+                      <a:tailEnd type="none" w="med" len="med"/>
+                    </a:lnT>
+                    <a:lnB w="9525" cap="flat" cmpd="sng" algn="ctr">
+                      <a:solidFill>
+                        <a:srgbClr val="DCE1E7"/>
+                      </a:solidFill>
+                      <a:prstDash val="solid"/>
+                      <a:round/>
+                      <a:headEnd type="none" w="med" len="med"/>
+                      <a:tailEnd type="none" w="med" len="med"/>
+                    </a:lnB>
+                  </a:tcPr>
+                </a:tc>
+                <a:tc>
+                  <a:txBody>
+                    <a:bodyPr/>
+                    <a:lstStyle/>
+                    <a:p>
+                      <a:pPr algn="ctr" indent="0" marL="0">
+                        <a:buNone/>
+                      </a:pPr>
+                      <a:r>
+                        <a:rPr lang="en-US" sz="950" dirty="0">
+                          <a:solidFill>
+                            <a:srgbClr val="0B6E6E"/>
+                          </a:solidFill>
+                          <a:latin typeface="Arial" pitchFamily="34" charset="0"/>
+                          <a:ea typeface="Arial" pitchFamily="34" charset="-122"/>
+                          <a:cs typeface="Arial" pitchFamily="34" charset="-120"/>
+                        </a:rPr>
+                        <a:t>C1 (그리고 C2도)</a:t>
+                      </a:r>
+                      <a:endParaRPr lang="en-US" sz="950" dirty="0">
+                        <a:latin typeface="Arial" charset="0"/>
+                        <a:ea typeface="Arial" charset="0"/>
+                        <a:cs typeface="Arial" charset="0"/>
+                      </a:endParaRPr>
+                    </a:p>
+                  </a:txBody>
+                  <a:tcPr marL="101600" marR="101600" marT="63500" marB="63500" anchor="ctr">
+                    <a:lnL w="9525" cap="flat" cmpd="sng" algn="ctr">
+                      <a:solidFill>
+                        <a:srgbClr val="DCE1E7"/>
+                      </a:solidFill>
+                      <a:prstDash val="solid"/>
+                      <a:round/>
+                      <a:headEnd type="none" w="med" len="med"/>
+                      <a:tailEnd type="none" w="med" len="med"/>
+                    </a:lnL>
+                    <a:lnR w="9525" cap="flat" cmpd="sng" algn="ctr">
+                      <a:solidFill>
+                        <a:srgbClr val="DCE1E7"/>
+                      </a:solidFill>
+                      <a:prstDash val="solid"/>
+                      <a:round/>
+                      <a:headEnd type="none" w="med" len="med"/>
+                      <a:tailEnd type="none" w="med" len="med"/>
+                    </a:lnR>
+                    <a:lnT w="9525" cap="flat" cmpd="sng" algn="ctr">
+                      <a:solidFill>
+                        <a:srgbClr val="DCE1E7"/>
+                      </a:solidFill>
+                      <a:prstDash val="solid"/>
+                      <a:round/>
+                      <a:headEnd type="none" w="med" len="med"/>
+                      <a:tailEnd type="none" w="med" len="med"/>
+                    </a:lnT>
+                    <a:lnB w="9525" cap="flat" cmpd="sng" algn="ctr">
+                      <a:solidFill>
+                        <a:srgbClr val="DCE1E7"/>
+                      </a:solidFill>
+                      <a:prstDash val="solid"/>
+                      <a:round/>
+                      <a:headEnd type="none" w="med" len="med"/>
+                      <a:tailEnd type="none" w="med" len="med"/>
+                    </a:lnB>
+                  </a:tcPr>
+                </a:tc>
+                <a:tc>
+                  <a:txBody>
+                    <a:bodyPr/>
+                    <a:lstStyle/>
+                    <a:p>
+                      <a:pPr algn="ctr" indent="0" marL="0">
+                        <a:buNone/>
+                      </a:pPr>
+                      <a:r>
+                        <a:rPr lang="en-US" sz="950" dirty="0">
+                          <a:solidFill>
+                            <a:srgbClr val="B0503F"/>
+                          </a:solidFill>
+                          <a:latin typeface="Arial" pitchFamily="34" charset="0"/>
+                          <a:ea typeface="Arial" pitchFamily="34" charset="-122"/>
+                          <a:cs typeface="Arial" pitchFamily="34" charset="-120"/>
+                        </a:rPr>
+                        <a:t>C2만</a:t>
+                      </a:r>
+                      <a:endParaRPr lang="en-US" sz="950" dirty="0">
+                        <a:latin typeface="Arial" charset="0"/>
+                        <a:ea typeface="Arial" charset="0"/>
+                        <a:cs typeface="Arial" charset="0"/>
+                      </a:endParaRPr>
+                    </a:p>
+                  </a:txBody>
+                  <a:tcPr marL="101600" marR="101600" marT="63500" marB="63500" anchor="ctr">
+                    <a:lnL w="9525" cap="flat" cmpd="sng" algn="ctr">
+                      <a:solidFill>
+                        <a:srgbClr val="DCE1E7"/>
+                      </a:solidFill>
+                      <a:prstDash val="solid"/>
+                      <a:round/>
+                      <a:headEnd type="none" w="med" len="med"/>
+                      <a:tailEnd type="none" w="med" len="med"/>
+                    </a:lnL>
+                    <a:lnR w="9525" cap="flat" cmpd="sng" algn="ctr">
+                      <a:solidFill>
+                        <a:srgbClr val="DCE1E7"/>
+                      </a:solidFill>
+                      <a:prstDash val="solid"/>
+                      <a:round/>
+                      <a:headEnd type="none" w="med" len="med"/>
+                      <a:tailEnd type="none" w="med" len="med"/>
+                    </a:lnR>
+                    <a:lnT w="9525" cap="flat" cmpd="sng" algn="ctr">
+                      <a:solidFill>
+                        <a:srgbClr val="DCE1E7"/>
+                      </a:solidFill>
+                      <a:prstDash val="solid"/>
+                      <a:round/>
+                      <a:headEnd type="none" w="med" len="med"/>
+                      <a:tailEnd type="none" w="med" len="med"/>
+                    </a:lnT>
+                    <a:lnB w="9525" cap="flat" cmpd="sng" algn="ctr">
+                      <a:solidFill>
+                        <a:srgbClr val="DCE1E7"/>
+                      </a:solidFill>
+                      <a:prstDash val="solid"/>
+                      <a:round/>
+                      <a:headEnd type="none" w="med" len="med"/>
+                      <a:tailEnd type="none" w="med" len="med"/>
+                    </a:lnB>
+                  </a:tcPr>
+                </a:tc>
+              </a:tr>
+              <a:tr h="457200">
+                <a:tc>
+                  <a:txBody>
+                    <a:bodyPr/>
+                    <a:lstStyle/>
+                    <a:p>
+                      <a:pPr indent="0" marL="0">
+                        <a:buNone/>
+                      </a:pPr>
+                      <a:r>
+                        <a:rPr lang="en-US" sz="950" b="1" dirty="0">
+                          <a:solidFill>
+                            <a:srgbClr val="7B8794"/>
+                          </a:solidFill>
+                          <a:latin typeface="Arial" pitchFamily="34" charset="0"/>
+                          <a:ea typeface="Arial" pitchFamily="34" charset="-122"/>
+                          <a:cs typeface="Arial" pitchFamily="34" charset="-120"/>
+                        </a:rPr>
+                        <a:t>무엇을 대비하나</a:t>
+                      </a:r>
+                      <a:endParaRPr lang="en-US" sz="950" dirty="0">
+                        <a:latin typeface="Arial" charset="0"/>
+                        <a:ea typeface="Arial" charset="0"/>
+                        <a:cs typeface="Arial" charset="0"/>
+                      </a:endParaRPr>
+                    </a:p>
+                  </a:txBody>
+                  <a:tcPr marL="101600" marR="101600" marT="63500" marB="63500" anchor="ctr">
+                    <a:lnL w="9525" cap="flat" cmpd="sng" algn="ctr">
+                      <a:solidFill>
+                        <a:srgbClr val="DCE1E7"/>
+                      </a:solidFill>
+                      <a:prstDash val="solid"/>
+                      <a:round/>
+                      <a:headEnd type="none" w="med" len="med"/>
+                      <a:tailEnd type="none" w="med" len="med"/>
+                    </a:lnL>
+                    <a:lnR w="9525" cap="flat" cmpd="sng" algn="ctr">
+                      <a:solidFill>
+                        <a:srgbClr val="DCE1E7"/>
+                      </a:solidFill>
+                      <a:prstDash val="solid"/>
+                      <a:round/>
+                      <a:headEnd type="none" w="med" len="med"/>
+                      <a:tailEnd type="none" w="med" len="med"/>
+                    </a:lnR>
+                    <a:lnT w="9525" cap="flat" cmpd="sng" algn="ctr">
+                      <a:solidFill>
+                        <a:srgbClr val="DCE1E7"/>
+                      </a:solidFill>
+                      <a:prstDash val="solid"/>
+                      <a:round/>
+                      <a:headEnd type="none" w="med" len="med"/>
+                      <a:tailEnd type="none" w="med" len="med"/>
+                    </a:lnT>
+                    <a:lnB w="9525" cap="flat" cmpd="sng" algn="ctr">
+                      <a:solidFill>
+                        <a:srgbClr val="DCE1E7"/>
+                      </a:solidFill>
+                      <a:prstDash val="solid"/>
+                      <a:round/>
+                      <a:headEnd type="none" w="med" len="med"/>
+                      <a:tailEnd type="none" w="med" len="med"/>
+                    </a:lnB>
+                  </a:tcPr>
+                </a:tc>
+                <a:tc>
+                  <a:txBody>
+                    <a:bodyPr/>
+                    <a:lstStyle/>
+                    <a:p>
+                      <a:pPr algn="ctr" indent="0" marL="0">
+                        <a:buNone/>
+                      </a:pPr>
+                      <a:r>
+                        <a:rPr lang="en-US" sz="950" dirty="0">
+                          <a:solidFill>
+                            <a:srgbClr val="0B6E6E"/>
+                          </a:solidFill>
+                          <a:latin typeface="Arial" pitchFamily="34" charset="0"/>
+                          <a:ea typeface="Arial" pitchFamily="34" charset="-122"/>
+                          <a:cs typeface="Arial" pitchFamily="34" charset="-120"/>
+                        </a:rPr>
+                        <a:t>이미 내린 같은 스텝의 다른 결정</a:t>
+                      </a:r>
+                      <a:endParaRPr lang="en-US" sz="950" dirty="0">
+                        <a:latin typeface="Arial" charset="0"/>
+                        <a:ea typeface="Arial" charset="0"/>
+                        <a:cs typeface="Arial" charset="0"/>
+                      </a:endParaRPr>
+                    </a:p>
+                  </a:txBody>
+                  <a:tcPr marL="101600" marR="101600" marT="63500" marB="63500" anchor="ctr">
+                    <a:lnL w="9525" cap="flat" cmpd="sng" algn="ctr">
+                      <a:solidFill>
+                        <a:srgbClr val="DCE1E7"/>
+                      </a:solidFill>
+                      <a:prstDash val="solid"/>
+                      <a:round/>
+                      <a:headEnd type="none" w="med" len="med"/>
+                      <a:tailEnd type="none" w="med" len="med"/>
+                    </a:lnL>
+                    <a:lnR w="9525" cap="flat" cmpd="sng" algn="ctr">
+                      <a:solidFill>
+                        <a:srgbClr val="DCE1E7"/>
+                      </a:solidFill>
+                      <a:prstDash val="solid"/>
+                      <a:round/>
+                      <a:headEnd type="none" w="med" len="med"/>
+                      <a:tailEnd type="none" w="med" len="med"/>
+                    </a:lnR>
+                    <a:lnT w="9525" cap="flat" cmpd="sng" algn="ctr">
+                      <a:solidFill>
+                        <a:srgbClr val="DCE1E7"/>
+                      </a:solidFill>
+                      <a:prstDash val="solid"/>
+                      <a:round/>
+                      <a:headEnd type="none" w="med" len="med"/>
+                      <a:tailEnd type="none" w="med" len="med"/>
+                    </a:lnT>
+                    <a:lnB w="9525" cap="flat" cmpd="sng" algn="ctr">
+                      <a:solidFill>
+                        <a:srgbClr val="DCE1E7"/>
+                      </a:solidFill>
+                      <a:prstDash val="solid"/>
+                      <a:round/>
+                      <a:headEnd type="none" w="med" len="med"/>
+                      <a:tailEnd type="none" w="med" len="med"/>
+                    </a:lnB>
+                  </a:tcPr>
+                </a:tc>
+                <a:tc>
+                  <a:txBody>
+                    <a:bodyPr/>
+                    <a:lstStyle/>
+                    <a:p>
+                      <a:pPr algn="ctr" indent="0" marL="0">
+                        <a:buNone/>
+                      </a:pPr>
+                      <a:r>
+                        <a:rPr lang="en-US" sz="950" dirty="0">
+                          <a:solidFill>
+                            <a:srgbClr val="B0503F"/>
+                          </a:solidFill>
+                          <a:latin typeface="Arial" pitchFamily="34" charset="0"/>
+                          <a:ea typeface="Arial" pitchFamily="34" charset="-122"/>
+                          <a:cs typeface="Arial" pitchFamily="34" charset="-120"/>
+                        </a:rPr>
+                        <a:t>아직 오지 않은 고강도 요청</a:t>
+                      </a:r>
+                      <a:endParaRPr lang="en-US" sz="950" dirty="0">
+                        <a:latin typeface="Arial" charset="0"/>
+                        <a:ea typeface="Arial" charset="0"/>
+                        <a:cs typeface="Arial" charset="0"/>
+                      </a:endParaRPr>
+                    </a:p>
+                  </a:txBody>
+                  <a:tcPr marL="101600" marR="101600" marT="63500" marB="63500" anchor="ctr">
+                    <a:lnL w="9525" cap="flat" cmpd="sng" algn="ctr">
+                      <a:solidFill>
+                        <a:srgbClr val="DCE1E7"/>
+                      </a:solidFill>
+                      <a:prstDash val="solid"/>
+                      <a:round/>
+                      <a:headEnd type="none" w="med" len="med"/>
+                      <a:tailEnd type="none" w="med" len="med"/>
+                    </a:lnL>
+                    <a:lnR w="9525" cap="flat" cmpd="sng" algn="ctr">
+                      <a:solidFill>
+                        <a:srgbClr val="DCE1E7"/>
+                      </a:solidFill>
+                      <a:prstDash val="solid"/>
+                      <a:round/>
+                      <a:headEnd type="none" w="med" len="med"/>
+                      <a:tailEnd type="none" w="med" len="med"/>
+                    </a:lnR>
+                    <a:lnT w="9525" cap="flat" cmpd="sng" algn="ctr">
+                      <a:solidFill>
+                        <a:srgbClr val="DCE1E7"/>
+                      </a:solidFill>
+                      <a:prstDash val="solid"/>
+                      <a:round/>
+                      <a:headEnd type="none" w="med" len="med"/>
+                      <a:tailEnd type="none" w="med" len="med"/>
+                    </a:lnT>
+                    <a:lnB w="9525" cap="flat" cmpd="sng" algn="ctr">
+                      <a:solidFill>
+                        <a:srgbClr val="DCE1E7"/>
+                      </a:solidFill>
+                      <a:prstDash val="solid"/>
+                      <a:round/>
+                      <a:headEnd type="none" w="med" len="med"/>
+                      <a:tailEnd type="none" w="med" len="med"/>
+                    </a:lnB>
+                  </a:tcPr>
+                </a:tc>
+              </a:tr>
+              <a:tr h="457200">
+                <a:tc>
+                  <a:txBody>
+                    <a:bodyPr/>
+                    <a:lstStyle/>
+                    <a:p>
+                      <a:pPr indent="0" marL="0">
+                        <a:buNone/>
+                      </a:pPr>
+                      <a:r>
+                        <a:rPr lang="en-US" sz="950" b="1" dirty="0">
+                          <a:solidFill>
+                            <a:srgbClr val="7B8794"/>
+                          </a:solidFill>
+                          <a:latin typeface="Arial" pitchFamily="34" charset="0"/>
+                          <a:ea typeface="Arial" pitchFamily="34" charset="-122"/>
+                          <a:cs typeface="Arial" pitchFamily="34" charset="-120"/>
+                        </a:rPr>
+                        <a:t>왜 필요한가</a:t>
+                      </a:r>
+                      <a:endParaRPr lang="en-US" sz="950" dirty="0">
+                        <a:latin typeface="Arial" charset="0"/>
+                        <a:ea typeface="Arial" charset="0"/>
+                        <a:cs typeface="Arial" charset="0"/>
+                      </a:endParaRPr>
+                    </a:p>
+                  </a:txBody>
+                  <a:tcPr marL="101600" marR="101600" marT="63500" marB="63500" anchor="ctr">
+                    <a:lnL w="9525" cap="flat" cmpd="sng" algn="ctr">
+                      <a:solidFill>
+                        <a:srgbClr val="DCE1E7"/>
+                      </a:solidFill>
+                      <a:prstDash val="solid"/>
+                      <a:round/>
+                      <a:headEnd type="none" w="med" len="med"/>
+                      <a:tailEnd type="none" w="med" len="med"/>
+                    </a:lnL>
+                    <a:lnR w="9525" cap="flat" cmpd="sng" algn="ctr">
+                      <a:solidFill>
+                        <a:srgbClr val="DCE1E7"/>
+                      </a:solidFill>
+                      <a:prstDash val="solid"/>
+                      <a:round/>
+                      <a:headEnd type="none" w="med" len="med"/>
+                      <a:tailEnd type="none" w="med" len="med"/>
+                    </a:lnR>
+                    <a:lnT w="9525" cap="flat" cmpd="sng" algn="ctr">
+                      <a:solidFill>
+                        <a:srgbClr val="DCE1E7"/>
+                      </a:solidFill>
+                      <a:prstDash val="solid"/>
+                      <a:round/>
+                      <a:headEnd type="none" w="med" len="med"/>
+                      <a:tailEnd type="none" w="med" len="med"/>
+                    </a:lnT>
+                    <a:lnB w="9525" cap="flat" cmpd="sng" algn="ctr">
+                      <a:solidFill>
+                        <a:srgbClr val="DCE1E7"/>
+                      </a:solidFill>
+                      <a:prstDash val="solid"/>
+                      <a:round/>
+                      <a:headEnd type="none" w="med" len="med"/>
+                      <a:tailEnd type="none" w="med" len="med"/>
+                    </a:lnB>
+                  </a:tcPr>
+                </a:tc>
+                <a:tc>
+                  <a:txBody>
+                    <a:bodyPr/>
+                    <a:lstStyle/>
+                    <a:p>
+                      <a:pPr algn="ctr" indent="0" marL="0">
+                        <a:buNone/>
+                      </a:pPr>
+                      <a:r>
+                        <a:rPr lang="en-US" sz="950" dirty="0">
+                          <a:solidFill>
+                            <a:srgbClr val="0B6E6E"/>
+                          </a:solidFill>
+                          <a:latin typeface="Arial" pitchFamily="34" charset="0"/>
+                          <a:ea typeface="Arial" pitchFamily="34" charset="-122"/>
+                          <a:cs typeface="Arial" pitchFamily="34" charset="-120"/>
+                        </a:rPr>
+                        <a:t>tier 상태가 스텝 경계에서만 갱신되어</a:t>
+                      </a:r>
+                      <a:endParaRPr lang="en-US" sz="950" dirty="0">
+                        <a:latin typeface="Arial" charset="0"/>
+                        <a:ea typeface="Arial" charset="0"/>
+                        <a:cs typeface="Arial" charset="0"/>
+                      </a:endParaRPr>
+                    </a:p>
+                    <a:p>
+                      <a:pPr algn="ctr" indent="0" marL="0">
+                        <a:buNone/>
+                      </a:pPr>
+                      <a:r>
+                        <a:rPr lang="en-US" sz="950" dirty="0">
+                          <a:solidFill>
+                            <a:srgbClr val="0B6E6E"/>
+                          </a:solidFill>
+                          <a:latin typeface="Arial" pitchFamily="34" charset="0"/>
+                          <a:ea typeface="Arial" pitchFamily="34" charset="-122"/>
+                          <a:cs typeface="Arial" pitchFamily="34" charset="-120"/>
+                        </a:rPr>
+                        <a:t>앞선 결정이 다음 결정에 보이지 않는다</a:t>
+                      </a:r>
+                      <a:endParaRPr lang="en-US" sz="950" dirty="0">
+                        <a:latin typeface="Arial" charset="0"/>
+                        <a:ea typeface="Arial" charset="0"/>
+                        <a:cs typeface="Arial" charset="0"/>
+                      </a:endParaRPr>
+                    </a:p>
+                  </a:txBody>
+                  <a:tcPr marL="101600" marR="101600" marT="63500" marB="63500" anchor="ctr">
+                    <a:lnL w="9525" cap="flat" cmpd="sng" algn="ctr">
+                      <a:solidFill>
+                        <a:srgbClr val="DCE1E7"/>
+                      </a:solidFill>
+                      <a:prstDash val="solid"/>
+                      <a:round/>
+                      <a:headEnd type="none" w="med" len="med"/>
+                      <a:tailEnd type="none" w="med" len="med"/>
+                    </a:lnL>
+                    <a:lnR w="9525" cap="flat" cmpd="sng" algn="ctr">
+                      <a:solidFill>
+                        <a:srgbClr val="DCE1E7"/>
+                      </a:solidFill>
+                      <a:prstDash val="solid"/>
+                      <a:round/>
+                      <a:headEnd type="none" w="med" len="med"/>
+                      <a:tailEnd type="none" w="med" len="med"/>
+                    </a:lnR>
+                    <a:lnT w="9525" cap="flat" cmpd="sng" algn="ctr">
+                      <a:solidFill>
+                        <a:srgbClr val="DCE1E7"/>
+                      </a:solidFill>
+                      <a:prstDash val="solid"/>
+                      <a:round/>
+                      <a:headEnd type="none" w="med" len="med"/>
+                      <a:tailEnd type="none" w="med" len="med"/>
+                    </a:lnT>
+                    <a:lnB w="9525" cap="flat" cmpd="sng" algn="ctr">
+                      <a:solidFill>
+                        <a:srgbClr val="DCE1E7"/>
+                      </a:solidFill>
+                      <a:prstDash val="solid"/>
+                      <a:round/>
+                      <a:headEnd type="none" w="med" len="med"/>
+                      <a:tailEnd type="none" w="med" len="med"/>
+                    </a:lnB>
+                  </a:tcPr>
+                </a:tc>
+                <a:tc>
+                  <a:txBody>
+                    <a:bodyPr/>
+                    <a:lstStyle/>
+                    <a:p>
+                      <a:pPr algn="ctr" indent="0" marL="0">
+                        <a:buNone/>
+                      </a:pPr>
+                      <a:r>
+                        <a:rPr lang="en-US" sz="950" dirty="0">
+                          <a:solidFill>
+                            <a:srgbClr val="B0503F"/>
+                          </a:solidFill>
+                          <a:latin typeface="Arial" pitchFamily="34" charset="0"/>
+                          <a:ea typeface="Arial" pitchFamily="34" charset="-122"/>
+                          <a:cs typeface="Arial" pitchFamily="34" charset="-120"/>
+                        </a:rPr>
+                        <a:t>지금 상위 tier를 채우면 나중에 올</a:t>
+                      </a:r>
+                      <a:endParaRPr lang="en-US" sz="950" dirty="0">
+                        <a:latin typeface="Arial" charset="0"/>
+                        <a:ea typeface="Arial" charset="0"/>
+                        <a:cs typeface="Arial" charset="0"/>
+                      </a:endParaRPr>
+                    </a:p>
+                    <a:p>
+                      <a:pPr algn="ctr" indent="0" marL="0">
+                        <a:buNone/>
+                      </a:pPr>
+                      <a:r>
+                        <a:rPr lang="en-US" sz="950" dirty="0">
+                          <a:solidFill>
+                            <a:srgbClr val="B0503F"/>
+                          </a:solidFill>
+                          <a:latin typeface="Arial" pitchFamily="34" charset="0"/>
+                          <a:ea typeface="Arial" pitchFamily="34" charset="-122"/>
+                          <a:cs typeface="Arial" pitchFamily="34" charset="-120"/>
+                        </a:rPr>
+                        <a:t>고강도 요청이 들어갈 자리가 없다</a:t>
+                      </a:r>
+                      <a:endParaRPr lang="en-US" sz="950" dirty="0">
+                        <a:latin typeface="Arial" charset="0"/>
+                        <a:ea typeface="Arial" charset="0"/>
+                        <a:cs typeface="Arial" charset="0"/>
+                      </a:endParaRPr>
+                    </a:p>
+                  </a:txBody>
+                  <a:tcPr marL="101600" marR="101600" marT="63500" marB="63500" anchor="ctr">
+                    <a:lnL w="9525" cap="flat" cmpd="sng" algn="ctr">
+                      <a:solidFill>
+                        <a:srgbClr val="DCE1E7"/>
+                      </a:solidFill>
+                      <a:prstDash val="solid"/>
+                      <a:round/>
+                      <a:headEnd type="none" w="med" len="med"/>
+                      <a:tailEnd type="none" w="med" len="med"/>
+                    </a:lnL>
+                    <a:lnR w="9525" cap="flat" cmpd="sng" algn="ctr">
+                      <a:solidFill>
+                        <a:srgbClr val="DCE1E7"/>
+                      </a:solidFill>
+                      <a:prstDash val="solid"/>
+                      <a:round/>
+                      <a:headEnd type="none" w="med" len="med"/>
+                      <a:tailEnd type="none" w="med" len="med"/>
+                    </a:lnR>
+                    <a:lnT w="9525" cap="flat" cmpd="sng" algn="ctr">
+                      <a:solidFill>
+                        <a:srgbClr val="DCE1E7"/>
+                      </a:solidFill>
+                      <a:prstDash val="solid"/>
+                      <a:round/>
+                      <a:headEnd type="none" w="med" len="med"/>
+                      <a:tailEnd type="none" w="med" len="med"/>
+                    </a:lnT>
+                    <a:lnB w="9525" cap="flat" cmpd="sng" algn="ctr">
+                      <a:solidFill>
+                        <a:srgbClr val="DCE1E7"/>
+                      </a:solidFill>
+                      <a:prstDash val="solid"/>
+                      <a:round/>
+                      <a:headEnd type="none" w="med" len="med"/>
+                      <a:tailEnd type="none" w="med" len="med"/>
+                    </a:lnB>
+                  </a:tcPr>
+                </a:tc>
+              </a:tr>
+              <a:tr h="457200">
+                <a:tc>
+                  <a:txBody>
+                    <a:bodyPr/>
+                    <a:lstStyle/>
+                    <a:p>
+                      <a:pPr indent="0" marL="0">
+                        <a:buNone/>
+                      </a:pPr>
+                      <a:r>
+                        <a:rPr lang="en-US" sz="950" b="1" dirty="0">
+                          <a:solidFill>
+                            <a:srgbClr val="7B8794"/>
+                          </a:solidFill>
+                          <a:latin typeface="Arial" pitchFamily="34" charset="0"/>
+                          <a:ea typeface="Arial" pitchFamily="34" charset="-122"/>
+                          <a:cs typeface="Arial" pitchFamily="34" charset="-120"/>
+                        </a:rPr>
+                        <a:t>메커니즘</a:t>
+                      </a:r>
+                      <a:endParaRPr lang="en-US" sz="950" dirty="0">
+                        <a:latin typeface="Arial" charset="0"/>
+                        <a:ea typeface="Arial" charset="0"/>
+                        <a:cs typeface="Arial" charset="0"/>
+                      </a:endParaRPr>
+                    </a:p>
+                  </a:txBody>
+                  <a:tcPr marL="101600" marR="101600" marT="63500" marB="63500" anchor="ctr">
+                    <a:lnL w="9525" cap="flat" cmpd="sng" algn="ctr">
+                      <a:solidFill>
+                        <a:srgbClr val="DCE1E7"/>
+                      </a:solidFill>
+                      <a:prstDash val="solid"/>
+                      <a:round/>
+                      <a:headEnd type="none" w="med" len="med"/>
+                      <a:tailEnd type="none" w="med" len="med"/>
+                    </a:lnL>
+                    <a:lnR w="9525" cap="flat" cmpd="sng" algn="ctr">
+                      <a:solidFill>
+                        <a:srgbClr val="DCE1E7"/>
+                      </a:solidFill>
+                      <a:prstDash val="solid"/>
+                      <a:round/>
+                      <a:headEnd type="none" w="med" len="med"/>
+                      <a:tailEnd type="none" w="med" len="med"/>
+                    </a:lnR>
+                    <a:lnT w="9525" cap="flat" cmpd="sng" algn="ctr">
+                      <a:solidFill>
+                        <a:srgbClr val="DCE1E7"/>
+                      </a:solidFill>
+                      <a:prstDash val="solid"/>
+                      <a:round/>
+                      <a:headEnd type="none" w="med" len="med"/>
+                      <a:tailEnd type="none" w="med" len="med"/>
+                    </a:lnT>
+                    <a:lnB w="9525" cap="flat" cmpd="sng" algn="ctr">
+                      <a:solidFill>
+                        <a:srgbClr val="DCE1E7"/>
+                      </a:solidFill>
+                      <a:prstDash val="solid"/>
+                      <a:round/>
+                      <a:headEnd type="none" w="med" len="med"/>
+                      <a:tailEnd type="none" w="med" len="med"/>
+                    </a:lnB>
+                  </a:tcPr>
+                </a:tc>
+                <a:tc>
+                  <a:txBody>
+                    <a:bodyPr/>
+                    <a:lstStyle/>
+                    <a:p>
+                      <a:pPr algn="ctr" indent="0" marL="0">
+                        <a:buNone/>
+                      </a:pPr>
+                      <a:r>
+                        <a:rPr lang="en-US" sz="950" dirty="0">
+                          <a:solidFill>
+                            <a:srgbClr val="0B6E6E"/>
+                          </a:solidFill>
+                          <a:latin typeface="Arial" pitchFamily="34" charset="0"/>
+                          <a:ea typeface="Arial" pitchFamily="34" charset="-122"/>
+                          <a:cs typeface="Arial" pitchFamily="34" charset="-120"/>
+                        </a:rPr>
+                        <a:t>reserved[tier] += blocks</a:t>
+                      </a:r>
+                      <a:endParaRPr lang="en-US" sz="950" dirty="0">
+                        <a:latin typeface="Arial" charset="0"/>
+                        <a:ea typeface="Arial" charset="0"/>
+                        <a:cs typeface="Arial" charset="0"/>
+                      </a:endParaRPr>
+                    </a:p>
+                    <a:p>
+                      <a:pPr algn="ctr" indent="0" marL="0">
+                        <a:buNone/>
+                      </a:pPr>
+                      <a:r>
+                        <a:rPr lang="en-US" sz="950" dirty="0">
+                          <a:solidFill>
+                            <a:srgbClr val="0B6E6E"/>
+                          </a:solidFill>
+                          <a:latin typeface="Arial" pitchFamily="34" charset="0"/>
+                          <a:ea typeface="Arial" pitchFamily="34" charset="-122"/>
+                          <a:cs typeface="Arial" pitchFamily="34" charset="-120"/>
+                        </a:rPr>
+                        <a:t>free = capacity - used - reserved</a:t>
+                      </a:r>
+                      <a:endParaRPr lang="en-US" sz="950" dirty="0">
+                        <a:latin typeface="Arial" charset="0"/>
+                        <a:ea typeface="Arial" charset="0"/>
+                        <a:cs typeface="Arial" charset="0"/>
+                      </a:endParaRPr>
+                    </a:p>
+                  </a:txBody>
+                  <a:tcPr marL="101600" marR="101600" marT="63500" marB="63500" anchor="ctr">
+                    <a:lnL w="9525" cap="flat" cmpd="sng" algn="ctr">
+                      <a:solidFill>
+                        <a:srgbClr val="DCE1E7"/>
+                      </a:solidFill>
+                      <a:prstDash val="solid"/>
+                      <a:round/>
+                      <a:headEnd type="none" w="med" len="med"/>
+                      <a:tailEnd type="none" w="med" len="med"/>
+                    </a:lnL>
+                    <a:lnR w="9525" cap="flat" cmpd="sng" algn="ctr">
+                      <a:solidFill>
+                        <a:srgbClr val="DCE1E7"/>
+                      </a:solidFill>
+                      <a:prstDash val="solid"/>
+                      <a:round/>
+                      <a:headEnd type="none" w="med" len="med"/>
+                      <a:tailEnd type="none" w="med" len="med"/>
+                    </a:lnR>
+                    <a:lnT w="9525" cap="flat" cmpd="sng" algn="ctr">
+                      <a:solidFill>
+                        <a:srgbClr val="DCE1E7"/>
+                      </a:solidFill>
+                      <a:prstDash val="solid"/>
+                      <a:round/>
+                      <a:headEnd type="none" w="med" len="med"/>
+                      <a:tailEnd type="none" w="med" len="med"/>
+                    </a:lnT>
+                    <a:lnB w="9525" cap="flat" cmpd="sng" algn="ctr">
+                      <a:solidFill>
+                        <a:srgbClr val="DCE1E7"/>
+                      </a:solidFill>
+                      <a:prstDash val="solid"/>
+                      <a:round/>
+                      <a:headEnd type="none" w="med" len="med"/>
+                      <a:tailEnd type="none" w="med" len="med"/>
+                    </a:lnB>
+                  </a:tcPr>
+                </a:tc>
+                <a:tc>
+                  <a:txBody>
+                    <a:bodyPr/>
+                    <a:lstStyle/>
+                    <a:p>
+                      <a:pPr algn="ctr" indent="0" marL="0">
+                        <a:buNone/>
+                      </a:pPr>
+                      <a:r>
+                        <a:rPr lang="en-US" sz="950" dirty="0">
+                          <a:solidFill>
+                            <a:srgbClr val="B0503F"/>
+                          </a:solidFill>
+                          <a:latin typeface="Arial" pitchFamily="34" charset="0"/>
+                          <a:ea typeface="Arial" pitchFamily="34" charset="-122"/>
+                          <a:cs typeface="Arial" pitchFamily="34" charset="-120"/>
+                        </a:rPr>
+                        <a:t>빈 tier에도 값을 매긴다</a:t>
+                      </a:r>
+                      <a:endParaRPr lang="en-US" sz="950" dirty="0">
+                        <a:latin typeface="Arial" charset="0"/>
+                        <a:ea typeface="Arial" charset="0"/>
+                        <a:cs typeface="Arial" charset="0"/>
+                      </a:endParaRPr>
+                    </a:p>
+                    <a:p>
+                      <a:pPr algn="ctr" indent="0" marL="0">
+                        <a:buNone/>
+                      </a:pPr>
+                      <a:r>
+                        <a:rPr lang="en-US" sz="950" dirty="0">
+                          <a:solidFill>
+                            <a:srgbClr val="B0503F"/>
+                          </a:solidFill>
+                          <a:latin typeface="Arial" pitchFamily="34" charset="0"/>
+                          <a:ea typeface="Arial" pitchFamily="34" charset="-122"/>
+                          <a:cs typeface="Arial" pitchFamily="34" charset="-120"/>
+                        </a:rPr>
+                        <a:t>(희소성 항 바닥을 0이 아닌 값으로)</a:t>
+                      </a:r>
+                      <a:endParaRPr lang="en-US" sz="950" dirty="0">
+                        <a:latin typeface="Arial" charset="0"/>
+                        <a:ea typeface="Arial" charset="0"/>
+                        <a:cs typeface="Arial" charset="0"/>
+                      </a:endParaRPr>
+                    </a:p>
+                  </a:txBody>
+                  <a:tcPr marL="101600" marR="101600" marT="63500" marB="63500" anchor="ctr">
+                    <a:lnL w="9525" cap="flat" cmpd="sng" algn="ctr">
+                      <a:solidFill>
+                        <a:srgbClr val="DCE1E7"/>
+                      </a:solidFill>
+                      <a:prstDash val="solid"/>
+                      <a:round/>
+                      <a:headEnd type="none" w="med" len="med"/>
+                      <a:tailEnd type="none" w="med" len="med"/>
+                    </a:lnL>
+                    <a:lnR w="9525" cap="flat" cmpd="sng" algn="ctr">
+                      <a:solidFill>
+                        <a:srgbClr val="DCE1E7"/>
+                      </a:solidFill>
+                      <a:prstDash val="solid"/>
+                      <a:round/>
+                      <a:headEnd type="none" w="med" len="med"/>
+                      <a:tailEnd type="none" w="med" len="med"/>
+                    </a:lnR>
+                    <a:lnT w="9525" cap="flat" cmpd="sng" algn="ctr">
+                      <a:solidFill>
+                        <a:srgbClr val="DCE1E7"/>
+                      </a:solidFill>
+                      <a:prstDash val="solid"/>
+                      <a:round/>
+                      <a:headEnd type="none" w="med" len="med"/>
+                      <a:tailEnd type="none" w="med" len="med"/>
+                    </a:lnT>
+                    <a:lnB w="9525" cap="flat" cmpd="sng" algn="ctr">
+                      <a:solidFill>
+                        <a:srgbClr val="DCE1E7"/>
+                      </a:solidFill>
+                      <a:prstDash val="solid"/>
+                      <a:round/>
+                      <a:headEnd type="none" w="med" len="med"/>
+                      <a:tailEnd type="none" w="med" len="med"/>
+                    </a:lnB>
+                  </a:tcPr>
+                </a:tc>
+              </a:tr>
+              <a:tr h="457200">
+                <a:tc>
+                  <a:txBody>
+                    <a:bodyPr/>
+                    <a:lstStyle/>
+                    <a:p>
+                      <a:pPr indent="0" marL="0">
+                        <a:buNone/>
+                      </a:pPr>
+                      <a:r>
+                        <a:rPr lang="en-US" sz="950" b="1" dirty="0">
+                          <a:solidFill>
+                            <a:srgbClr val="7B8794"/>
+                          </a:solidFill>
+                          <a:latin typeface="Arial" pitchFamily="34" charset="0"/>
+                          <a:ea typeface="Arial" pitchFamily="34" charset="-122"/>
+                          <a:cs typeface="Arial" pitchFamily="34" charset="-120"/>
+                        </a:rPr>
+                        <a:t>유보량은?</a:t>
+                      </a:r>
+                      <a:endParaRPr lang="en-US" sz="950" dirty="0">
+                        <a:latin typeface="Arial" charset="0"/>
+                        <a:ea typeface="Arial" charset="0"/>
+                        <a:cs typeface="Arial" charset="0"/>
+                      </a:endParaRPr>
+                    </a:p>
+                  </a:txBody>
+                  <a:tcPr marL="101600" marR="101600" marT="63500" marB="63500" anchor="ctr">
+                    <a:lnL w="9525" cap="flat" cmpd="sng" algn="ctr">
+                      <a:solidFill>
+                        <a:srgbClr val="DCE1E7"/>
+                      </a:solidFill>
+                      <a:prstDash val="solid"/>
+                      <a:round/>
+                      <a:headEnd type="none" w="med" len="med"/>
+                      <a:tailEnd type="none" w="med" len="med"/>
+                    </a:lnL>
+                    <a:lnR w="9525" cap="flat" cmpd="sng" algn="ctr">
+                      <a:solidFill>
+                        <a:srgbClr val="DCE1E7"/>
+                      </a:solidFill>
+                      <a:prstDash val="solid"/>
+                      <a:round/>
+                      <a:headEnd type="none" w="med" len="med"/>
+                      <a:tailEnd type="none" w="med" len="med"/>
+                    </a:lnR>
+                    <a:lnT w="9525" cap="flat" cmpd="sng" algn="ctr">
+                      <a:solidFill>
+                        <a:srgbClr val="DCE1E7"/>
+                      </a:solidFill>
+                      <a:prstDash val="solid"/>
+                      <a:round/>
+                      <a:headEnd type="none" w="med" len="med"/>
+                      <a:tailEnd type="none" w="med" len="med"/>
+                    </a:lnT>
+                    <a:lnB w="9525" cap="flat" cmpd="sng" algn="ctr">
+                      <a:solidFill>
+                        <a:srgbClr val="DCE1E7"/>
+                      </a:solidFill>
+                      <a:prstDash val="solid"/>
+                      <a:round/>
+                      <a:headEnd type="none" w="med" len="med"/>
+                      <a:tailEnd type="none" w="med" len="med"/>
+                    </a:lnB>
+                  </a:tcPr>
+                </a:tc>
+                <a:tc>
+                  <a:txBody>
+                    <a:bodyPr/>
+                    <a:lstStyle/>
+                    <a:p>
+                      <a:pPr algn="ctr" indent="0" marL="0">
+                        <a:buNone/>
+                      </a:pPr>
+                      <a:r>
+                        <a:rPr lang="en-US" sz="950" dirty="0">
+                          <a:solidFill>
+                            <a:srgbClr val="0B6E6E"/>
+                          </a:solidFill>
+                          <a:latin typeface="Arial" pitchFamily="34" charset="0"/>
+                          <a:ea typeface="Arial" pitchFamily="34" charset="-122"/>
+                          <a:cs typeface="Arial" pitchFamily="34" charset="-120"/>
+                        </a:rPr>
+                        <a:t>계산된다 — 이번 스텝에서 이미 약속한 양</a:t>
+                      </a:r>
+                      <a:endParaRPr lang="en-US" sz="950" dirty="0">
+                        <a:latin typeface="Arial" charset="0"/>
+                        <a:ea typeface="Arial" charset="0"/>
+                        <a:cs typeface="Arial" charset="0"/>
+                      </a:endParaRPr>
+                    </a:p>
+                  </a:txBody>
+                  <a:tcPr marL="101600" marR="101600" marT="63500" marB="63500" anchor="ctr">
+                    <a:lnL w="9525" cap="flat" cmpd="sng" algn="ctr">
+                      <a:solidFill>
+                        <a:srgbClr val="DCE1E7"/>
+                      </a:solidFill>
+                      <a:prstDash val="solid"/>
+                      <a:round/>
+                      <a:headEnd type="none" w="med" len="med"/>
+                      <a:tailEnd type="none" w="med" len="med"/>
+                    </a:lnL>
+                    <a:lnR w="9525" cap="flat" cmpd="sng" algn="ctr">
+                      <a:solidFill>
+                        <a:srgbClr val="DCE1E7"/>
+                      </a:solidFill>
+                      <a:prstDash val="solid"/>
+                      <a:round/>
+                      <a:headEnd type="none" w="med" len="med"/>
+                      <a:tailEnd type="none" w="med" len="med"/>
+                    </a:lnR>
+                    <a:lnT w="9525" cap="flat" cmpd="sng" algn="ctr">
+                      <a:solidFill>
+                        <a:srgbClr val="DCE1E7"/>
+                      </a:solidFill>
+                      <a:prstDash val="solid"/>
+                      <a:round/>
+                      <a:headEnd type="none" w="med" len="med"/>
+                      <a:tailEnd type="none" w="med" len="med"/>
+                    </a:lnT>
+                    <a:lnB w="9525" cap="flat" cmpd="sng" algn="ctr">
+                      <a:solidFill>
+                        <a:srgbClr val="DCE1E7"/>
+                      </a:solidFill>
+                      <a:prstDash val="solid"/>
+                      <a:round/>
+                      <a:headEnd type="none" w="med" len="med"/>
+                      <a:tailEnd type="none" w="med" len="med"/>
+                    </a:lnB>
+                  </a:tcPr>
+                </a:tc>
+                <a:tc>
+                  <a:txBody>
+                    <a:bodyPr/>
+                    <a:lstStyle/>
+                    <a:p>
+                      <a:pPr algn="ctr" indent="0" marL="0">
+                        <a:buNone/>
+                      </a:pPr>
+                      <a:r>
+                        <a:rPr lang="en-US" sz="950" dirty="0">
+                          <a:solidFill>
+                            <a:srgbClr val="B0503F"/>
+                          </a:solidFill>
+                          <a:latin typeface="Arial" pitchFamily="34" charset="0"/>
+                          <a:ea typeface="Arial" pitchFamily="34" charset="-122"/>
+                          <a:cs typeface="Arial" pitchFamily="34" charset="-120"/>
+                        </a:rPr>
+                        <a:t>튜닝 파라미터 — 미래 도착 분포에 의존</a:t>
+                      </a:r>
+                      <a:endParaRPr lang="en-US" sz="950" dirty="0">
+                        <a:latin typeface="Arial" charset="0"/>
+                        <a:ea typeface="Arial" charset="0"/>
+                        <a:cs typeface="Arial" charset="0"/>
+                      </a:endParaRPr>
+                    </a:p>
+                  </a:txBody>
+                  <a:tcPr marL="101600" marR="101600" marT="63500" marB="63500" anchor="ctr">
+                    <a:lnL w="9525" cap="flat" cmpd="sng" algn="ctr">
+                      <a:solidFill>
+                        <a:srgbClr val="DCE1E7"/>
+                      </a:solidFill>
+                      <a:prstDash val="solid"/>
+                      <a:round/>
+                      <a:headEnd type="none" w="med" len="med"/>
+                      <a:tailEnd type="none" w="med" len="med"/>
+                    </a:lnL>
+                    <a:lnR w="9525" cap="flat" cmpd="sng" algn="ctr">
+                      <a:solidFill>
+                        <a:srgbClr val="DCE1E7"/>
+                      </a:solidFill>
+                      <a:prstDash val="solid"/>
+                      <a:round/>
+                      <a:headEnd type="none" w="med" len="med"/>
+                      <a:tailEnd type="none" w="med" len="med"/>
+                    </a:lnR>
+                    <a:lnT w="9525" cap="flat" cmpd="sng" algn="ctr">
+                      <a:solidFill>
+                        <a:srgbClr val="DCE1E7"/>
+                      </a:solidFill>
+                      <a:prstDash val="solid"/>
+                      <a:round/>
+                      <a:headEnd type="none" w="med" len="med"/>
+                      <a:tailEnd type="none" w="med" len="med"/>
+                    </a:lnT>
+                    <a:lnB w="9525" cap="flat" cmpd="sng" algn="ctr">
+                      <a:solidFill>
+                        <a:srgbClr val="DCE1E7"/>
+                      </a:solidFill>
+                      <a:prstDash val="solid"/>
+                      <a:round/>
+                      <a:headEnd type="none" w="med" len="med"/>
+                      <a:tailEnd type="none" w="med" len="med"/>
+                    </a:lnB>
+                  </a:tcPr>
+                </a:tc>
+              </a:tr>
+              <a:tr h="457200">
+                <a:tc>
+                  <a:txBody>
+                    <a:bodyPr/>
+                    <a:lstStyle/>
+                    <a:p>
+                      <a:pPr indent="0" marL="0">
+                        <a:buNone/>
+                      </a:pPr>
+                      <a:r>
+                        <a:rPr lang="en-US" sz="950" b="1" dirty="0">
+                          <a:solidFill>
+                            <a:srgbClr val="7B8794"/>
+                          </a:solidFill>
+                          <a:latin typeface="Arial" pitchFamily="34" charset="0"/>
+                          <a:ea typeface="Arial" pitchFamily="34" charset="-122"/>
+                          <a:cs typeface="Arial" pitchFamily="34" charset="-120"/>
+                        </a:rPr>
+                        <a:t>정답이 있나</a:t>
+                      </a:r>
+                      <a:endParaRPr lang="en-US" sz="950" dirty="0">
+                        <a:latin typeface="Arial" charset="0"/>
+                        <a:ea typeface="Arial" charset="0"/>
+                        <a:cs typeface="Arial" charset="0"/>
+                      </a:endParaRPr>
+                    </a:p>
+                  </a:txBody>
+                  <a:tcPr marL="101600" marR="101600" marT="63500" marB="63500" anchor="ctr">
+                    <a:lnL w="9525" cap="flat" cmpd="sng" algn="ctr">
+                      <a:solidFill>
+                        <a:srgbClr val="DCE1E7"/>
+                      </a:solidFill>
+                      <a:prstDash val="solid"/>
+                      <a:round/>
+                      <a:headEnd type="none" w="med" len="med"/>
+                      <a:tailEnd type="none" w="med" len="med"/>
+                    </a:lnL>
+                    <a:lnR w="9525" cap="flat" cmpd="sng" algn="ctr">
+                      <a:solidFill>
+                        <a:srgbClr val="DCE1E7"/>
+                      </a:solidFill>
+                      <a:prstDash val="solid"/>
+                      <a:round/>
+                      <a:headEnd type="none" w="med" len="med"/>
+                      <a:tailEnd type="none" w="med" len="med"/>
+                    </a:lnR>
+                    <a:lnT w="9525" cap="flat" cmpd="sng" algn="ctr">
+                      <a:solidFill>
+                        <a:srgbClr val="DCE1E7"/>
+                      </a:solidFill>
+                      <a:prstDash val="solid"/>
+                      <a:round/>
+                      <a:headEnd type="none" w="med" len="med"/>
+                      <a:tailEnd type="none" w="med" len="med"/>
+                    </a:lnT>
+                    <a:lnB w="9525" cap="flat" cmpd="sng" algn="ctr">
+                      <a:solidFill>
+                        <a:srgbClr val="DCE1E7"/>
+                      </a:solidFill>
+                      <a:prstDash val="solid"/>
+                      <a:round/>
+                      <a:headEnd type="none" w="med" len="med"/>
+                      <a:tailEnd type="none" w="med" len="med"/>
+                    </a:lnB>
+                  </a:tcPr>
+                </a:tc>
+                <a:tc>
+                  <a:txBody>
+                    <a:bodyPr/>
+                    <a:lstStyle/>
+                    <a:p>
+                      <a:pPr algn="ctr" indent="0" marL="0">
+                        <a:buNone/>
+                      </a:pPr>
+                      <a:r>
+                        <a:rPr lang="en-US" sz="950" dirty="0">
+                          <a:solidFill>
+                            <a:srgbClr val="0B6E6E"/>
+                          </a:solidFill>
+                          <a:latin typeface="Arial" pitchFamily="34" charset="0"/>
+                          <a:ea typeface="Arial" pitchFamily="34" charset="-122"/>
+                          <a:cs typeface="Arial" pitchFamily="34" charset="-120"/>
+                        </a:rPr>
+                        <a:t>있다</a:t>
+                      </a:r>
+                      <a:endParaRPr lang="en-US" sz="950" dirty="0">
+                        <a:latin typeface="Arial" charset="0"/>
+                        <a:ea typeface="Arial" charset="0"/>
+                        <a:cs typeface="Arial" charset="0"/>
+                      </a:endParaRPr>
+                    </a:p>
+                  </a:txBody>
+                  <a:tcPr marL="101600" marR="101600" marT="63500" marB="63500" anchor="ctr">
+                    <a:lnL w="9525" cap="flat" cmpd="sng" algn="ctr">
+                      <a:solidFill>
+                        <a:srgbClr val="DCE1E7"/>
+                      </a:solidFill>
+                      <a:prstDash val="solid"/>
+                      <a:round/>
+                      <a:headEnd type="none" w="med" len="med"/>
+                      <a:tailEnd type="none" w="med" len="med"/>
+                    </a:lnL>
+                    <a:lnR w="9525" cap="flat" cmpd="sng" algn="ctr">
+                      <a:solidFill>
+                        <a:srgbClr val="DCE1E7"/>
+                      </a:solidFill>
+                      <a:prstDash val="solid"/>
+                      <a:round/>
+                      <a:headEnd type="none" w="med" len="med"/>
+                      <a:tailEnd type="none" w="med" len="med"/>
+                    </a:lnR>
+                    <a:lnT w="9525" cap="flat" cmpd="sng" algn="ctr">
+                      <a:solidFill>
+                        <a:srgbClr val="DCE1E7"/>
+                      </a:solidFill>
+                      <a:prstDash val="solid"/>
+                      <a:round/>
+                      <a:headEnd type="none" w="med" len="med"/>
+                      <a:tailEnd type="none" w="med" len="med"/>
+                    </a:lnT>
+                    <a:lnB w="9525" cap="flat" cmpd="sng" algn="ctr">
+                      <a:solidFill>
+                        <a:srgbClr val="DCE1E7"/>
+                      </a:solidFill>
+                      <a:prstDash val="solid"/>
+                      <a:round/>
+                      <a:headEnd type="none" w="med" len="med"/>
+                      <a:tailEnd type="none" w="med" len="med"/>
+                    </a:lnB>
+                  </a:tcPr>
+                </a:tc>
+                <a:tc>
+                  <a:txBody>
+                    <a:bodyPr/>
+                    <a:lstStyle/>
+                    <a:p>
+                      <a:pPr algn="ctr" indent="0" marL="0">
+                        <a:buNone/>
+                      </a:pPr>
+                      <a:r>
+                        <a:rPr lang="en-US" sz="950" dirty="0">
+                          <a:solidFill>
+                            <a:srgbClr val="B0503F"/>
+                          </a:solidFill>
+                          <a:latin typeface="Arial" pitchFamily="34" charset="0"/>
+                          <a:ea typeface="Arial" pitchFamily="34" charset="-122"/>
+                          <a:cs typeface="Arial" pitchFamily="34" charset="-120"/>
+                        </a:rPr>
+                        <a:t>없다 (관측만으로는)</a:t>
+                      </a:r>
+                      <a:endParaRPr lang="en-US" sz="950" dirty="0">
+                        <a:latin typeface="Arial" charset="0"/>
+                        <a:ea typeface="Arial" charset="0"/>
+                        <a:cs typeface="Arial" charset="0"/>
+                      </a:endParaRPr>
+                    </a:p>
+                  </a:txBody>
+                  <a:tcPr marL="101600" marR="101600" marT="63500" marB="63500" anchor="ctr">
+                    <a:lnL w="9525" cap="flat" cmpd="sng" algn="ctr">
+                      <a:solidFill>
+                        <a:srgbClr val="DCE1E7"/>
+                      </a:solidFill>
+                      <a:prstDash val="solid"/>
+                      <a:round/>
+                      <a:headEnd type="none" w="med" len="med"/>
+                      <a:tailEnd type="none" w="med" len="med"/>
+                    </a:lnL>
+                    <a:lnR w="9525" cap="flat" cmpd="sng" algn="ctr">
+                      <a:solidFill>
+                        <a:srgbClr val="DCE1E7"/>
+                      </a:solidFill>
+                      <a:prstDash val="solid"/>
+                      <a:round/>
+                      <a:headEnd type="none" w="med" len="med"/>
+                      <a:tailEnd type="none" w="med" len="med"/>
+                    </a:lnR>
+                    <a:lnT w="9525" cap="flat" cmpd="sng" algn="ctr">
+                      <a:solidFill>
+                        <a:srgbClr val="DCE1E7"/>
+                      </a:solidFill>
+                      <a:prstDash val="solid"/>
+                      <a:round/>
+                      <a:headEnd type="none" w="med" len="med"/>
+                      <a:tailEnd type="none" w="med" len="med"/>
+                    </a:lnT>
+                    <a:lnB w="9525" cap="flat" cmpd="sng" algn="ctr">
+                      <a:solidFill>
+                        <a:srgbClr val="DCE1E7"/>
+                      </a:solidFill>
+                      <a:prstDash val="solid"/>
+                      <a:round/>
+                      <a:headEnd type="none" w="med" len="med"/>
+                      <a:tailEnd type="none" w="med" len="med"/>
+                    </a:lnB>
+                  </a:tcPr>
+                </a:tc>
+              </a:tr>
+              <a:tr h="457200">
+                <a:tc>
+                  <a:txBody>
+                    <a:bodyPr/>
+                    <a:lstStyle/>
+                    <a:p>
+                      <a:pPr indent="0" marL="0">
+                        <a:buNone/>
+                      </a:pPr>
+                      <a:r>
+                        <a:rPr lang="en-US" sz="950" b="1" dirty="0">
+                          <a:solidFill>
+                            <a:srgbClr val="7B8794"/>
+                          </a:solidFill>
+                          <a:latin typeface="Arial" pitchFamily="34" charset="0"/>
+                          <a:ea typeface="Arial" pitchFamily="34" charset="-122"/>
+                          <a:cs typeface="Arial" pitchFamily="34" charset="-120"/>
+                        </a:rPr>
+                        <a:t>없으면</a:t>
+                      </a:r>
+                      <a:endParaRPr lang="en-US" sz="950" dirty="0">
+                        <a:latin typeface="Arial" charset="0"/>
+                        <a:ea typeface="Arial" charset="0"/>
+                        <a:cs typeface="Arial" charset="0"/>
+                      </a:endParaRPr>
+                    </a:p>
+                  </a:txBody>
+                  <a:tcPr marL="101600" marR="101600" marT="63500" marB="63500" anchor="ctr">
+                    <a:lnL w="9525" cap="flat" cmpd="sng" algn="ctr">
+                      <a:solidFill>
+                        <a:srgbClr val="DCE1E7"/>
+                      </a:solidFill>
+                      <a:prstDash val="solid"/>
+                      <a:round/>
+                      <a:headEnd type="none" w="med" len="med"/>
+                      <a:tailEnd type="none" w="med" len="med"/>
+                    </a:lnL>
+                    <a:lnR w="9525" cap="flat" cmpd="sng" algn="ctr">
+                      <a:solidFill>
+                        <a:srgbClr val="DCE1E7"/>
+                      </a:solidFill>
+                      <a:prstDash val="solid"/>
+                      <a:round/>
+                      <a:headEnd type="none" w="med" len="med"/>
+                      <a:tailEnd type="none" w="med" len="med"/>
+                    </a:lnR>
+                    <a:lnT w="9525" cap="flat" cmpd="sng" algn="ctr">
+                      <a:solidFill>
+                        <a:srgbClr val="DCE1E7"/>
+                      </a:solidFill>
+                      <a:prstDash val="solid"/>
+                      <a:round/>
+                      <a:headEnd type="none" w="med" len="med"/>
+                      <a:tailEnd type="none" w="med" len="med"/>
+                    </a:lnT>
+                    <a:lnB w="9525" cap="flat" cmpd="sng" algn="ctr">
+                      <a:solidFill>
+                        <a:srgbClr val="DCE1E7"/>
+                      </a:solidFill>
+                      <a:prstDash val="solid"/>
+                      <a:round/>
+                      <a:headEnd type="none" w="med" len="med"/>
+                      <a:tailEnd type="none" w="med" len="med"/>
+                    </a:lnB>
+                  </a:tcPr>
+                </a:tc>
+                <a:tc>
+                  <a:txBody>
+                    <a:bodyPr/>
+                    <a:lstStyle/>
+                    <a:p>
+                      <a:pPr algn="ctr" indent="0" marL="0">
+                        <a:buNone/>
+                      </a:pPr>
+                      <a:r>
+                        <a:rPr lang="en-US" sz="950" dirty="0">
+                          <a:solidFill>
+                            <a:srgbClr val="0B6E6E"/>
+                          </a:solidFill>
+                          <a:latin typeface="Arial" pitchFamily="34" charset="0"/>
+                          <a:ea typeface="Arial" pitchFamily="34" charset="-122"/>
+                          <a:cs typeface="Arial" pitchFamily="34" charset="-120"/>
+                        </a:rPr>
+                        <a:t>용량 초과 커밋 (실측 overcommit 72회)</a:t>
+                      </a:r>
+                      <a:endParaRPr lang="en-US" sz="950" dirty="0">
+                        <a:latin typeface="Arial" charset="0"/>
+                        <a:ea typeface="Arial" charset="0"/>
+                        <a:cs typeface="Arial" charset="0"/>
+                      </a:endParaRPr>
+                    </a:p>
+                  </a:txBody>
+                  <a:tcPr marL="101600" marR="101600" marT="63500" marB="63500" anchor="ctr">
+                    <a:lnL w="9525" cap="flat" cmpd="sng" algn="ctr">
+                      <a:solidFill>
+                        <a:srgbClr val="DCE1E7"/>
+                      </a:solidFill>
+                      <a:prstDash val="solid"/>
+                      <a:round/>
+                      <a:headEnd type="none" w="med" len="med"/>
+                      <a:tailEnd type="none" w="med" len="med"/>
+                    </a:lnL>
+                    <a:lnR w="9525" cap="flat" cmpd="sng" algn="ctr">
+                      <a:solidFill>
+                        <a:srgbClr val="DCE1E7"/>
+                      </a:solidFill>
+                      <a:prstDash val="solid"/>
+                      <a:round/>
+                      <a:headEnd type="none" w="med" len="med"/>
+                      <a:tailEnd type="none" w="med" len="med"/>
+                    </a:lnR>
+                    <a:lnT w="9525" cap="flat" cmpd="sng" algn="ctr">
+                      <a:solidFill>
+                        <a:srgbClr val="DCE1E7"/>
+                      </a:solidFill>
+                      <a:prstDash val="solid"/>
+                      <a:round/>
+                      <a:headEnd type="none" w="med" len="med"/>
+                      <a:tailEnd type="none" w="med" len="med"/>
+                    </a:lnT>
+                    <a:lnB w="9525" cap="flat" cmpd="sng" algn="ctr">
+                      <a:solidFill>
+                        <a:srgbClr val="DCE1E7"/>
+                      </a:solidFill>
+                      <a:prstDash val="solid"/>
+                      <a:round/>
+                      <a:headEnd type="none" w="med" len="med"/>
+                      <a:tailEnd type="none" w="med" len="med"/>
+                    </a:lnB>
+                  </a:tcPr>
+                </a:tc>
+                <a:tc>
+                  <a:txBody>
+                    <a:bodyPr/>
+                    <a:lstStyle/>
+                    <a:p>
+                      <a:pPr algn="ctr" indent="0" marL="0">
+                        <a:buNone/>
+                      </a:pPr>
+                      <a:r>
+                        <a:rPr lang="en-US" sz="950" dirty="0">
+                          <a:solidFill>
+                            <a:srgbClr val="B0503F"/>
+                          </a:solidFill>
+                          <a:latin typeface="Arial" pitchFamily="34" charset="0"/>
+                          <a:ea typeface="Arial" pitchFamily="34" charset="-122"/>
+                          <a:cs typeface="Arial" pitchFamily="34" charset="-120"/>
+                        </a:rPr>
+                        <a:t>구분 능력 0 (2.11 ≈ C1의 2.06)</a:t>
+                      </a:r>
+                      <a:endParaRPr lang="en-US" sz="950" dirty="0">
+                        <a:latin typeface="Arial" charset="0"/>
+                        <a:ea typeface="Arial" charset="0"/>
+                        <a:cs typeface="Arial" charset="0"/>
+                      </a:endParaRPr>
+                    </a:p>
+                  </a:txBody>
+                  <a:tcPr marL="101600" marR="101600" marT="63500" marB="63500" anchor="ctr">
+                    <a:lnL w="9525" cap="flat" cmpd="sng" algn="ctr">
+                      <a:solidFill>
+                        <a:srgbClr val="DCE1E7"/>
+                      </a:solidFill>
+                      <a:prstDash val="solid"/>
+                      <a:round/>
+                      <a:headEnd type="none" w="med" len="med"/>
+                      <a:tailEnd type="none" w="med" len="med"/>
+                    </a:lnL>
+                    <a:lnR w="9525" cap="flat" cmpd="sng" algn="ctr">
+                      <a:solidFill>
+                        <a:srgbClr val="DCE1E7"/>
+                      </a:solidFill>
+                      <a:prstDash val="solid"/>
+                      <a:round/>
+                      <a:headEnd type="none" w="med" len="med"/>
+                      <a:tailEnd type="none" w="med" len="med"/>
+                    </a:lnR>
+                    <a:lnT w="9525" cap="flat" cmpd="sng" algn="ctr">
+                      <a:solidFill>
+                        <a:srgbClr val="DCE1E7"/>
+                      </a:solidFill>
+                      <a:prstDash val="solid"/>
+                      <a:round/>
+                      <a:headEnd type="none" w="med" len="med"/>
+                      <a:tailEnd type="none" w="med" len="med"/>
+                    </a:lnT>
+                    <a:lnB w="9525" cap="flat" cmpd="sng" algn="ctr">
+                      <a:solidFill>
+                        <a:srgbClr val="DCE1E7"/>
+                      </a:solidFill>
+                      <a:prstDash val="solid"/>
+                      <a:round/>
+                      <a:headEnd type="none" w="med" len="med"/>
+                      <a:tailEnd type="none" w="med" len="med"/>
+                    </a:lnB>
+                  </a:tcPr>
+                </a:tc>
+              </a:tr>
+              <a:tr h="457200">
+                <a:tc>
+                  <a:txBody>
+                    <a:bodyPr/>
+                    <a:lstStyle/>
+                    <a:p>
+                      <a:pPr indent="0" marL="0">
+                        <a:buNone/>
+                      </a:pPr>
+                      <a:r>
+                        <a:rPr lang="en-US" sz="950" b="1" dirty="0">
+                          <a:solidFill>
+                            <a:srgbClr val="7B8794"/>
+                          </a:solidFill>
+                          <a:latin typeface="Arial" pitchFamily="34" charset="0"/>
+                          <a:ea typeface="Arial" pitchFamily="34" charset="-122"/>
+                          <a:cs typeface="Arial" pitchFamily="34" charset="-120"/>
+                        </a:rPr>
+                        <a:t>성격</a:t>
+                      </a:r>
+                      <a:endParaRPr lang="en-US" sz="950" dirty="0">
+                        <a:latin typeface="Arial" charset="0"/>
+                        <a:ea typeface="Arial" charset="0"/>
+                        <a:cs typeface="Arial" charset="0"/>
+                      </a:endParaRPr>
+                    </a:p>
+                  </a:txBody>
+                  <a:tcPr marL="101600" marR="101600" marT="63500" marB="63500" anchor="ctr">
+                    <a:lnL w="9525" cap="flat" cmpd="sng" algn="ctr">
+                      <a:solidFill>
+                        <a:srgbClr val="DCE1E7"/>
+                      </a:solidFill>
+                      <a:prstDash val="solid"/>
+                      <a:round/>
+                      <a:headEnd type="none" w="med" len="med"/>
+                      <a:tailEnd type="none" w="med" len="med"/>
+                    </a:lnL>
+                    <a:lnR w="9525" cap="flat" cmpd="sng" algn="ctr">
+                      <a:solidFill>
+                        <a:srgbClr val="DCE1E7"/>
+                      </a:solidFill>
+                      <a:prstDash val="solid"/>
+                      <a:round/>
+                      <a:headEnd type="none" w="med" len="med"/>
+                      <a:tailEnd type="none" w="med" len="med"/>
+                    </a:lnR>
+                    <a:lnT w="9525" cap="flat" cmpd="sng" algn="ctr">
+                      <a:solidFill>
+                        <a:srgbClr val="DCE1E7"/>
+                      </a:solidFill>
+                      <a:prstDash val="solid"/>
+                      <a:round/>
+                      <a:headEnd type="none" w="med" len="med"/>
+                      <a:tailEnd type="none" w="med" len="med"/>
+                    </a:lnT>
+                    <a:lnB w="9525" cap="flat" cmpd="sng" algn="ctr">
+                      <a:solidFill>
+                        <a:srgbClr val="DCE1E7"/>
+                      </a:solidFill>
+                      <a:prstDash val="solid"/>
+                      <a:round/>
+                      <a:headEnd type="none" w="med" len="med"/>
+                      <a:tailEnd type="none" w="med" len="med"/>
+                    </a:lnB>
+                  </a:tcPr>
+                </a:tc>
+                <a:tc>
+                  <a:txBody>
+                    <a:bodyPr/>
+                    <a:lstStyle/>
+                    <a:p>
+                      <a:pPr algn="ctr" indent="0" marL="0">
+                        <a:buNone/>
+                      </a:pPr>
+                      <a:r>
+                        <a:rPr lang="en-US" sz="950" dirty="0">
+                          <a:solidFill>
+                            <a:srgbClr val="0B6E6E"/>
+                          </a:solidFill>
+                          <a:latin typeface="Arial" pitchFamily="34" charset="0"/>
+                          <a:ea typeface="Arial" pitchFamily="34" charset="-122"/>
+                          <a:cs typeface="Arial" pitchFamily="34" charset="-120"/>
+                        </a:rPr>
+                        <a:t>정합성 요건</a:t>
+                      </a:r>
+                      <a:endParaRPr lang="en-US" sz="950" dirty="0">
+                        <a:latin typeface="Arial" charset="0"/>
+                        <a:ea typeface="Arial" charset="0"/>
+                        <a:cs typeface="Arial" charset="0"/>
+                      </a:endParaRPr>
+                    </a:p>
+                  </a:txBody>
+                  <a:tcPr marL="101600" marR="101600" marT="63500" marB="63500" anchor="ctr">
+                    <a:lnL w="9525" cap="flat" cmpd="sng" algn="ctr">
+                      <a:solidFill>
+                        <a:srgbClr val="DCE1E7"/>
+                      </a:solidFill>
+                      <a:prstDash val="solid"/>
+                      <a:round/>
+                      <a:headEnd type="none" w="med" len="med"/>
+                      <a:tailEnd type="none" w="med" len="med"/>
+                    </a:lnL>
+                    <a:lnR w="9525" cap="flat" cmpd="sng" algn="ctr">
+                      <a:solidFill>
+                        <a:srgbClr val="DCE1E7"/>
+                      </a:solidFill>
+                      <a:prstDash val="solid"/>
+                      <a:round/>
+                      <a:headEnd type="none" w="med" len="med"/>
+                      <a:tailEnd type="none" w="med" len="med"/>
+                    </a:lnR>
+                    <a:lnT w="9525" cap="flat" cmpd="sng" algn="ctr">
+                      <a:solidFill>
+                        <a:srgbClr val="DCE1E7"/>
+                      </a:solidFill>
+                      <a:prstDash val="solid"/>
+                      <a:round/>
+                      <a:headEnd type="none" w="med" len="med"/>
+                      <a:tailEnd type="none" w="med" len="med"/>
+                    </a:lnT>
+                    <a:lnB w="9525" cap="flat" cmpd="sng" algn="ctr">
+                      <a:solidFill>
+                        <a:srgbClr val="DCE1E7"/>
+                      </a:solidFill>
+                      <a:prstDash val="solid"/>
+                      <a:round/>
+                      <a:headEnd type="none" w="med" len="med"/>
+                      <a:tailEnd type="none" w="med" len="med"/>
+                    </a:lnB>
+                  </a:tcPr>
+                </a:tc>
+                <a:tc>
+                  <a:txBody>
+                    <a:bodyPr/>
+                    <a:lstStyle/>
+                    <a:p>
+                      <a:pPr algn="ctr" indent="0" marL="0">
+                        <a:buNone/>
+                      </a:pPr>
+                      <a:r>
+                        <a:rPr lang="en-US" sz="950" dirty="0">
+                          <a:solidFill>
+                            <a:srgbClr val="B0503F"/>
+                          </a:solidFill>
+                          <a:latin typeface="Arial" pitchFamily="34" charset="0"/>
+                          <a:ea typeface="Arial" pitchFamily="34" charset="-122"/>
+                          <a:cs typeface="Arial" pitchFamily="34" charset="-120"/>
+                        </a:rPr>
+                        <a:t>성능 요건</a:t>
+                      </a:r>
+                      <a:endParaRPr lang="en-US" sz="950" dirty="0">
+                        <a:latin typeface="Arial" charset="0"/>
+                        <a:ea typeface="Arial" charset="0"/>
+                        <a:cs typeface="Arial" charset="0"/>
+                      </a:endParaRPr>
+                    </a:p>
+                  </a:txBody>
+                  <a:tcPr marL="101600" marR="101600" marT="63500" marB="63500" anchor="ctr">
+                    <a:lnL w="9525" cap="flat" cmpd="sng" algn="ctr">
+                      <a:solidFill>
+                        <a:srgbClr val="DCE1E7"/>
+                      </a:solidFill>
+                      <a:prstDash val="solid"/>
+                      <a:round/>
+                      <a:headEnd type="none" w="med" len="med"/>
+                      <a:tailEnd type="none" w="med" len="med"/>
+                    </a:lnL>
+                    <a:lnR w="9525" cap="flat" cmpd="sng" algn="ctr">
+                      <a:solidFill>
+                        <a:srgbClr val="DCE1E7"/>
+                      </a:solidFill>
+                      <a:prstDash val="solid"/>
+                      <a:round/>
+                      <a:headEnd type="none" w="med" len="med"/>
+                      <a:tailEnd type="none" w="med" len="med"/>
+                    </a:lnR>
+                    <a:lnT w="9525" cap="flat" cmpd="sng" algn="ctr">
+                      <a:solidFill>
+                        <a:srgbClr val="DCE1E7"/>
+                      </a:solidFill>
+                      <a:prstDash val="solid"/>
+                      <a:round/>
+                      <a:headEnd type="none" w="med" len="med"/>
+                      <a:tailEnd type="none" w="med" len="med"/>
+                    </a:lnT>
+                    <a:lnB w="9525" cap="flat" cmpd="sng" algn="ctr">
+                      <a:solidFill>
+                        <a:srgbClr val="DCE1E7"/>
+                      </a:solidFill>
+                      <a:prstDash val="solid"/>
+                      <a:round/>
+                      <a:headEnd type="none" w="med" len="med"/>
+                      <a:tailEnd type="none" w="med" len="med"/>
+                    </a:lnB>
+                  </a:tcPr>
+                </a:tc>
+              </a:tr>
+            </a:tbl>
+          </a:graphicData>
+        </a:graphic>
+      </p:graphicFrame>
+      <p:sp>
+        <p:nvSpPr>
+          <p:cNvPr id="7" name="Shape 4"/>
+          <p:cNvSpPr/>
+          <p:nvPr/>
+        </p:nvSpPr>
+        <p:spPr>
+          <a:xfrm>
+            <a:off x="457200" y="5504688"/>
+            <a:ext cx="11247120" cy="566928"/>
+          </a:xfrm>
+          <a:prstGeom prst="roundRect">
+            <a:avLst>
+              <a:gd name="adj" fmla="val 8065"/>
+            </a:avLst>
+          </a:prstGeom>
+          <a:solidFill>
+            <a:srgbClr val="F5F7F8"/>
+          </a:solidFill>
+          <a:ln w="9525">
+            <a:solidFill>
+              <a:srgbClr val="DCE1E7"/>
+            </a:solidFill>
+            <a:prstDash val="solid"/>
+          </a:ln>
+        </p:spPr>
+      </p:sp>
+      <p:sp>
+        <p:nvSpPr>
+          <p:cNvPr id="8" name="Text 5"/>
+          <p:cNvSpPr txBox="1"/>
+          <p:nvPr/>
+        </p:nvSpPr>
+        <p:spPr>
+          <a:xfrm>
+            <a:off x="640080" y="5504688"/>
+            <a:ext cx="10881360" cy="566928"/>
+          </a:xfrm>
+          <a:prstGeom prst="rect">
+            <a:avLst/>
+          </a:prstGeom>
+          <a:noFill/>
+          <a:ln/>
+        </p:spPr>
+        <p:txBody>
+          <a:bodyPr wrap="square" lIns="0" tIns="0" rIns="0" bIns="0" rtlCol="0" anchor="ctr"/>
+          <a:lstStyle/>
+          <a:p>
+            <a:pPr algn="l" indent="0" marL="0">
+              <a:lnSpc>
+                <a:spcPct val="115000"/>
+              </a:lnSpc>
+              <a:buNone/>
+            </a:pPr>
+            <a:r>
+              <a:rPr lang="en-US" sz="1050" b="1" dirty="0">
+                <a:solidFill>
+                  <a:srgbClr val="1F2933"/>
+                </a:solidFill>
+                <a:latin typeface="Arial" pitchFamily="34" charset="0"/>
+                <a:ea typeface="Arial" pitchFamily="34" charset="-122"/>
+                <a:cs typeface="Arial" pitchFamily="34" charset="-120"/>
+              </a:rPr>
+              <a:t>식당 좌석에 비유하면 A는 예약 접수(이미 받은 예약을 빈자리로 세면 오버부킹), B는 VIP석 남겨두기(몇 개 남길지는 오늘 VIP가 몇 명 올지에 달렸다).</a:t>
+            </a:r>
+            <a:endParaRPr lang="en-US" sz="1050" dirty="0"/>
+          </a:p>
+        </p:txBody>
+      </p:sp>
+    </p:spTree>
+  </p:cSld>
+  <p:clrMapOvr>
+    <a:masterClrMapping/>
+  </p:clrMapOvr>
+</p:sld>
+</file>
+
+<file path=ppt/slides/slide17.xml><?xml version="1.0" encoding="utf-8"?>
+<p:sld xmlns:a="http://schemas.openxmlformats.org/drawingml/2006/main" xmlns:r="http://schemas.openxmlformats.org/officeDocument/2006/relationships" xmlns:p="http://schemas.openxmlformats.org/presentationml/2006/main">
+  <p:cSld name="Slide 17">
+    <p:bg>
+      <p:bgPr>
+        <a:solidFill>
+          <a:srgbClr val="FFFFFF"/>
+        </a:solidFill>
+      </p:bgPr>
+    </p:bg>
+    <p:spTree>
+      <p:nvGrpSpPr>
+        <p:cNvPr id="1" name=""/>
+        <p:cNvGrpSpPr/>
+        <p:nvPr/>
+      </p:nvGrpSpPr>
+      <p:grpSpPr>
+        <a:xfrm>
+          <a:off x="0" y="0"/>
+          <a:ext cx="0" cy="0"/>
+          <a:chOff x="0" y="0"/>
+          <a:chExt cx="0" cy="0"/>
+        </a:xfrm>
+      </p:grpSpPr>
+      <p:sp>
+        <p:nvSpPr>
+          <p:cNvPr id="2" name="Text 0"/>
+          <p:cNvSpPr txBox="1"/>
+          <p:nvPr/>
+        </p:nvSpPr>
+        <p:spPr>
+          <a:xfrm>
+            <a:off x="457200" y="292608"/>
+            <a:ext cx="8686800" cy="219456"/>
+          </a:xfrm>
+          <a:prstGeom prst="rect">
+            <a:avLst/>
+          </a:prstGeom>
+          <a:noFill/>
+          <a:ln/>
+        </p:spPr>
+        <p:txBody>
+          <a:bodyPr wrap="square" lIns="0" tIns="0" rIns="0" bIns="0" rtlCol="0" anchor="ctr"/>
+          <a:lstStyle/>
+          <a:p>
+            <a:pPr indent="0" marL="0">
+              <a:buNone/>
+            </a:pPr>
+            <a:r>
+              <a:rPr lang="en-US" sz="1050" b="1" spc="150" kern="0" dirty="0">
+                <a:solidFill>
+                  <a:srgbClr val="7B8794"/>
+                </a:solidFill>
+                <a:latin typeface="Arial" pitchFamily="34" charset="0"/>
+                <a:ea typeface="Arial" pitchFamily="34" charset="-122"/>
+                <a:cs typeface="Arial" pitchFamily="34" charset="-120"/>
+              </a:rPr>
+              <a:t>DP1 · 프로토타입 실측</a:t>
+            </a:r>
+            <a:endParaRPr lang="en-US" sz="1050" dirty="0"/>
+          </a:p>
+        </p:txBody>
+      </p:sp>
+      <p:sp>
+        <p:nvSpPr>
+          <p:cNvPr id="3" name="Text 1"/>
+          <p:cNvSpPr txBox="1"/>
+          <p:nvPr/>
+        </p:nvSpPr>
+        <p:spPr>
+          <a:xfrm>
+            <a:off x="457200" y="530352"/>
+            <a:ext cx="11247120" cy="402336"/>
+          </a:xfrm>
+          <a:prstGeom prst="rect">
+            <a:avLst/>
+          </a:prstGeom>
+          <a:noFill/>
+          <a:ln/>
+        </p:spPr>
+        <p:txBody>
+          <a:bodyPr wrap="square" lIns="0" tIns="0" rIns="0" bIns="0" rtlCol="0" anchor="ctr"/>
+          <a:lstStyle/>
+          <a:p>
+            <a:pPr indent="0" marL="0">
+              <a:buNone/>
+            </a:pPr>
+            <a:r>
+              <a:rPr lang="en-US" sz="2300" b="1" dirty="0">
+                <a:solidFill>
+                  <a:srgbClr val="1F2933"/>
+                </a:solidFill>
+                <a:latin typeface="Arial" pitchFamily="34" charset="0"/>
+                <a:ea typeface="Arial" pitchFamily="34" charset="-122"/>
+                <a:cs typeface="Arial" pitchFamily="34" charset="-120"/>
+              </a:rPr>
+              <a:t>코드를 돌려 문서로 되돌린 것</a:t>
+            </a:r>
+            <a:endParaRPr lang="en-US" sz="2300" dirty="0"/>
+          </a:p>
+        </p:txBody>
+      </p:sp>
+      <p:sp>
+        <p:nvSpPr>
+          <p:cNvPr id="4" name="Text 2"/>
+          <p:cNvSpPr txBox="1"/>
+          <p:nvPr/>
+        </p:nvSpPr>
+        <p:spPr>
+          <a:xfrm>
+            <a:off x="457200" y="969264"/>
+            <a:ext cx="11247120" cy="256032"/>
+          </a:xfrm>
+          <a:prstGeom prst="rect">
+            <a:avLst/>
+          </a:prstGeom>
+          <a:noFill/>
+          <a:ln/>
+        </p:spPr>
+        <p:txBody>
+          <a:bodyPr wrap="square" lIns="0" tIns="0" rIns="0" bIns="0" rtlCol="0" anchor="ctr"/>
+          <a:lstStyle/>
+          <a:p>
+            <a:pPr indent="0" marL="0">
+              <a:buNone/>
+            </a:pPr>
+            <a:r>
+              <a:rPr lang="en-US" sz="1100" dirty="0">
+                <a:solidFill>
+                  <a:srgbClr val="7B8794"/>
+                </a:solidFill>
+                <a:latin typeface="Arial" pitchFamily="34" charset="0"/>
+                <a:ea typeface="Arial" pitchFamily="34" charset="-122"/>
+                <a:cs typeface="Arial" pitchFamily="34" charset="-120"/>
+              </a:rPr>
+              <a:t>doc-mk/prototype — 두 후보의 배치 결정 로직을 구현하고 문서의 주장을 31개 테스트로 검증했다</a:t>
+            </a:r>
+            <a:endParaRPr lang="en-US" sz="1100" dirty="0"/>
+          </a:p>
+        </p:txBody>
+      </p:sp>
+      <p:sp>
+        <p:nvSpPr>
+          <p:cNvPr id="5" name="Text 3"/>
+          <p:cNvSpPr txBox="1"/>
+          <p:nvPr/>
+        </p:nvSpPr>
+        <p:spPr>
+          <a:xfrm>
+            <a:off x="9692640" y="6455664"/>
+            <a:ext cx="2011680" cy="219456"/>
+          </a:xfrm>
+          <a:prstGeom prst="rect">
+            <a:avLst/>
+          </a:prstGeom>
+          <a:noFill/>
+          <a:ln/>
+        </p:spPr>
+        <p:txBody>
+          <a:bodyPr wrap="square" lIns="0" tIns="0" rIns="0" bIns="0" rtlCol="0" anchor="ctr"/>
+          <a:lstStyle/>
+          <a:p>
+            <a:pPr algn="r" indent="0" marL="0">
+              <a:buNone/>
+            </a:pPr>
+            <a:r>
+              <a:rPr lang="en-US" sz="850" dirty="0">
+                <a:solidFill>
+                  <a:srgbClr val="7B8794"/>
+                </a:solidFill>
+                <a:latin typeface="Arial" pitchFamily="34" charset="0"/>
+                <a:ea typeface="Arial" pitchFamily="34" charset="-122"/>
+                <a:cs typeface="Arial" pitchFamily="34" charset="-120"/>
+              </a:rPr>
+              <a:t>DP1 · 16 / 19</a:t>
             </a:r>
             <a:endParaRPr lang="en-US" sz="850" dirty="0"/>
           </a:p>
@@ -15141,11 +17854,11 @@
         <p:spPr>
           <a:xfrm>
             <a:off x="457200" y="1572768"/>
-            <a:ext cx="3590544" cy="2761488"/>
+            <a:ext cx="5504688" cy="2011680"/>
           </a:xfrm>
           <a:prstGeom prst="roundRect">
             <a:avLst>
-              <a:gd name="adj" fmla="val 1656"/>
+              <a:gd name="adj" fmla="val 2273"/>
             </a:avLst>
           </a:prstGeom>
           <a:solidFill>
@@ -15167,13 +17880,11 @@
         </p:nvSpPr>
         <p:spPr>
           <a:xfrm>
-            <a:off x="457200" y="1572768"/>
-            <a:ext cx="3590544" cy="365760"/>
-          </a:xfrm>
-          <a:prstGeom prst="roundRect">
-            <a:avLst>
-              <a:gd name="adj" fmla="val 12500"/>
-            </a:avLst>
+            <a:off x="621792" y="1737360"/>
+            <a:ext cx="237744" cy="237744"/>
+          </a:xfrm>
+          <a:prstGeom prst="ellipse">
+            <a:avLst/>
           </a:prstGeom>
           <a:solidFill>
             <a:srgbClr val="B7791F"/>
@@ -15194,8 +17905,8 @@
         </p:nvSpPr>
         <p:spPr>
           <a:xfrm>
-            <a:off x="603504" y="1572768"/>
-            <a:ext cx="3297936" cy="365760"/>
+            <a:off x="621792" y="1737360"/>
+            <a:ext cx="237744" cy="237744"/>
           </a:xfrm>
           <a:prstGeom prst="rect">
             <a:avLst/>
@@ -15205,6 +17916,48 @@
         </p:spPr>
         <p:txBody>
           <a:bodyPr wrap="square" lIns="0" tIns="0" rIns="0" bIns="0" rtlCol="0" anchor="ctr"/>
+          <a:lstStyle/>
+          <a:p>
+            <a:pPr algn="ctr" indent="0" marL="0">
+              <a:lnSpc>
+                <a:spcPct val="115000"/>
+              </a:lnSpc>
+              <a:buNone/>
+            </a:pPr>
+            <a:r>
+              <a:rPr lang="en-US" sz="900" b="1" dirty="0">
+                <a:solidFill>
+                  <a:srgbClr val="FFFFFF"/>
+                </a:solidFill>
+                <a:latin typeface="Arial" pitchFamily="34" charset="0"/>
+                <a:ea typeface="Arial" pitchFamily="34" charset="-122"/>
+                <a:cs typeface="Arial" pitchFamily="34" charset="-120"/>
+              </a:rPr>
+              <a:t>1</a:t>
+            </a:r>
+            <a:endParaRPr lang="en-US" sz="900" dirty="0"/>
+          </a:p>
+        </p:txBody>
+      </p:sp>
+      <p:sp>
+        <p:nvSpPr>
+          <p:cNvPr id="9" name="Text 7"/>
+          <p:cNvSpPr txBox="1"/>
+          <p:nvPr/>
+        </p:nvSpPr>
+        <p:spPr>
+          <a:xfrm>
+            <a:off x="950976" y="1700784"/>
+            <a:ext cx="4846320" cy="512064"/>
+          </a:xfrm>
+          <a:prstGeom prst="rect">
+            <a:avLst/>
+          </a:prstGeom>
+          <a:noFill/>
+          <a:ln/>
+        </p:spPr>
+        <p:txBody>
+          <a:bodyPr wrap="square" lIns="0" tIns="0" rIns="0" bIns="0" rtlCol="0" anchor="t"/>
           <a:lstStyle/>
           <a:p>
             <a:pPr algn="l" indent="0" marL="0">
@@ -15214,30 +17967,30 @@
               <a:buNone/>
             </a:pPr>
             <a:r>
-              <a:rPr lang="en-US" sz="1100" b="1" dirty="0">
-                <a:solidFill>
-                  <a:srgbClr val="FFFFFF"/>
-                </a:solidFill>
-                <a:latin typeface="Arial" pitchFamily="34" charset="0"/>
-                <a:ea typeface="Arial" pitchFamily="34" charset="-122"/>
-                <a:cs typeface="Arial" pitchFamily="34" charset="-120"/>
-              </a:rPr>
-              <a:t>R1  ·  재분류</a:t>
-            </a:r>
-            <a:endParaRPr lang="en-US" sz="1100" dirty="0"/>
-          </a:p>
-        </p:txBody>
-      </p:sp>
-      <p:sp>
-        <p:nvSpPr>
-          <p:cNvPr id="9" name="Text 7"/>
+              <a:rPr lang="en-US" sz="1150" b="1" dirty="0">
+                <a:solidFill>
+                  <a:srgbClr val="1F2933"/>
+                </a:solidFill>
+                <a:latin typeface="Arial" pitchFamily="34" charset="0"/>
+                <a:ea typeface="Arial" pitchFamily="34" charset="-122"/>
+                <a:cs typeface="Arial" pitchFamily="34" charset="-120"/>
+              </a:rPr>
+              <a:t>오분류는 이득을 없애는 정도가 아니라 배치를 역전시킨다</a:t>
+            </a:r>
+            <a:endParaRPr lang="en-US" sz="1150" dirty="0"/>
+          </a:p>
+        </p:txBody>
+      </p:sp>
+      <p:sp>
+        <p:nvSpPr>
+          <p:cNvPr id="10" name="Text 8"/>
           <p:cNvSpPr txBox="1"/>
           <p:nvPr/>
         </p:nvSpPr>
         <p:spPr>
           <a:xfrm>
-            <a:off x="621792" y="2048256"/>
-            <a:ext cx="3261360" cy="566928"/>
+            <a:off x="621792" y="2304288"/>
+            <a:ext cx="5175504" cy="822960"/>
           </a:xfrm>
           <a:prstGeom prst="rect">
             <a:avLst/>
@@ -15256,15 +18009,15 @@
               <a:buNone/>
             </a:pPr>
             <a:r>
-              <a:rPr lang="en-US" sz="950" b="1" dirty="0">
-                <a:solidFill>
-                  <a:srgbClr val="1F2933"/>
-                </a:solidFill>
-                <a:latin typeface="Arial" pitchFamily="34" charset="0"/>
-                <a:ea typeface="Arial" pitchFamily="34" charset="-122"/>
-                <a:cs typeface="Arial" pitchFamily="34" charset="-120"/>
-              </a:rPr>
-              <a:t>배치 정확도를 올리려면 실행 후 관측으로 재분류해야 하는데 두 후보 모두 갖지 않는다</a:t>
+              <a:rPr lang="en-US" sz="950" dirty="0">
+                <a:solidFill>
+                  <a:srgbClr val="3E4C59"/>
+                </a:solidFill>
+                <a:latin typeface="Arial" pitchFamily="34" charset="0"/>
+                <a:ea typeface="Arial" pitchFamily="34" charset="-122"/>
+                <a:cs typeface="Arial" pitchFamily="34" charset="-120"/>
+              </a:rPr>
+              <a:t>misclassification 시나리오에서 C2 구분 지표 0.43 (1.0 미만 = 역전). C1은 1.00 — 구분 못 하지만 역전도 없다</a:t>
             </a:r>
             <a:endParaRPr lang="en-US" sz="950" dirty="0"/>
           </a:p>
@@ -15272,14 +18025,14 @@
       </p:sp>
       <p:sp>
         <p:nvSpPr>
-          <p:cNvPr id="10" name="Text 8"/>
+          <p:cNvPr id="11" name="Text 9"/>
           <p:cNvSpPr txBox="1"/>
           <p:nvPr/>
         </p:nvSpPr>
         <p:spPr>
           <a:xfrm>
-            <a:off x="621792" y="2688336"/>
-            <a:ext cx="3261360" cy="219456"/>
+            <a:off x="621792" y="3200400"/>
+            <a:ext cx="5175504" cy="292608"/>
           </a:xfrm>
           <a:prstGeom prst="rect">
             <a:avLst/>
@@ -15298,133 +18051,7 @@
               <a:buNone/>
             </a:pPr>
             <a:r>
-              <a:rPr lang="en-US" sz="850" b="1" dirty="0">
-                <a:solidFill>
-                  <a:srgbClr val="7B8794"/>
-                </a:solidFill>
-                <a:latin typeface="Arial" pitchFamily="34" charset="0"/>
-                <a:ea typeface="Arial" pitchFamily="34" charset="-122"/>
-                <a:cs typeface="Arial" pitchFamily="34" charset="-120"/>
-              </a:rPr>
-              <a:t>왜 여기서 못 푸는가</a:t>
-            </a:r>
-            <a:endParaRPr lang="en-US" sz="850" dirty="0"/>
-          </a:p>
-        </p:txBody>
-      </p:sp>
-      <p:sp>
-        <p:nvSpPr>
-          <p:cNvPr id="11" name="Text 9"/>
-          <p:cNvSpPr txBox="1"/>
-          <p:nvPr/>
-        </p:nvSpPr>
-        <p:spPr>
-          <a:xfrm>
-            <a:off x="621792" y="2907792"/>
-            <a:ext cx="3261360" cy="548640"/>
-          </a:xfrm>
-          <a:prstGeom prst="rect">
-            <a:avLst/>
-          </a:prstGeom>
-          <a:noFill/>
-          <a:ln/>
-        </p:spPr>
-        <p:txBody>
-          <a:bodyPr wrap="square" lIns="0" tIns="0" rIns="0" bIns="0" rtlCol="0" anchor="t"/>
-          <a:lstStyle/>
-          <a:p>
-            <a:pPr algn="l" indent="0" marL="0">
-              <a:lnSpc>
-                <a:spcPct val="120000"/>
-              </a:lnSpc>
-              <a:buNone/>
-            </a:pPr>
-            <a:r>
-              <a:rPr lang="en-US" sz="900" dirty="0">
-                <a:solidFill>
-                  <a:srgbClr val="3E4C59"/>
-                </a:solidFill>
-                <a:latin typeface="Arial" pitchFamily="34" charset="0"/>
-                <a:ea typeface="Arial" pitchFamily="34" charset="-122"/>
-                <a:cs typeface="Arial" pitchFamily="34" charset="-120"/>
-              </a:rPr>
-              <a:t>결정 변수가 다르다 — 재분류는 "언제 다시 결정하는가"라는 별도 축이다</a:t>
-            </a:r>
-            <a:endParaRPr lang="en-US" sz="900" dirty="0"/>
-          </a:p>
-        </p:txBody>
-      </p:sp>
-      <p:sp>
-        <p:nvSpPr>
-          <p:cNvPr id="12" name="Text 10"/>
-          <p:cNvSpPr txBox="1"/>
-          <p:nvPr/>
-        </p:nvSpPr>
-        <p:spPr>
-          <a:xfrm>
-            <a:off x="621792" y="3511296"/>
-            <a:ext cx="3261360" cy="219456"/>
-          </a:xfrm>
-          <a:prstGeom prst="rect">
-            <a:avLst/>
-          </a:prstGeom>
-          <a:noFill/>
-          <a:ln/>
-        </p:spPr>
-        <p:txBody>
-          <a:bodyPr wrap="square" lIns="0" tIns="0" rIns="0" bIns="0" rtlCol="0" anchor="t"/>
-          <a:lstStyle/>
-          <a:p>
-            <a:pPr algn="l" indent="0" marL="0">
-              <a:lnSpc>
-                <a:spcPct val="115000"/>
-              </a:lnSpc>
-              <a:buNone/>
-            </a:pPr>
-            <a:r>
-              <a:rPr lang="en-US" sz="850" b="1" dirty="0">
-                <a:solidFill>
-                  <a:srgbClr val="7B8794"/>
-                </a:solidFill>
-                <a:latin typeface="Arial" pitchFamily="34" charset="0"/>
-                <a:ea typeface="Arial" pitchFamily="34" charset="-122"/>
-                <a:cs typeface="Arial" pitchFamily="34" charset="-120"/>
-              </a:rPr>
-              <a:t>어디서 푸는가</a:t>
-            </a:r>
-            <a:endParaRPr lang="en-US" sz="850" dirty="0"/>
-          </a:p>
-        </p:txBody>
-      </p:sp>
-      <p:sp>
-        <p:nvSpPr>
-          <p:cNvPr id="13" name="Text 11"/>
-          <p:cNvSpPr txBox="1"/>
-          <p:nvPr/>
-        </p:nvSpPr>
-        <p:spPr>
-          <a:xfrm>
-            <a:off x="621792" y="3730752"/>
-            <a:ext cx="3261360" cy="237744"/>
-          </a:xfrm>
-          <a:prstGeom prst="rect">
-            <a:avLst/>
-          </a:prstGeom>
-          <a:noFill/>
-          <a:ln/>
-        </p:spPr>
-        <p:txBody>
-          <a:bodyPr wrap="square" lIns="0" tIns="0" rIns="0" bIns="0" rtlCol="0" anchor="t"/>
-          <a:lstStyle/>
-          <a:p>
-            <a:pPr algn="l" indent="0" marL="0">
-              <a:lnSpc>
-                <a:spcPct val="115000"/>
-              </a:lnSpc>
-              <a:buNone/>
-            </a:pPr>
-            <a:r>
-              <a:rPr lang="en-US" sz="1000" b="1" dirty="0">
+              <a:rPr lang="en-US" sz="950" b="1" dirty="0">
                 <a:solidFill>
                   <a:srgbClr val="0B6E6E"/>
                 </a:solidFill>
@@ -15432,68 +18059,26 @@
                 <a:ea typeface="Arial" pitchFamily="34" charset="-122"/>
                 <a:cs typeface="Arial" pitchFamily="34" charset="-120"/>
               </a:rPr>
-              <a:t>DP3 (신규) 재배치 트리거</a:t>
-            </a:r>
-            <a:endParaRPr lang="en-US" sz="1000" dirty="0"/>
-          </a:p>
-        </p:txBody>
-      </p:sp>
-      <p:sp>
-        <p:nvSpPr>
-          <p:cNvPr id="14" name="Text 12"/>
-          <p:cNvSpPr txBox="1"/>
-          <p:nvPr/>
-        </p:nvSpPr>
-        <p:spPr>
-          <a:xfrm>
-            <a:off x="621792" y="4005072"/>
-            <a:ext cx="3261360" cy="274320"/>
-          </a:xfrm>
-          <a:prstGeom prst="rect">
-            <a:avLst/>
-          </a:prstGeom>
-          <a:noFill/>
-          <a:ln/>
-        </p:spPr>
-        <p:txBody>
-          <a:bodyPr wrap="square" lIns="0" tIns="0" rIns="0" bIns="0" rtlCol="0" anchor="t"/>
-          <a:lstStyle/>
-          <a:p>
-            <a:pPr algn="l" indent="0" marL="0">
-              <a:lnSpc>
-                <a:spcPct val="115000"/>
-              </a:lnSpc>
-              <a:buNone/>
-            </a:pPr>
-            <a:r>
-              <a:rPr lang="en-US" sz="850" dirty="0">
-                <a:solidFill>
-                  <a:srgbClr val="7B8794"/>
-                </a:solidFill>
-                <a:latin typeface="Arial" pitchFamily="34" charset="0"/>
-                <a:ea typeface="Arial" pitchFamily="34" charset="-122"/>
-                <a:cs typeface="Arial" pitchFamily="34" charset="-120"/>
-              </a:rPr>
-              <a:t>결합: DP1의 인덱스 축이 DP3의 신호원을 제약한다 (C1 선택 → tier 상태 기반)</a:t>
-            </a:r>
-            <a:endParaRPr lang="en-US" sz="850" dirty="0"/>
-          </a:p>
-        </p:txBody>
-      </p:sp>
-      <p:sp>
-        <p:nvSpPr>
-          <p:cNvPr id="15" name="Shape 13"/>
+              <a:t>→ QA1 ★★★는 분류가 맞았을 때의 조건부 값</a:t>
+            </a:r>
+            <a:endParaRPr lang="en-US" sz="950" dirty="0"/>
+          </a:p>
+        </p:txBody>
+      </p:sp>
+      <p:sp>
+        <p:nvSpPr>
+          <p:cNvPr id="12" name="Shape 10"/>
           <p:cNvSpPr/>
           <p:nvPr/>
         </p:nvSpPr>
         <p:spPr>
           <a:xfrm>
-            <a:off x="4285488" y="1572768"/>
-            <a:ext cx="3590544" cy="2761488"/>
+            <a:off x="6199632" y="1572768"/>
+            <a:ext cx="5504688" cy="2011680"/>
           </a:xfrm>
           <a:prstGeom prst="roundRect">
             <a:avLst>
-              <a:gd name="adj" fmla="val 1656"/>
+              <a:gd name="adj" fmla="val 2273"/>
             </a:avLst>
           </a:prstGeom>
           <a:solidFill>
@@ -15509,19 +18094,17 @@
       </p:sp>
       <p:sp>
         <p:nvSpPr>
-          <p:cNvPr id="16" name="Shape 14"/>
+          <p:cNvPr id="13" name="Shape 11"/>
           <p:cNvSpPr/>
           <p:nvPr/>
         </p:nvSpPr>
         <p:spPr>
           <a:xfrm>
-            <a:off x="4285488" y="1572768"/>
-            <a:ext cx="3590544" cy="365760"/>
-          </a:xfrm>
-          <a:prstGeom prst="roundRect">
-            <a:avLst>
-              <a:gd name="adj" fmla="val 12500"/>
-            </a:avLst>
+            <a:off x="6364224" y="1737360"/>
+            <a:ext cx="237744" cy="237744"/>
+          </a:xfrm>
+          <a:prstGeom prst="ellipse">
+            <a:avLst/>
           </a:prstGeom>
           <a:solidFill>
             <a:srgbClr val="B7791F"/>
@@ -15536,14 +18119,14 @@
       </p:sp>
       <p:sp>
         <p:nvSpPr>
-          <p:cNvPr id="17" name="Text 15"/>
+          <p:cNvPr id="14" name="Text 12"/>
           <p:cNvSpPr txBox="1"/>
           <p:nvPr/>
         </p:nvSpPr>
         <p:spPr>
           <a:xfrm>
-            <a:off x="4431792" y="1572768"/>
-            <a:ext cx="3297936" cy="365760"/>
+            <a:off x="6364224" y="1737360"/>
+            <a:ext cx="237744" cy="237744"/>
           </a:xfrm>
           <a:prstGeom prst="rect">
             <a:avLst/>
@@ -15553,6 +18136,48 @@
         </p:spPr>
         <p:txBody>
           <a:bodyPr wrap="square" lIns="0" tIns="0" rIns="0" bIns="0" rtlCol="0" anchor="ctr"/>
+          <a:lstStyle/>
+          <a:p>
+            <a:pPr algn="ctr" indent="0" marL="0">
+              <a:lnSpc>
+                <a:spcPct val="115000"/>
+              </a:lnSpc>
+              <a:buNone/>
+            </a:pPr>
+            <a:r>
+              <a:rPr lang="en-US" sz="900" b="1" dirty="0">
+                <a:solidFill>
+                  <a:srgbClr val="FFFFFF"/>
+                </a:solidFill>
+                <a:latin typeface="Arial" pitchFamily="34" charset="0"/>
+                <a:ea typeface="Arial" pitchFamily="34" charset="-122"/>
+                <a:cs typeface="Arial" pitchFamily="34" charset="-120"/>
+              </a:rPr>
+              <a:t>2</a:t>
+            </a:r>
+            <a:endParaRPr lang="en-US" sz="900" dirty="0"/>
+          </a:p>
+        </p:txBody>
+      </p:sp>
+      <p:sp>
+        <p:nvSpPr>
+          <p:cNvPr id="15" name="Text 13"/>
+          <p:cNvSpPr txBox="1"/>
+          <p:nvPr/>
+        </p:nvSpPr>
+        <p:spPr>
+          <a:xfrm>
+            <a:off x="6693408" y="1700784"/>
+            <a:ext cx="4846320" cy="512064"/>
+          </a:xfrm>
+          <a:prstGeom prst="rect">
+            <a:avLst/>
+          </a:prstGeom>
+          <a:noFill/>
+          <a:ln/>
+        </p:spPr>
+        <p:txBody>
+          <a:bodyPr wrap="square" lIns="0" tIns="0" rIns="0" bIns="0" rtlCol="0" anchor="t"/>
           <a:lstStyle/>
           <a:p>
             <a:pPr algn="l" indent="0" marL="0">
@@ -15562,30 +18187,30 @@
               <a:buNone/>
             </a:pPr>
             <a:r>
-              <a:rPr lang="en-US" sz="1100" b="1" dirty="0">
-                <a:solidFill>
-                  <a:srgbClr val="FFFFFF"/>
-                </a:solidFill>
-                <a:latin typeface="Arial" pitchFamily="34" charset="0"/>
-                <a:ea typeface="Arial" pitchFamily="34" charset="-122"/>
-                <a:cs typeface="Arial" pitchFamily="34" charset="-120"/>
-              </a:rPr>
-              <a:t>R2  ·  구분 능력</a:t>
-            </a:r>
-            <a:endParaRPr lang="en-US" sz="1100" dirty="0"/>
-          </a:p>
-        </p:txBody>
-      </p:sp>
-      <p:sp>
-        <p:nvSpPr>
-          <p:cNvPr id="18" name="Text 16"/>
+              <a:rPr lang="en-US" sz="1150" b="1" dirty="0">
+                <a:solidFill>
+                  <a:srgbClr val="1F2933"/>
+                </a:solidFill>
+                <a:latin typeface="Arial" pitchFamily="34" charset="0"/>
+                <a:ea typeface="Arial" pitchFamily="34" charset="-122"/>
+                <a:cs typeface="Arial" pitchFamily="34" charset="-120"/>
+              </a:rPr>
+              <a:t>예약 카운터는 완화책이 아니라 정합성 요건이다</a:t>
+            </a:r>
+            <a:endParaRPr lang="en-US" sz="1150" dirty="0"/>
+          </a:p>
+        </p:txBody>
+      </p:sp>
+      <p:sp>
+        <p:nvSpPr>
+          <p:cNvPr id="16" name="Text 14"/>
           <p:cNvSpPr txBox="1"/>
           <p:nvPr/>
         </p:nvSpPr>
         <p:spPr>
           <a:xfrm>
-            <a:off x="4450080" y="2048256"/>
-            <a:ext cx="3261360" cy="566928"/>
+            <a:off x="6364224" y="2304288"/>
+            <a:ext cx="5175504" cy="822960"/>
           </a:xfrm>
           <a:prstGeom prst="rect">
             <a:avLst/>
@@ -15604,15 +18229,15 @@
               <a:buNone/>
             </a:pPr>
             <a:r>
-              <a:rPr lang="en-US" sz="950" b="1" dirty="0">
-                <a:solidFill>
-                  <a:srgbClr val="1F2933"/>
-                </a:solidFill>
-                <a:latin typeface="Arial" pitchFamily="34" charset="0"/>
-                <a:ea typeface="Arial" pitchFamily="34" charset="-122"/>
-                <a:cs typeface="Arial" pitchFamily="34" charset="-120"/>
-              </a:rPr>
-              <a:t>C1 선택으로 QA1이 미해소로 남는다</a:t>
+              <a:rPr lang="en-US" sz="950" dirty="0">
+                <a:solidFill>
+                  <a:srgbClr val="3E4C59"/>
+                </a:solidFill>
+                <a:latin typeface="Arial" pitchFamily="34" charset="0"/>
+                <a:ea typeface="Arial" pitchFamily="34" charset="-122"/>
+                <a:cs typeface="Arial" pitchFamily="34" charset="-120"/>
+              </a:rPr>
+              <a:t>예약 없는 C1은 overcommit 72회 — 자기 불변식(자원 제약)을 스스로 어긴다</a:t>
             </a:r>
             <a:endParaRPr lang="en-US" sz="950" dirty="0"/>
           </a:p>
@@ -15620,14 +18245,14 @@
       </p:sp>
       <p:sp>
         <p:nvSpPr>
-          <p:cNvPr id="19" name="Text 17"/>
+          <p:cNvPr id="17" name="Text 15"/>
           <p:cNvSpPr txBox="1"/>
           <p:nvPr/>
         </p:nvSpPr>
         <p:spPr>
           <a:xfrm>
-            <a:off x="4450080" y="2688336"/>
-            <a:ext cx="3261360" cy="219456"/>
+            <a:off x="6364224" y="3200400"/>
+            <a:ext cx="5175504" cy="292608"/>
           </a:xfrm>
           <a:prstGeom prst="rect">
             <a:avLst/>
@@ -15646,133 +18271,7 @@
               <a:buNone/>
             </a:pPr>
             <a:r>
-              <a:rPr lang="en-US" sz="850" b="1" dirty="0">
-                <a:solidFill>
-                  <a:srgbClr val="7B8794"/>
-                </a:solidFill>
-                <a:latin typeface="Arial" pitchFamily="34" charset="0"/>
-                <a:ea typeface="Arial" pitchFamily="34" charset="-122"/>
-                <a:cs typeface="Arial" pitchFamily="34" charset="-120"/>
-              </a:rPr>
-              <a:t>왜 여기서 못 푸는가</a:t>
-            </a:r>
-            <a:endParaRPr lang="en-US" sz="850" dirty="0"/>
-          </a:p>
-        </p:txBody>
-      </p:sp>
-      <p:sp>
-        <p:nvSpPr>
-          <p:cNvPr id="20" name="Text 18"/>
-          <p:cNvSpPr txBox="1"/>
-          <p:nvPr/>
-        </p:nvSpPr>
-        <p:spPr>
-          <a:xfrm>
-            <a:off x="4450080" y="2907792"/>
-            <a:ext cx="3261360" cy="548640"/>
-          </a:xfrm>
-          <a:prstGeom prst="rect">
-            <a:avLst/>
-          </a:prstGeom>
-          <a:noFill/>
-          <a:ln/>
-        </p:spPr>
-        <p:txBody>
-          <a:bodyPr wrap="square" lIns="0" tIns="0" rIns="0" bIns="0" rtlCol="0" anchor="t"/>
-          <a:lstStyle/>
-          <a:p>
-            <a:pPr algn="l" indent="0" marL="0">
-              <a:lnSpc>
-                <a:spcPct val="120000"/>
-              </a:lnSpc>
-              <a:buNone/>
-            </a:pPr>
-            <a:r>
-              <a:rPr lang="en-US" sz="900" dirty="0">
-                <a:solidFill>
-                  <a:srgbClr val="3E4C59"/>
-                </a:solidFill>
-                <a:latin typeface="Arial" pitchFamily="34" charset="0"/>
-                <a:ea typeface="Arial" pitchFamily="34" charset="-122"/>
-                <a:cs typeface="Arial" pitchFamily="34" charset="-120"/>
-              </a:rPr>
-              <a:t>구분하려면 미래 정보 추정이 필요 — 배치 구조가 아니라 예측기 설계 문제다</a:t>
-            </a:r>
-            <a:endParaRPr lang="en-US" sz="900" dirty="0"/>
-          </a:p>
-        </p:txBody>
-      </p:sp>
-      <p:sp>
-        <p:nvSpPr>
-          <p:cNvPr id="21" name="Text 19"/>
-          <p:cNvSpPr txBox="1"/>
-          <p:nvPr/>
-        </p:nvSpPr>
-        <p:spPr>
-          <a:xfrm>
-            <a:off x="4450080" y="3511296"/>
-            <a:ext cx="3261360" cy="219456"/>
-          </a:xfrm>
-          <a:prstGeom prst="rect">
-            <a:avLst/>
-          </a:prstGeom>
-          <a:noFill/>
-          <a:ln/>
-        </p:spPr>
-        <p:txBody>
-          <a:bodyPr wrap="square" lIns="0" tIns="0" rIns="0" bIns="0" rtlCol="0" anchor="t"/>
-          <a:lstStyle/>
-          <a:p>
-            <a:pPr algn="l" indent="0" marL="0">
-              <a:lnSpc>
-                <a:spcPct val="115000"/>
-              </a:lnSpc>
-              <a:buNone/>
-            </a:pPr>
-            <a:r>
-              <a:rPr lang="en-US" sz="850" b="1" dirty="0">
-                <a:solidFill>
-                  <a:srgbClr val="7B8794"/>
-                </a:solidFill>
-                <a:latin typeface="Arial" pitchFamily="34" charset="0"/>
-                <a:ea typeface="Arial" pitchFamily="34" charset="-122"/>
-                <a:cs typeface="Arial" pitchFamily="34" charset="-120"/>
-              </a:rPr>
-              <a:t>어디서 푸는가</a:t>
-            </a:r>
-            <a:endParaRPr lang="en-US" sz="850" dirty="0"/>
-          </a:p>
-        </p:txBody>
-      </p:sp>
-      <p:sp>
-        <p:nvSpPr>
-          <p:cNvPr id="22" name="Text 20"/>
-          <p:cNvSpPr txBox="1"/>
-          <p:nvPr/>
-        </p:nvSpPr>
-        <p:spPr>
-          <a:xfrm>
-            <a:off x="4450080" y="3730752"/>
-            <a:ext cx="3261360" cy="237744"/>
-          </a:xfrm>
-          <a:prstGeom prst="rect">
-            <a:avLst/>
-          </a:prstGeom>
-          <a:noFill/>
-          <a:ln/>
-        </p:spPr>
-        <p:txBody>
-          <a:bodyPr wrap="square" lIns="0" tIns="0" rIns="0" bIns="0" rtlCol="0" anchor="t"/>
-          <a:lstStyle/>
-          <a:p>
-            <a:pPr algn="l" indent="0" marL="0">
-              <a:lnSpc>
-                <a:spcPct val="115000"/>
-              </a:lnSpc>
-              <a:buNone/>
-            </a:pPr>
-            <a:r>
-              <a:rPr lang="en-US" sz="1000" b="1" dirty="0">
+              <a:rPr lang="en-US" sz="950" b="1" dirty="0">
                 <a:solidFill>
                   <a:srgbClr val="0B6E6E"/>
                 </a:solidFill>
@@ -15780,68 +18279,26 @@
                 <a:ea typeface="Arial" pitchFamily="34" charset="-122"/>
                 <a:cs typeface="Arial" pitchFamily="34" charset="-120"/>
               </a:rPr>
-              <a:t>DP4 (신규) 요청 특성 예측</a:t>
-            </a:r>
-            <a:endParaRPr lang="en-US" sz="1000" dirty="0"/>
-          </a:p>
-        </p:txBody>
-      </p:sp>
-      <p:sp>
-        <p:nvSpPr>
-          <p:cNvPr id="23" name="Text 21"/>
-          <p:cNvSpPr txBox="1"/>
-          <p:nvPr/>
-        </p:nvSpPr>
-        <p:spPr>
-          <a:xfrm>
-            <a:off x="4450080" y="4005072"/>
-            <a:ext cx="3261360" cy="274320"/>
-          </a:xfrm>
-          <a:prstGeom prst="rect">
-            <a:avLst/>
-          </a:prstGeom>
-          <a:noFill/>
-          <a:ln/>
-        </p:spPr>
-        <p:txBody>
-          <a:bodyPr wrap="square" lIns="0" tIns="0" rIns="0" bIns="0" rtlCol="0" anchor="t"/>
-          <a:lstStyle/>
-          <a:p>
-            <a:pPr algn="l" indent="0" marL="0">
-              <a:lnSpc>
-                <a:spcPct val="115000"/>
-              </a:lnSpc>
-              <a:buNone/>
-            </a:pPr>
-            <a:r>
-              <a:rPr lang="en-US" sz="850" dirty="0">
-                <a:solidFill>
-                  <a:srgbClr val="7B8794"/>
-                </a:solidFill>
-                <a:latin typeface="Arial" pitchFamily="34" charset="0"/>
-                <a:ea typeface="Arial" pitchFamily="34" charset="-122"/>
-                <a:cs typeface="Arial" pitchFamily="34" charset="-120"/>
-              </a:rPr>
-              <a:t>결합: DP4의 예측 정확도가 DP1의 반전 조건을 공급한다</a:t>
-            </a:r>
-            <a:endParaRPr lang="en-US" sz="850" dirty="0"/>
-          </a:p>
-        </p:txBody>
-      </p:sp>
-      <p:sp>
-        <p:nvSpPr>
-          <p:cNvPr id="24" name="Shape 22"/>
+              <a:t>→ C1 정의의 일부로 승격</a:t>
+            </a:r>
+            <a:endParaRPr lang="en-US" sz="950" dirty="0"/>
+          </a:p>
+        </p:txBody>
+      </p:sp>
+      <p:sp>
+        <p:nvSpPr>
+          <p:cNvPr id="18" name="Shape 16"/>
           <p:cNvSpPr/>
           <p:nvPr/>
         </p:nvSpPr>
         <p:spPr>
           <a:xfrm>
-            <a:off x="8113776" y="1572768"/>
-            <a:ext cx="3590544" cy="2761488"/>
+            <a:off x="457200" y="3803904"/>
+            <a:ext cx="5504688" cy="2011680"/>
           </a:xfrm>
           <a:prstGeom prst="roundRect">
             <a:avLst>
-              <a:gd name="adj" fmla="val 1656"/>
+              <a:gd name="adj" fmla="val 2273"/>
             </a:avLst>
           </a:prstGeom>
           <a:solidFill>
@@ -15857,19 +18314,17 @@
       </p:sp>
       <p:sp>
         <p:nvSpPr>
-          <p:cNvPr id="25" name="Shape 23"/>
+          <p:cNvPr id="19" name="Shape 17"/>
           <p:cNvSpPr/>
           <p:nvPr/>
         </p:nvSpPr>
         <p:spPr>
           <a:xfrm>
-            <a:off x="8113776" y="1572768"/>
-            <a:ext cx="3590544" cy="365760"/>
-          </a:xfrm>
-          <a:prstGeom prst="roundRect">
-            <a:avLst>
-              <a:gd name="adj" fmla="val 12500"/>
-            </a:avLst>
+            <a:off x="621792" y="3968496"/>
+            <a:ext cx="237744" cy="237744"/>
+          </a:xfrm>
+          <a:prstGeom prst="ellipse">
+            <a:avLst/>
           </a:prstGeom>
           <a:solidFill>
             <a:srgbClr val="B7791F"/>
@@ -15884,14 +18339,14 @@
       </p:sp>
       <p:sp>
         <p:nvSpPr>
-          <p:cNvPr id="26" name="Text 24"/>
+          <p:cNvPr id="20" name="Text 18"/>
           <p:cNvSpPr txBox="1"/>
           <p:nvPr/>
         </p:nvSpPr>
         <p:spPr>
           <a:xfrm>
-            <a:off x="8260080" y="1572768"/>
-            <a:ext cx="3297936" cy="365760"/>
+            <a:off x="621792" y="3968496"/>
+            <a:ext cx="237744" cy="237744"/>
           </a:xfrm>
           <a:prstGeom prst="rect">
             <a:avLst/>
@@ -15901,6 +18356,48 @@
         </p:spPr>
         <p:txBody>
           <a:bodyPr wrap="square" lIns="0" tIns="0" rIns="0" bIns="0" rtlCol="0" anchor="ctr"/>
+          <a:lstStyle/>
+          <a:p>
+            <a:pPr algn="ctr" indent="0" marL="0">
+              <a:lnSpc>
+                <a:spcPct val="115000"/>
+              </a:lnSpc>
+              <a:buNone/>
+            </a:pPr>
+            <a:r>
+              <a:rPr lang="en-US" sz="900" b="1" dirty="0">
+                <a:solidFill>
+                  <a:srgbClr val="FFFFFF"/>
+                </a:solidFill>
+                <a:latin typeface="Arial" pitchFamily="34" charset="0"/>
+                <a:ea typeface="Arial" pitchFamily="34" charset="-122"/>
+                <a:cs typeface="Arial" pitchFamily="34" charset="-120"/>
+              </a:rPr>
+              <a:t>3</a:t>
+            </a:r>
+            <a:endParaRPr lang="en-US" sz="900" dirty="0"/>
+          </a:p>
+        </p:txBody>
+      </p:sp>
+      <p:sp>
+        <p:nvSpPr>
+          <p:cNvPr id="21" name="Text 19"/>
+          <p:cNvSpPr txBox="1"/>
+          <p:nvPr/>
+        </p:nvSpPr>
+        <p:spPr>
+          <a:xfrm>
+            <a:off x="950976" y="3931920"/>
+            <a:ext cx="4846320" cy="512064"/>
+          </a:xfrm>
+          <a:prstGeom prst="rect">
+            <a:avLst/>
+          </a:prstGeom>
+          <a:noFill/>
+          <a:ln/>
+        </p:spPr>
+        <p:txBody>
+          <a:bodyPr wrap="square" lIns="0" tIns="0" rIns="0" bIns="0" rtlCol="0" anchor="t"/>
           <a:lstStyle/>
           <a:p>
             <a:pPr algn="l" indent="0" marL="0">
@@ -15910,30 +18407,30 @@
               <a:buNone/>
             </a:pPr>
             <a:r>
-              <a:rPr lang="en-US" sz="1100" b="1" dirty="0">
-                <a:solidFill>
-                  <a:srgbClr val="FFFFFF"/>
-                </a:solidFill>
-                <a:latin typeface="Arial" pitchFamily="34" charset="0"/>
-                <a:ea typeface="Arial" pitchFamily="34" charset="-122"/>
-                <a:cs typeface="Arial" pitchFamily="34" charset="-120"/>
-              </a:rPr>
-              <a:t>R3  ·  재현성</a:t>
-            </a:r>
-            <a:endParaRPr lang="en-US" sz="1100" dirty="0"/>
-          </a:p>
-        </p:txBody>
-      </p:sp>
-      <p:sp>
-        <p:nvSpPr>
-          <p:cNvPr id="27" name="Text 25"/>
+              <a:rPr lang="en-US" sz="1150" b="1" dirty="0">
+                <a:solidFill>
+                  <a:srgbClr val="1F2933"/>
+                </a:solidFill>
+                <a:latin typeface="Arial" pitchFamily="34" charset="0"/>
+                <a:ea typeface="Arial" pitchFamily="34" charset="-122"/>
+                <a:cs typeface="Arial" pitchFamily="34" charset="-120"/>
+              </a:rPr>
+              <a:t>크기는 무시하는 것이 아니라 상쇄되는 것이 옳다</a:t>
+            </a:r>
+            <a:endParaRPr lang="en-US" sz="1150" dirty="0"/>
+          </a:p>
+        </p:txBody>
+      </p:sp>
+      <p:sp>
+        <p:nvSpPr>
+          <p:cNvPr id="22" name="Text 20"/>
           <p:cNvSpPr txBox="1"/>
           <p:nvPr/>
         </p:nvSpPr>
         <p:spPr>
           <a:xfrm>
-            <a:off x="8278368" y="2048256"/>
-            <a:ext cx="3261360" cy="566928"/>
+            <a:off x="621792" y="4535424"/>
+            <a:ext cx="5175504" cy="822960"/>
           </a:xfrm>
           <a:prstGeom prst="rect">
             <a:avLst/>
@@ -15952,15 +18449,15 @@
               <a:buNone/>
             </a:pPr>
             <a:r>
-              <a:rPr lang="en-US" sz="950" b="1" dirty="0">
-                <a:solidFill>
-                  <a:srgbClr val="1F2933"/>
-                </a:solidFill>
-                <a:latin typeface="Arial" pitchFamily="34" charset="0"/>
-                <a:ea typeface="Arial" pitchFamily="34" charset="-122"/>
-                <a:cs typeface="Arial" pitchFamily="34" charset="-120"/>
-              </a:rPr>
-              <a:t>배치 결정의 재현성이 부분 미해소로 남는다</a:t>
+              <a:rPr lang="en-US" sz="950" dirty="0">
+                <a:solidFill>
+                  <a:srgbClr val="3E4C59"/>
+                </a:solidFill>
+                <a:latin typeface="Arial" pitchFamily="34" charset="0"/>
+                <a:ea typeface="Arial" pitchFamily="34" charset="-122"/>
+                <a:cs typeface="Arial" pitchFamily="34" charset="-120"/>
+              </a:rPr>
+              <a:t>블록 단위 비용 모델에서 큰 객체는 값도 이득도 비례해 커진다. 초기 구현의 크기 편향은 구조가 아니라 아티팩트였다</a:t>
             </a:r>
             <a:endParaRPr lang="en-US" sz="950" dirty="0"/>
           </a:p>
@@ -15968,14 +18465,14 @@
       </p:sp>
       <p:sp>
         <p:nvSpPr>
-          <p:cNvPr id="28" name="Text 26"/>
+          <p:cNvPr id="23" name="Text 21"/>
           <p:cNvSpPr txBox="1"/>
           <p:nvPr/>
         </p:nvSpPr>
         <p:spPr>
           <a:xfrm>
-            <a:off x="8278368" y="2688336"/>
-            <a:ext cx="3261360" cy="219456"/>
+            <a:off x="621792" y="5431536"/>
+            <a:ext cx="5175504" cy="292608"/>
           </a:xfrm>
           <a:prstGeom prst="rect">
             <a:avLst/>
@@ -15994,30 +18491,166 @@
               <a:buNone/>
             </a:pPr>
             <a:r>
-              <a:rPr lang="en-US" sz="850" b="1" dirty="0">
-                <a:solidFill>
-                  <a:srgbClr val="7B8794"/>
-                </a:solidFill>
-                <a:latin typeface="Arial" pitchFamily="34" charset="0"/>
-                <a:ea typeface="Arial" pitchFamily="34" charset="-122"/>
-                <a:cs typeface="Arial" pitchFamily="34" charset="-120"/>
-              </a:rPr>
-              <a:t>왜 여기서 못 푸는가</a:t>
-            </a:r>
-            <a:endParaRPr lang="en-US" sz="850" dirty="0"/>
-          </a:p>
-        </p:txBody>
-      </p:sp>
-      <p:sp>
-        <p:nvSpPr>
-          <p:cNvPr id="29" name="Text 27"/>
+              <a:rPr lang="en-US" sz="950" b="1" dirty="0">
+                <a:solidFill>
+                  <a:srgbClr val="0B6E6E"/>
+                </a:solidFill>
+                <a:latin typeface="Arial" pitchFamily="34" charset="0"/>
+                <a:ea typeface="Arial" pitchFamily="34" charset="-122"/>
+                <a:cs typeface="Arial" pitchFamily="34" charset="-120"/>
+              </a:rPr>
+              <a:t>→ 후보를 최선 형태(steelman)로 세운 뒤 재측정</a:t>
+            </a:r>
+            <a:endParaRPr lang="en-US" sz="950" dirty="0"/>
+          </a:p>
+        </p:txBody>
+      </p:sp>
+      <p:sp>
+        <p:nvSpPr>
+          <p:cNvPr id="24" name="Shape 22"/>
+          <p:cNvSpPr/>
+          <p:nvPr/>
+        </p:nvSpPr>
+        <p:spPr>
+          <a:xfrm>
+            <a:off x="6199632" y="3803904"/>
+            <a:ext cx="5504688" cy="2011680"/>
+          </a:xfrm>
+          <a:prstGeom prst="roundRect">
+            <a:avLst>
+              <a:gd name="adj" fmla="val 2273"/>
+            </a:avLst>
+          </a:prstGeom>
+          <a:solidFill>
+            <a:srgbClr val="FFFFFF"/>
+          </a:solidFill>
+          <a:ln w="9525">
+            <a:solidFill>
+              <a:srgbClr val="DCE1E7"/>
+            </a:solidFill>
+            <a:prstDash val="solid"/>
+          </a:ln>
+        </p:spPr>
+      </p:sp>
+      <p:sp>
+        <p:nvSpPr>
+          <p:cNvPr id="25" name="Shape 23"/>
+          <p:cNvSpPr/>
+          <p:nvPr/>
+        </p:nvSpPr>
+        <p:spPr>
+          <a:xfrm>
+            <a:off x="6364224" y="3968496"/>
+            <a:ext cx="237744" cy="237744"/>
+          </a:xfrm>
+          <a:prstGeom prst="ellipse">
+            <a:avLst/>
+          </a:prstGeom>
+          <a:solidFill>
+            <a:srgbClr val="B7791F"/>
+          </a:solidFill>
+          <a:ln w="12700">
+            <a:solidFill>
+              <a:srgbClr val="B7791F"/>
+            </a:solidFill>
+            <a:prstDash val="solid"/>
+          </a:ln>
+        </p:spPr>
+      </p:sp>
+      <p:sp>
+        <p:nvSpPr>
+          <p:cNvPr id="26" name="Text 24"/>
           <p:cNvSpPr txBox="1"/>
           <p:nvPr/>
         </p:nvSpPr>
         <p:spPr>
           <a:xfrm>
-            <a:off x="8278368" y="2907792"/>
-            <a:ext cx="3261360" cy="548640"/>
+            <a:off x="6364224" y="3968496"/>
+            <a:ext cx="237744" cy="237744"/>
+          </a:xfrm>
+          <a:prstGeom prst="rect">
+            <a:avLst/>
+          </a:prstGeom>
+          <a:noFill/>
+          <a:ln/>
+        </p:spPr>
+        <p:txBody>
+          <a:bodyPr wrap="square" lIns="0" tIns="0" rIns="0" bIns="0" rtlCol="0" anchor="ctr"/>
+          <a:lstStyle/>
+          <a:p>
+            <a:pPr algn="ctr" indent="0" marL="0">
+              <a:lnSpc>
+                <a:spcPct val="115000"/>
+              </a:lnSpc>
+              <a:buNone/>
+            </a:pPr>
+            <a:r>
+              <a:rPr lang="en-US" sz="900" b="1" dirty="0">
+                <a:solidFill>
+                  <a:srgbClr val="FFFFFF"/>
+                </a:solidFill>
+                <a:latin typeface="Arial" pitchFamily="34" charset="0"/>
+                <a:ea typeface="Arial" pitchFamily="34" charset="-122"/>
+                <a:cs typeface="Arial" pitchFamily="34" charset="-120"/>
+              </a:rPr>
+              <a:t>4</a:t>
+            </a:r>
+            <a:endParaRPr lang="en-US" sz="900" dirty="0"/>
+          </a:p>
+        </p:txBody>
+      </p:sp>
+      <p:sp>
+        <p:nvSpPr>
+          <p:cNvPr id="27" name="Text 25"/>
+          <p:cNvSpPr txBox="1"/>
+          <p:nvPr/>
+        </p:nvSpPr>
+        <p:spPr>
+          <a:xfrm>
+            <a:off x="6693408" y="3931920"/>
+            <a:ext cx="4846320" cy="512064"/>
+          </a:xfrm>
+          <a:prstGeom prst="rect">
+            <a:avLst/>
+          </a:prstGeom>
+          <a:noFill/>
+          <a:ln/>
+        </p:spPr>
+        <p:txBody>
+          <a:bodyPr wrap="square" lIns="0" tIns="0" rIns="0" bIns="0" rtlCol="0" anchor="t"/>
+          <a:lstStyle/>
+          <a:p>
+            <a:pPr algn="l" indent="0" marL="0">
+              <a:lnSpc>
+                <a:spcPct val="115000"/>
+              </a:lnSpc>
+              <a:buNone/>
+            </a:pPr>
+            <a:r>
+              <a:rPr lang="en-US" sz="1150" b="1" dirty="0">
+                <a:solidFill>
+                  <a:srgbClr val="1F2933"/>
+                </a:solidFill>
+                <a:latin typeface="Arial" pitchFamily="34" charset="0"/>
+                <a:ea typeface="Arial" pitchFamily="34" charset="-122"/>
+                <a:cs typeface="Arial" pitchFamily="34" charset="-120"/>
+              </a:rPr>
+              <a:t>구분은 유보를 요구하고, 유보량은 미래에 달려 있다</a:t>
+            </a:r>
+            <a:endParaRPr lang="en-US" sz="1150" dirty="0"/>
+          </a:p>
+        </p:txBody>
+      </p:sp>
+      <p:sp>
+        <p:nvSpPr>
+          <p:cNvPr id="28" name="Text 26"/>
+          <p:cNvSpPr txBox="1"/>
+          <p:nvPr/>
+        </p:nvSpPr>
+        <p:spPr>
+          <a:xfrm>
+            <a:off x="6364224" y="4535424"/>
+            <a:ext cx="5175504" cy="822960"/>
           </a:xfrm>
           <a:prstGeom prst="rect">
             <a:avLst/>
@@ -16036,7 +18669,7 @@
               <a:buNone/>
             </a:pPr>
             <a:r>
-              <a:rPr lang="en-US" sz="900" dirty="0">
+              <a:rPr lang="en-US" sz="950" dirty="0">
                 <a:solidFill>
                   <a:srgbClr val="3E4C59"/>
                 </a:solidFill>
@@ -16044,22 +18677,22 @@
                 <a:ea typeface="Arial" pitchFamily="34" charset="-122"/>
                 <a:cs typeface="Arial" pitchFamily="34" charset="-120"/>
               </a:rPr>
-              <a:t>결정 로그 설계는 결정 구조가 아니라 관측성 설계다</a:t>
-            </a:r>
-            <a:endParaRPr lang="en-US" sz="900" dirty="0"/>
-          </a:p>
-        </p:txBody>
-      </p:sp>
-      <p:sp>
-        <p:nvSpPr>
-          <p:cNvPr id="30" name="Text 28"/>
+              <a:t>유보 없음 2.11 (≈ C1의 2.06) / 유보 있음 8.40. 대신 저부하 활용률 1.000 → 0.500</a:t>
+            </a:r>
+            <a:endParaRPr lang="en-US" sz="950" dirty="0"/>
+          </a:p>
+        </p:txBody>
+      </p:sp>
+      <p:sp>
+        <p:nvSpPr>
+          <p:cNvPr id="29" name="Text 27"/>
           <p:cNvSpPr txBox="1"/>
           <p:nvPr/>
         </p:nvSpPr>
         <p:spPr>
           <a:xfrm>
-            <a:off x="8278368" y="3511296"/>
-            <a:ext cx="3261360" cy="219456"/>
+            <a:off x="6364224" y="5431536"/>
+            <a:ext cx="5175504" cy="292608"/>
           </a:xfrm>
           <a:prstGeom prst="rect">
             <a:avLst/>
@@ -16078,30 +18711,30 @@
               <a:buNone/>
             </a:pPr>
             <a:r>
-              <a:rPr lang="en-US" sz="850" b="1" dirty="0">
-                <a:solidFill>
-                  <a:srgbClr val="7B8794"/>
-                </a:solidFill>
-                <a:latin typeface="Arial" pitchFamily="34" charset="0"/>
-                <a:ea typeface="Arial" pitchFamily="34" charset="-122"/>
-                <a:cs typeface="Arial" pitchFamily="34" charset="-120"/>
-              </a:rPr>
-              <a:t>어디서 푸는가</a:t>
-            </a:r>
-            <a:endParaRPr lang="en-US" sz="850" dirty="0"/>
-          </a:p>
-        </p:txBody>
-      </p:sp>
-      <p:sp>
-        <p:nvSpPr>
-          <p:cNvPr id="31" name="Text 29"/>
+              <a:rPr lang="en-US" sz="950" b="1" dirty="0">
+                <a:solidFill>
+                  <a:srgbClr val="0B6E6E"/>
+                </a:solidFill>
+                <a:latin typeface="Arial" pitchFamily="34" charset="0"/>
+                <a:ea typeface="Arial" pitchFamily="34" charset="-122"/>
+                <a:cs typeface="Arial" pitchFamily="34" charset="-120"/>
+              </a:rPr>
+              <a:t>→ 선택 근거에 두 번째 불확실성으로 추가</a:t>
+            </a:r>
+            <a:endParaRPr lang="en-US" sz="950" dirty="0"/>
+          </a:p>
+        </p:txBody>
+      </p:sp>
+      <p:sp>
+        <p:nvSpPr>
+          <p:cNvPr id="30" name="Text 28"/>
           <p:cNvSpPr txBox="1"/>
           <p:nvPr/>
         </p:nvSpPr>
         <p:spPr>
           <a:xfrm>
-            <a:off x="8278368" y="3730752"/>
-            <a:ext cx="3261360" cy="237744"/>
+            <a:off x="457200" y="6035040"/>
+            <a:ext cx="11247120" cy="237744"/>
           </a:xfrm>
           <a:prstGeom prst="rect">
             <a:avLst/>
@@ -16120,30 +18753,62 @@
               <a:buNone/>
             </a:pPr>
             <a:r>
-              <a:rPr lang="en-US" sz="1000" b="1" dirty="0">
-                <a:solidFill>
-                  <a:srgbClr val="0B6E6E"/>
-                </a:solidFill>
-                <a:latin typeface="Arial" pitchFamily="34" charset="0"/>
-                <a:ea typeface="Arial" pitchFamily="34" charset="-122"/>
-                <a:cs typeface="Arial" pitchFamily="34" charset="-120"/>
-              </a:rPr>
-              <a:t>관측성 작업 (소규모)</a:t>
+              <a:rPr lang="en-US" sz="1000" i="1" dirty="0">
+                <a:solidFill>
+                  <a:srgbClr val="7B8794"/>
+                </a:solidFill>
+                <a:latin typeface="Arial" pitchFamily="34" charset="0"/>
+                <a:ea typeface="Arial" pitchFamily="34" charset="-122"/>
+                <a:cs typeface="Arial" pitchFamily="34" charset="-120"/>
+              </a:rPr>
+              <a:t>문서의 수치가 예측이라면 이 값들은 실측이다. 테스트가 깨지면 코드가 틀렸거나 문서가 틀린 것이며, 별점을 맞추려고 테스트를 고치지 않는다.</a:t>
             </a:r>
             <a:endParaRPr lang="en-US" sz="1000" dirty="0"/>
           </a:p>
         </p:txBody>
       </p:sp>
-      <p:sp>
-        <p:nvSpPr>
-          <p:cNvPr id="32" name="Text 30"/>
+    </p:spTree>
+  </p:cSld>
+  <p:clrMapOvr>
+    <a:masterClrMapping/>
+  </p:clrMapOvr>
+</p:sld>
+</file>
+
+<file path=ppt/slides/slide18.xml><?xml version="1.0" encoding="utf-8"?>
+<p:sld xmlns:a="http://schemas.openxmlformats.org/drawingml/2006/main" xmlns:r="http://schemas.openxmlformats.org/officeDocument/2006/relationships" xmlns:p="http://schemas.openxmlformats.org/presentationml/2006/main">
+  <p:cSld name="Slide 18">
+    <p:bg>
+      <p:bgPr>
+        <a:solidFill>
+          <a:srgbClr val="FFFFFF"/>
+        </a:solidFill>
+      </p:bgPr>
+    </p:bg>
+    <p:spTree>
+      <p:nvGrpSpPr>
+        <p:cNvPr id="1" name=""/>
+        <p:cNvGrpSpPr/>
+        <p:nvPr/>
+      </p:nvGrpSpPr>
+      <p:grpSpPr>
+        <a:xfrm>
+          <a:off x="0" y="0"/>
+          <a:ext cx="0" cy="0"/>
+          <a:chOff x="0" y="0"/>
+          <a:chExt cx="0" cy="0"/>
+        </a:xfrm>
+      </p:grpSpPr>
+      <p:sp>
+        <p:nvSpPr>
+          <p:cNvPr id="2" name="Text 0"/>
           <p:cNvSpPr txBox="1"/>
           <p:nvPr/>
         </p:nvSpPr>
         <p:spPr>
           <a:xfrm>
-            <a:off x="8278368" y="4005072"/>
-            <a:ext cx="3261360" cy="274320"/>
+            <a:off x="457200" y="292608"/>
+            <a:ext cx="8686800" cy="219456"/>
           </a:xfrm>
           <a:prstGeom prst="rect">
             <a:avLst/>
@@ -16152,7 +18817,217 @@
           <a:ln/>
         </p:spPr>
         <p:txBody>
-          <a:bodyPr wrap="square" lIns="0" tIns="0" rIns="0" bIns="0" rtlCol="0" anchor="t"/>
+          <a:bodyPr wrap="square" lIns="0" tIns="0" rIns="0" bIns="0" rtlCol="0" anchor="ctr"/>
+          <a:lstStyle/>
+          <a:p>
+            <a:pPr indent="0" marL="0">
+              <a:buNone/>
+            </a:pPr>
+            <a:r>
+              <a:rPr lang="en-US" sz="1050" b="1" spc="150" kern="0" dirty="0">
+                <a:solidFill>
+                  <a:srgbClr val="7B8794"/>
+                </a:solidFill>
+                <a:latin typeface="Arial" pitchFamily="34" charset="0"/>
+                <a:ea typeface="Arial" pitchFamily="34" charset="-122"/>
+                <a:cs typeface="Arial" pitchFamily="34" charset="-120"/>
+              </a:rPr>
+              <a:t>DP1 · 12장 잔여 문제와 DP 연결</a:t>
+            </a:r>
+            <a:endParaRPr lang="en-US" sz="1050" dirty="0"/>
+          </a:p>
+        </p:txBody>
+      </p:sp>
+      <p:sp>
+        <p:nvSpPr>
+          <p:cNvPr id="3" name="Text 1"/>
+          <p:cNvSpPr txBox="1"/>
+          <p:nvPr/>
+        </p:nvSpPr>
+        <p:spPr>
+          <a:xfrm>
+            <a:off x="457200" y="530352"/>
+            <a:ext cx="11247120" cy="402336"/>
+          </a:xfrm>
+          <a:prstGeom prst="rect">
+            <a:avLst/>
+          </a:prstGeom>
+          <a:noFill/>
+          <a:ln/>
+        </p:spPr>
+        <p:txBody>
+          <a:bodyPr wrap="square" lIns="0" tIns="0" rIns="0" bIns="0" rtlCol="0" anchor="ctr"/>
+          <a:lstStyle/>
+          <a:p>
+            <a:pPr indent="0" marL="0">
+              <a:buNone/>
+            </a:pPr>
+            <a:r>
+              <a:rPr lang="en-US" sz="2300" b="1" dirty="0">
+                <a:solidFill>
+                  <a:srgbClr val="1F2933"/>
+                </a:solidFill>
+                <a:latin typeface="Arial" pitchFamily="34" charset="0"/>
+                <a:ea typeface="Arial" pitchFamily="34" charset="-122"/>
+                <a:cs typeface="Arial" pitchFamily="34" charset="-120"/>
+              </a:rPr>
+              <a:t>무엇을 남겼고, 어디서 푸는가</a:t>
+            </a:r>
+            <a:endParaRPr lang="en-US" sz="2300" dirty="0"/>
+          </a:p>
+        </p:txBody>
+      </p:sp>
+      <p:sp>
+        <p:nvSpPr>
+          <p:cNvPr id="4" name="Text 2"/>
+          <p:cNvSpPr txBox="1"/>
+          <p:nvPr/>
+        </p:nvSpPr>
+        <p:spPr>
+          <a:xfrm>
+            <a:off x="457200" y="969264"/>
+            <a:ext cx="11247120" cy="256032"/>
+          </a:xfrm>
+          <a:prstGeom prst="rect">
+            <a:avLst/>
+          </a:prstGeom>
+          <a:noFill/>
+          <a:ln/>
+        </p:spPr>
+        <p:txBody>
+          <a:bodyPr wrap="square" lIns="0" tIns="0" rIns="0" bIns="0" rtlCol="0" anchor="ctr"/>
+          <a:lstStyle/>
+          <a:p>
+            <a:pPr indent="0" marL="0">
+              <a:buNone/>
+            </a:pPr>
+            <a:r>
+              <a:rPr lang="en-US" sz="1100" dirty="0">
+                <a:solidFill>
+                  <a:srgbClr val="7B8794"/>
+                </a:solidFill>
+                <a:latin typeface="Arial" pitchFamily="34" charset="0"/>
+                <a:ea typeface="Arial" pitchFamily="34" charset="-122"/>
+                <a:cs typeface="Arial" pitchFamily="34" charset="-120"/>
+              </a:rPr>
+              <a:t>"왜 이 DP에서 풀 수 없는가"에 답하지 못하면 잔여 인계는 회피로 읽힌다</a:t>
+            </a:r>
+            <a:endParaRPr lang="en-US" sz="1100" dirty="0"/>
+          </a:p>
+        </p:txBody>
+      </p:sp>
+      <p:sp>
+        <p:nvSpPr>
+          <p:cNvPr id="5" name="Text 3"/>
+          <p:cNvSpPr txBox="1"/>
+          <p:nvPr/>
+        </p:nvSpPr>
+        <p:spPr>
+          <a:xfrm>
+            <a:off x="9692640" y="6455664"/>
+            <a:ext cx="2011680" cy="219456"/>
+          </a:xfrm>
+          <a:prstGeom prst="rect">
+            <a:avLst/>
+          </a:prstGeom>
+          <a:noFill/>
+          <a:ln/>
+        </p:spPr>
+        <p:txBody>
+          <a:bodyPr wrap="square" lIns="0" tIns="0" rIns="0" bIns="0" rtlCol="0" anchor="ctr"/>
+          <a:lstStyle/>
+          <a:p>
+            <a:pPr algn="r" indent="0" marL="0">
+              <a:buNone/>
+            </a:pPr>
+            <a:r>
+              <a:rPr lang="en-US" sz="850" dirty="0">
+                <a:solidFill>
+                  <a:srgbClr val="7B8794"/>
+                </a:solidFill>
+                <a:latin typeface="Arial" pitchFamily="34" charset="0"/>
+                <a:ea typeface="Arial" pitchFamily="34" charset="-122"/>
+                <a:cs typeface="Arial" pitchFamily="34" charset="-120"/>
+              </a:rPr>
+              <a:t>DP1 · 17 / 19</a:t>
+            </a:r>
+            <a:endParaRPr lang="en-US" sz="850" dirty="0"/>
+          </a:p>
+        </p:txBody>
+      </p:sp>
+      <p:sp>
+        <p:nvSpPr>
+          <p:cNvPr id="6" name="Shape 4"/>
+          <p:cNvSpPr/>
+          <p:nvPr/>
+        </p:nvSpPr>
+        <p:spPr>
+          <a:xfrm>
+            <a:off x="457200" y="1572768"/>
+            <a:ext cx="3590544" cy="2761488"/>
+          </a:xfrm>
+          <a:prstGeom prst="roundRect">
+            <a:avLst>
+              <a:gd name="adj" fmla="val 1656"/>
+            </a:avLst>
+          </a:prstGeom>
+          <a:solidFill>
+            <a:srgbClr val="FFFFFF"/>
+          </a:solidFill>
+          <a:ln w="9525">
+            <a:solidFill>
+              <a:srgbClr val="DCE1E7"/>
+            </a:solidFill>
+            <a:prstDash val="solid"/>
+          </a:ln>
+        </p:spPr>
+      </p:sp>
+      <p:sp>
+        <p:nvSpPr>
+          <p:cNvPr id="7" name="Shape 5"/>
+          <p:cNvSpPr/>
+          <p:nvPr/>
+        </p:nvSpPr>
+        <p:spPr>
+          <a:xfrm>
+            <a:off x="457200" y="1572768"/>
+            <a:ext cx="3590544" cy="365760"/>
+          </a:xfrm>
+          <a:prstGeom prst="roundRect">
+            <a:avLst>
+              <a:gd name="adj" fmla="val 12500"/>
+            </a:avLst>
+          </a:prstGeom>
+          <a:solidFill>
+            <a:srgbClr val="B7791F"/>
+          </a:solidFill>
+          <a:ln w="12700">
+            <a:solidFill>
+              <a:srgbClr val="B7791F"/>
+            </a:solidFill>
+            <a:prstDash val="solid"/>
+          </a:ln>
+        </p:spPr>
+      </p:sp>
+      <p:sp>
+        <p:nvSpPr>
+          <p:cNvPr id="8" name="Text 6"/>
+          <p:cNvSpPr txBox="1"/>
+          <p:nvPr/>
+        </p:nvSpPr>
+        <p:spPr>
+          <a:xfrm>
+            <a:off x="603504" y="1572768"/>
+            <a:ext cx="3297936" cy="365760"/>
+          </a:xfrm>
+          <a:prstGeom prst="rect">
+            <a:avLst/>
+          </a:prstGeom>
+          <a:noFill/>
+          <a:ln/>
+        </p:spPr>
+        <p:txBody>
+          <a:bodyPr wrap="square" lIns="0" tIns="0" rIns="0" bIns="0" rtlCol="0" anchor="ctr"/>
           <a:lstStyle/>
           <a:p>
             <a:pPr algn="l" indent="0" marL="0">
@@ -16162,30 +19037,72 @@
               <a:buNone/>
             </a:pPr>
             <a:r>
-              <a:rPr lang="en-US" sz="850" dirty="0">
-                <a:solidFill>
-                  <a:srgbClr val="7B8794"/>
-                </a:solidFill>
-                <a:latin typeface="Arial" pitchFamily="34" charset="0"/>
-                <a:ea typeface="Arial" pitchFamily="34" charset="-122"/>
-                <a:cs typeface="Arial" pitchFamily="34" charset="-120"/>
-              </a:rPr>
-              <a:t>결합: DP1의 선택이 로그 스키마를 결정한다</a:t>
-            </a:r>
-            <a:endParaRPr lang="en-US" sz="850" dirty="0"/>
-          </a:p>
-        </p:txBody>
-      </p:sp>
-      <p:sp>
-        <p:nvSpPr>
-          <p:cNvPr id="33" name="Text 31"/>
+              <a:rPr lang="en-US" sz="1100" b="1" dirty="0">
+                <a:solidFill>
+                  <a:srgbClr val="FFFFFF"/>
+                </a:solidFill>
+                <a:latin typeface="Arial" pitchFamily="34" charset="0"/>
+                <a:ea typeface="Arial" pitchFamily="34" charset="-122"/>
+                <a:cs typeface="Arial" pitchFamily="34" charset="-120"/>
+              </a:rPr>
+              <a:t>R1  ·  재분류</a:t>
+            </a:r>
+            <a:endParaRPr lang="en-US" sz="1100" dirty="0"/>
+          </a:p>
+        </p:txBody>
+      </p:sp>
+      <p:sp>
+        <p:nvSpPr>
+          <p:cNvPr id="9" name="Text 7"/>
           <p:cNvSpPr txBox="1"/>
           <p:nvPr/>
         </p:nvSpPr>
         <p:spPr>
           <a:xfrm>
-            <a:off x="457200" y="4443984"/>
-            <a:ext cx="11247120" cy="237744"/>
+            <a:off x="621792" y="2048256"/>
+            <a:ext cx="3261360" cy="566928"/>
+          </a:xfrm>
+          <a:prstGeom prst="rect">
+            <a:avLst/>
+          </a:prstGeom>
+          <a:noFill/>
+          <a:ln/>
+        </p:spPr>
+        <p:txBody>
+          <a:bodyPr wrap="square" lIns="0" tIns="0" rIns="0" bIns="0" rtlCol="0" anchor="t"/>
+          <a:lstStyle/>
+          <a:p>
+            <a:pPr algn="l" indent="0" marL="0">
+              <a:lnSpc>
+                <a:spcPct val="120000"/>
+              </a:lnSpc>
+              <a:buNone/>
+            </a:pPr>
+            <a:r>
+              <a:rPr lang="en-US" sz="950" b="1" dirty="0">
+                <a:solidFill>
+                  <a:srgbClr val="1F2933"/>
+                </a:solidFill>
+                <a:latin typeface="Arial" pitchFamily="34" charset="0"/>
+                <a:ea typeface="Arial" pitchFamily="34" charset="-122"/>
+                <a:cs typeface="Arial" pitchFamily="34" charset="-120"/>
+              </a:rPr>
+              <a:t>배치 정확도를 올리려면 실행 후 관측으로 재분류해야 하는데 두 후보 모두 갖지 않는다</a:t>
+            </a:r>
+            <a:endParaRPr lang="en-US" sz="950" dirty="0"/>
+          </a:p>
+        </p:txBody>
+      </p:sp>
+      <p:sp>
+        <p:nvSpPr>
+          <p:cNvPr id="10" name="Text 8"/>
+          <p:cNvSpPr txBox="1"/>
+          <p:nvPr/>
+        </p:nvSpPr>
+        <p:spPr>
+          <a:xfrm>
+            <a:off x="621792" y="2688336"/>
+            <a:ext cx="3261360" cy="219456"/>
           </a:xfrm>
           <a:prstGeom prst="rect">
             <a:avLst/>
@@ -16204,6 +19121,912 @@
               <a:buNone/>
             </a:pPr>
             <a:r>
+              <a:rPr lang="en-US" sz="850" b="1" dirty="0">
+                <a:solidFill>
+                  <a:srgbClr val="7B8794"/>
+                </a:solidFill>
+                <a:latin typeface="Arial" pitchFamily="34" charset="0"/>
+                <a:ea typeface="Arial" pitchFamily="34" charset="-122"/>
+                <a:cs typeface="Arial" pitchFamily="34" charset="-120"/>
+              </a:rPr>
+              <a:t>왜 여기서 못 푸는가</a:t>
+            </a:r>
+            <a:endParaRPr lang="en-US" sz="850" dirty="0"/>
+          </a:p>
+        </p:txBody>
+      </p:sp>
+      <p:sp>
+        <p:nvSpPr>
+          <p:cNvPr id="11" name="Text 9"/>
+          <p:cNvSpPr txBox="1"/>
+          <p:nvPr/>
+        </p:nvSpPr>
+        <p:spPr>
+          <a:xfrm>
+            <a:off x="621792" y="2907792"/>
+            <a:ext cx="3261360" cy="548640"/>
+          </a:xfrm>
+          <a:prstGeom prst="rect">
+            <a:avLst/>
+          </a:prstGeom>
+          <a:noFill/>
+          <a:ln/>
+        </p:spPr>
+        <p:txBody>
+          <a:bodyPr wrap="square" lIns="0" tIns="0" rIns="0" bIns="0" rtlCol="0" anchor="t"/>
+          <a:lstStyle/>
+          <a:p>
+            <a:pPr algn="l" indent="0" marL="0">
+              <a:lnSpc>
+                <a:spcPct val="120000"/>
+              </a:lnSpc>
+              <a:buNone/>
+            </a:pPr>
+            <a:r>
+              <a:rPr lang="en-US" sz="900" dirty="0">
+                <a:solidFill>
+                  <a:srgbClr val="3E4C59"/>
+                </a:solidFill>
+                <a:latin typeface="Arial" pitchFamily="34" charset="0"/>
+                <a:ea typeface="Arial" pitchFamily="34" charset="-122"/>
+                <a:cs typeface="Arial" pitchFamily="34" charset="-120"/>
+              </a:rPr>
+              <a:t>결정 변수가 다르다 — 재분류는 "언제 다시 결정하는가"라는 별도 축이다</a:t>
+            </a:r>
+            <a:endParaRPr lang="en-US" sz="900" dirty="0"/>
+          </a:p>
+        </p:txBody>
+      </p:sp>
+      <p:sp>
+        <p:nvSpPr>
+          <p:cNvPr id="12" name="Text 10"/>
+          <p:cNvSpPr txBox="1"/>
+          <p:nvPr/>
+        </p:nvSpPr>
+        <p:spPr>
+          <a:xfrm>
+            <a:off x="621792" y="3511296"/>
+            <a:ext cx="3261360" cy="219456"/>
+          </a:xfrm>
+          <a:prstGeom prst="rect">
+            <a:avLst/>
+          </a:prstGeom>
+          <a:noFill/>
+          <a:ln/>
+        </p:spPr>
+        <p:txBody>
+          <a:bodyPr wrap="square" lIns="0" tIns="0" rIns="0" bIns="0" rtlCol="0" anchor="t"/>
+          <a:lstStyle/>
+          <a:p>
+            <a:pPr algn="l" indent="0" marL="0">
+              <a:lnSpc>
+                <a:spcPct val="115000"/>
+              </a:lnSpc>
+              <a:buNone/>
+            </a:pPr>
+            <a:r>
+              <a:rPr lang="en-US" sz="850" b="1" dirty="0">
+                <a:solidFill>
+                  <a:srgbClr val="7B8794"/>
+                </a:solidFill>
+                <a:latin typeface="Arial" pitchFamily="34" charset="0"/>
+                <a:ea typeface="Arial" pitchFamily="34" charset="-122"/>
+                <a:cs typeface="Arial" pitchFamily="34" charset="-120"/>
+              </a:rPr>
+              <a:t>어디서 푸는가</a:t>
+            </a:r>
+            <a:endParaRPr lang="en-US" sz="850" dirty="0"/>
+          </a:p>
+        </p:txBody>
+      </p:sp>
+      <p:sp>
+        <p:nvSpPr>
+          <p:cNvPr id="13" name="Text 11"/>
+          <p:cNvSpPr txBox="1"/>
+          <p:nvPr/>
+        </p:nvSpPr>
+        <p:spPr>
+          <a:xfrm>
+            <a:off x="621792" y="3730752"/>
+            <a:ext cx="3261360" cy="237744"/>
+          </a:xfrm>
+          <a:prstGeom prst="rect">
+            <a:avLst/>
+          </a:prstGeom>
+          <a:noFill/>
+          <a:ln/>
+        </p:spPr>
+        <p:txBody>
+          <a:bodyPr wrap="square" lIns="0" tIns="0" rIns="0" bIns="0" rtlCol="0" anchor="t"/>
+          <a:lstStyle/>
+          <a:p>
+            <a:pPr algn="l" indent="0" marL="0">
+              <a:lnSpc>
+                <a:spcPct val="115000"/>
+              </a:lnSpc>
+              <a:buNone/>
+            </a:pPr>
+            <a:r>
+              <a:rPr lang="en-US" sz="1000" b="1" dirty="0">
+                <a:solidFill>
+                  <a:srgbClr val="0B6E6E"/>
+                </a:solidFill>
+                <a:latin typeface="Arial" pitchFamily="34" charset="0"/>
+                <a:ea typeface="Arial" pitchFamily="34" charset="-122"/>
+                <a:cs typeface="Arial" pitchFamily="34" charset="-120"/>
+              </a:rPr>
+              <a:t>DP3 (신규) 재배치 트리거</a:t>
+            </a:r>
+            <a:endParaRPr lang="en-US" sz="1000" dirty="0"/>
+          </a:p>
+        </p:txBody>
+      </p:sp>
+      <p:sp>
+        <p:nvSpPr>
+          <p:cNvPr id="14" name="Text 12"/>
+          <p:cNvSpPr txBox="1"/>
+          <p:nvPr/>
+        </p:nvSpPr>
+        <p:spPr>
+          <a:xfrm>
+            <a:off x="621792" y="4005072"/>
+            <a:ext cx="3261360" cy="274320"/>
+          </a:xfrm>
+          <a:prstGeom prst="rect">
+            <a:avLst/>
+          </a:prstGeom>
+          <a:noFill/>
+          <a:ln/>
+        </p:spPr>
+        <p:txBody>
+          <a:bodyPr wrap="square" lIns="0" tIns="0" rIns="0" bIns="0" rtlCol="0" anchor="t"/>
+          <a:lstStyle/>
+          <a:p>
+            <a:pPr algn="l" indent="0" marL="0">
+              <a:lnSpc>
+                <a:spcPct val="115000"/>
+              </a:lnSpc>
+              <a:buNone/>
+            </a:pPr>
+            <a:r>
+              <a:rPr lang="en-US" sz="850" dirty="0">
+                <a:solidFill>
+                  <a:srgbClr val="7B8794"/>
+                </a:solidFill>
+                <a:latin typeface="Arial" pitchFamily="34" charset="0"/>
+                <a:ea typeface="Arial" pitchFamily="34" charset="-122"/>
+                <a:cs typeface="Arial" pitchFamily="34" charset="-120"/>
+              </a:rPr>
+              <a:t>결합: DP1의 인덱스 축이 DP3의 신호원을 제약한다 (C1 선택 → tier 상태 기반)</a:t>
+            </a:r>
+            <a:endParaRPr lang="en-US" sz="850" dirty="0"/>
+          </a:p>
+        </p:txBody>
+      </p:sp>
+      <p:sp>
+        <p:nvSpPr>
+          <p:cNvPr id="15" name="Shape 13"/>
+          <p:cNvSpPr/>
+          <p:nvPr/>
+        </p:nvSpPr>
+        <p:spPr>
+          <a:xfrm>
+            <a:off x="4285488" y="1572768"/>
+            <a:ext cx="3590544" cy="2761488"/>
+          </a:xfrm>
+          <a:prstGeom prst="roundRect">
+            <a:avLst>
+              <a:gd name="adj" fmla="val 1656"/>
+            </a:avLst>
+          </a:prstGeom>
+          <a:solidFill>
+            <a:srgbClr val="FFFFFF"/>
+          </a:solidFill>
+          <a:ln w="9525">
+            <a:solidFill>
+              <a:srgbClr val="DCE1E7"/>
+            </a:solidFill>
+            <a:prstDash val="solid"/>
+          </a:ln>
+        </p:spPr>
+      </p:sp>
+      <p:sp>
+        <p:nvSpPr>
+          <p:cNvPr id="16" name="Shape 14"/>
+          <p:cNvSpPr/>
+          <p:nvPr/>
+        </p:nvSpPr>
+        <p:spPr>
+          <a:xfrm>
+            <a:off x="4285488" y="1572768"/>
+            <a:ext cx="3590544" cy="365760"/>
+          </a:xfrm>
+          <a:prstGeom prst="roundRect">
+            <a:avLst>
+              <a:gd name="adj" fmla="val 12500"/>
+            </a:avLst>
+          </a:prstGeom>
+          <a:solidFill>
+            <a:srgbClr val="B7791F"/>
+          </a:solidFill>
+          <a:ln w="12700">
+            <a:solidFill>
+              <a:srgbClr val="B7791F"/>
+            </a:solidFill>
+            <a:prstDash val="solid"/>
+          </a:ln>
+        </p:spPr>
+      </p:sp>
+      <p:sp>
+        <p:nvSpPr>
+          <p:cNvPr id="17" name="Text 15"/>
+          <p:cNvSpPr txBox="1"/>
+          <p:nvPr/>
+        </p:nvSpPr>
+        <p:spPr>
+          <a:xfrm>
+            <a:off x="4431792" y="1572768"/>
+            <a:ext cx="3297936" cy="365760"/>
+          </a:xfrm>
+          <a:prstGeom prst="rect">
+            <a:avLst/>
+          </a:prstGeom>
+          <a:noFill/>
+          <a:ln/>
+        </p:spPr>
+        <p:txBody>
+          <a:bodyPr wrap="square" lIns="0" tIns="0" rIns="0" bIns="0" rtlCol="0" anchor="ctr"/>
+          <a:lstStyle/>
+          <a:p>
+            <a:pPr algn="l" indent="0" marL="0">
+              <a:lnSpc>
+                <a:spcPct val="115000"/>
+              </a:lnSpc>
+              <a:buNone/>
+            </a:pPr>
+            <a:r>
+              <a:rPr lang="en-US" sz="1100" b="1" dirty="0">
+                <a:solidFill>
+                  <a:srgbClr val="FFFFFF"/>
+                </a:solidFill>
+                <a:latin typeface="Arial" pitchFamily="34" charset="0"/>
+                <a:ea typeface="Arial" pitchFamily="34" charset="-122"/>
+                <a:cs typeface="Arial" pitchFamily="34" charset="-120"/>
+              </a:rPr>
+              <a:t>R2  ·  구분 능력</a:t>
+            </a:r>
+            <a:endParaRPr lang="en-US" sz="1100" dirty="0"/>
+          </a:p>
+        </p:txBody>
+      </p:sp>
+      <p:sp>
+        <p:nvSpPr>
+          <p:cNvPr id="18" name="Text 16"/>
+          <p:cNvSpPr txBox="1"/>
+          <p:nvPr/>
+        </p:nvSpPr>
+        <p:spPr>
+          <a:xfrm>
+            <a:off x="4450080" y="2048256"/>
+            <a:ext cx="3261360" cy="566928"/>
+          </a:xfrm>
+          <a:prstGeom prst="rect">
+            <a:avLst/>
+          </a:prstGeom>
+          <a:noFill/>
+          <a:ln/>
+        </p:spPr>
+        <p:txBody>
+          <a:bodyPr wrap="square" lIns="0" tIns="0" rIns="0" bIns="0" rtlCol="0" anchor="t"/>
+          <a:lstStyle/>
+          <a:p>
+            <a:pPr algn="l" indent="0" marL="0">
+              <a:lnSpc>
+                <a:spcPct val="120000"/>
+              </a:lnSpc>
+              <a:buNone/>
+            </a:pPr>
+            <a:r>
+              <a:rPr lang="en-US" sz="950" b="1" dirty="0">
+                <a:solidFill>
+                  <a:srgbClr val="1F2933"/>
+                </a:solidFill>
+                <a:latin typeface="Arial" pitchFamily="34" charset="0"/>
+                <a:ea typeface="Arial" pitchFamily="34" charset="-122"/>
+                <a:cs typeface="Arial" pitchFamily="34" charset="-120"/>
+              </a:rPr>
+              <a:t>C1 선택으로 QA1이 미해소로 남는다</a:t>
+            </a:r>
+            <a:endParaRPr lang="en-US" sz="950" dirty="0"/>
+          </a:p>
+        </p:txBody>
+      </p:sp>
+      <p:sp>
+        <p:nvSpPr>
+          <p:cNvPr id="19" name="Text 17"/>
+          <p:cNvSpPr txBox="1"/>
+          <p:nvPr/>
+        </p:nvSpPr>
+        <p:spPr>
+          <a:xfrm>
+            <a:off x="4450080" y="2688336"/>
+            <a:ext cx="3261360" cy="219456"/>
+          </a:xfrm>
+          <a:prstGeom prst="rect">
+            <a:avLst/>
+          </a:prstGeom>
+          <a:noFill/>
+          <a:ln/>
+        </p:spPr>
+        <p:txBody>
+          <a:bodyPr wrap="square" lIns="0" tIns="0" rIns="0" bIns="0" rtlCol="0" anchor="t"/>
+          <a:lstStyle/>
+          <a:p>
+            <a:pPr algn="l" indent="0" marL="0">
+              <a:lnSpc>
+                <a:spcPct val="115000"/>
+              </a:lnSpc>
+              <a:buNone/>
+            </a:pPr>
+            <a:r>
+              <a:rPr lang="en-US" sz="850" b="1" dirty="0">
+                <a:solidFill>
+                  <a:srgbClr val="7B8794"/>
+                </a:solidFill>
+                <a:latin typeface="Arial" pitchFamily="34" charset="0"/>
+                <a:ea typeface="Arial" pitchFamily="34" charset="-122"/>
+                <a:cs typeface="Arial" pitchFamily="34" charset="-120"/>
+              </a:rPr>
+              <a:t>왜 여기서 못 푸는가</a:t>
+            </a:r>
+            <a:endParaRPr lang="en-US" sz="850" dirty="0"/>
+          </a:p>
+        </p:txBody>
+      </p:sp>
+      <p:sp>
+        <p:nvSpPr>
+          <p:cNvPr id="20" name="Text 18"/>
+          <p:cNvSpPr txBox="1"/>
+          <p:nvPr/>
+        </p:nvSpPr>
+        <p:spPr>
+          <a:xfrm>
+            <a:off x="4450080" y="2907792"/>
+            <a:ext cx="3261360" cy="548640"/>
+          </a:xfrm>
+          <a:prstGeom prst="rect">
+            <a:avLst/>
+          </a:prstGeom>
+          <a:noFill/>
+          <a:ln/>
+        </p:spPr>
+        <p:txBody>
+          <a:bodyPr wrap="square" lIns="0" tIns="0" rIns="0" bIns="0" rtlCol="0" anchor="t"/>
+          <a:lstStyle/>
+          <a:p>
+            <a:pPr algn="l" indent="0" marL="0">
+              <a:lnSpc>
+                <a:spcPct val="120000"/>
+              </a:lnSpc>
+              <a:buNone/>
+            </a:pPr>
+            <a:r>
+              <a:rPr lang="en-US" sz="900" dirty="0">
+                <a:solidFill>
+                  <a:srgbClr val="3E4C59"/>
+                </a:solidFill>
+                <a:latin typeface="Arial" pitchFamily="34" charset="0"/>
+                <a:ea typeface="Arial" pitchFamily="34" charset="-122"/>
+                <a:cs typeface="Arial" pitchFamily="34" charset="-120"/>
+              </a:rPr>
+              <a:t>구분하려면 미래 정보 추정이 필요 — 배치 구조가 아니라 예측기 설계 문제다</a:t>
+            </a:r>
+            <a:endParaRPr lang="en-US" sz="900" dirty="0"/>
+          </a:p>
+        </p:txBody>
+      </p:sp>
+      <p:sp>
+        <p:nvSpPr>
+          <p:cNvPr id="21" name="Text 19"/>
+          <p:cNvSpPr txBox="1"/>
+          <p:nvPr/>
+        </p:nvSpPr>
+        <p:spPr>
+          <a:xfrm>
+            <a:off x="4450080" y="3511296"/>
+            <a:ext cx="3261360" cy="219456"/>
+          </a:xfrm>
+          <a:prstGeom prst="rect">
+            <a:avLst/>
+          </a:prstGeom>
+          <a:noFill/>
+          <a:ln/>
+        </p:spPr>
+        <p:txBody>
+          <a:bodyPr wrap="square" lIns="0" tIns="0" rIns="0" bIns="0" rtlCol="0" anchor="t"/>
+          <a:lstStyle/>
+          <a:p>
+            <a:pPr algn="l" indent="0" marL="0">
+              <a:lnSpc>
+                <a:spcPct val="115000"/>
+              </a:lnSpc>
+              <a:buNone/>
+            </a:pPr>
+            <a:r>
+              <a:rPr lang="en-US" sz="850" b="1" dirty="0">
+                <a:solidFill>
+                  <a:srgbClr val="7B8794"/>
+                </a:solidFill>
+                <a:latin typeface="Arial" pitchFamily="34" charset="0"/>
+                <a:ea typeface="Arial" pitchFamily="34" charset="-122"/>
+                <a:cs typeface="Arial" pitchFamily="34" charset="-120"/>
+              </a:rPr>
+              <a:t>어디서 푸는가</a:t>
+            </a:r>
+            <a:endParaRPr lang="en-US" sz="850" dirty="0"/>
+          </a:p>
+        </p:txBody>
+      </p:sp>
+      <p:sp>
+        <p:nvSpPr>
+          <p:cNvPr id="22" name="Text 20"/>
+          <p:cNvSpPr txBox="1"/>
+          <p:nvPr/>
+        </p:nvSpPr>
+        <p:spPr>
+          <a:xfrm>
+            <a:off x="4450080" y="3730752"/>
+            <a:ext cx="3261360" cy="237744"/>
+          </a:xfrm>
+          <a:prstGeom prst="rect">
+            <a:avLst/>
+          </a:prstGeom>
+          <a:noFill/>
+          <a:ln/>
+        </p:spPr>
+        <p:txBody>
+          <a:bodyPr wrap="square" lIns="0" tIns="0" rIns="0" bIns="0" rtlCol="0" anchor="t"/>
+          <a:lstStyle/>
+          <a:p>
+            <a:pPr algn="l" indent="0" marL="0">
+              <a:lnSpc>
+                <a:spcPct val="115000"/>
+              </a:lnSpc>
+              <a:buNone/>
+            </a:pPr>
+            <a:r>
+              <a:rPr lang="en-US" sz="1000" b="1" dirty="0">
+                <a:solidFill>
+                  <a:srgbClr val="0B6E6E"/>
+                </a:solidFill>
+                <a:latin typeface="Arial" pitchFamily="34" charset="0"/>
+                <a:ea typeface="Arial" pitchFamily="34" charset="-122"/>
+                <a:cs typeface="Arial" pitchFamily="34" charset="-120"/>
+              </a:rPr>
+              <a:t>DP4 (신규) 요청 특성 예측</a:t>
+            </a:r>
+            <a:endParaRPr lang="en-US" sz="1000" dirty="0"/>
+          </a:p>
+        </p:txBody>
+      </p:sp>
+      <p:sp>
+        <p:nvSpPr>
+          <p:cNvPr id="23" name="Text 21"/>
+          <p:cNvSpPr txBox="1"/>
+          <p:nvPr/>
+        </p:nvSpPr>
+        <p:spPr>
+          <a:xfrm>
+            <a:off x="4450080" y="4005072"/>
+            <a:ext cx="3261360" cy="274320"/>
+          </a:xfrm>
+          <a:prstGeom prst="rect">
+            <a:avLst/>
+          </a:prstGeom>
+          <a:noFill/>
+          <a:ln/>
+        </p:spPr>
+        <p:txBody>
+          <a:bodyPr wrap="square" lIns="0" tIns="0" rIns="0" bIns="0" rtlCol="0" anchor="t"/>
+          <a:lstStyle/>
+          <a:p>
+            <a:pPr algn="l" indent="0" marL="0">
+              <a:lnSpc>
+                <a:spcPct val="115000"/>
+              </a:lnSpc>
+              <a:buNone/>
+            </a:pPr>
+            <a:r>
+              <a:rPr lang="en-US" sz="850" dirty="0">
+                <a:solidFill>
+                  <a:srgbClr val="7B8794"/>
+                </a:solidFill>
+                <a:latin typeface="Arial" pitchFamily="34" charset="0"/>
+                <a:ea typeface="Arial" pitchFamily="34" charset="-122"/>
+                <a:cs typeface="Arial" pitchFamily="34" charset="-120"/>
+              </a:rPr>
+              <a:t>결합: DP4의 예측 정확도가 DP1의 반전 조건을 공급한다</a:t>
+            </a:r>
+            <a:endParaRPr lang="en-US" sz="850" dirty="0"/>
+          </a:p>
+        </p:txBody>
+      </p:sp>
+      <p:sp>
+        <p:nvSpPr>
+          <p:cNvPr id="24" name="Shape 22"/>
+          <p:cNvSpPr/>
+          <p:nvPr/>
+        </p:nvSpPr>
+        <p:spPr>
+          <a:xfrm>
+            <a:off x="8113776" y="1572768"/>
+            <a:ext cx="3590544" cy="2761488"/>
+          </a:xfrm>
+          <a:prstGeom prst="roundRect">
+            <a:avLst>
+              <a:gd name="adj" fmla="val 1656"/>
+            </a:avLst>
+          </a:prstGeom>
+          <a:solidFill>
+            <a:srgbClr val="FFFFFF"/>
+          </a:solidFill>
+          <a:ln w="9525">
+            <a:solidFill>
+              <a:srgbClr val="DCE1E7"/>
+            </a:solidFill>
+            <a:prstDash val="solid"/>
+          </a:ln>
+        </p:spPr>
+      </p:sp>
+      <p:sp>
+        <p:nvSpPr>
+          <p:cNvPr id="25" name="Shape 23"/>
+          <p:cNvSpPr/>
+          <p:nvPr/>
+        </p:nvSpPr>
+        <p:spPr>
+          <a:xfrm>
+            <a:off x="8113776" y="1572768"/>
+            <a:ext cx="3590544" cy="365760"/>
+          </a:xfrm>
+          <a:prstGeom prst="roundRect">
+            <a:avLst>
+              <a:gd name="adj" fmla="val 12500"/>
+            </a:avLst>
+          </a:prstGeom>
+          <a:solidFill>
+            <a:srgbClr val="B7791F"/>
+          </a:solidFill>
+          <a:ln w="12700">
+            <a:solidFill>
+              <a:srgbClr val="B7791F"/>
+            </a:solidFill>
+            <a:prstDash val="solid"/>
+          </a:ln>
+        </p:spPr>
+      </p:sp>
+      <p:sp>
+        <p:nvSpPr>
+          <p:cNvPr id="26" name="Text 24"/>
+          <p:cNvSpPr txBox="1"/>
+          <p:nvPr/>
+        </p:nvSpPr>
+        <p:spPr>
+          <a:xfrm>
+            <a:off x="8260080" y="1572768"/>
+            <a:ext cx="3297936" cy="365760"/>
+          </a:xfrm>
+          <a:prstGeom prst="rect">
+            <a:avLst/>
+          </a:prstGeom>
+          <a:noFill/>
+          <a:ln/>
+        </p:spPr>
+        <p:txBody>
+          <a:bodyPr wrap="square" lIns="0" tIns="0" rIns="0" bIns="0" rtlCol="0" anchor="ctr"/>
+          <a:lstStyle/>
+          <a:p>
+            <a:pPr algn="l" indent="0" marL="0">
+              <a:lnSpc>
+                <a:spcPct val="115000"/>
+              </a:lnSpc>
+              <a:buNone/>
+            </a:pPr>
+            <a:r>
+              <a:rPr lang="en-US" sz="1100" b="1" dirty="0">
+                <a:solidFill>
+                  <a:srgbClr val="FFFFFF"/>
+                </a:solidFill>
+                <a:latin typeface="Arial" pitchFamily="34" charset="0"/>
+                <a:ea typeface="Arial" pitchFamily="34" charset="-122"/>
+                <a:cs typeface="Arial" pitchFamily="34" charset="-120"/>
+              </a:rPr>
+              <a:t>R3  ·  재현성</a:t>
+            </a:r>
+            <a:endParaRPr lang="en-US" sz="1100" dirty="0"/>
+          </a:p>
+        </p:txBody>
+      </p:sp>
+      <p:sp>
+        <p:nvSpPr>
+          <p:cNvPr id="27" name="Text 25"/>
+          <p:cNvSpPr txBox="1"/>
+          <p:nvPr/>
+        </p:nvSpPr>
+        <p:spPr>
+          <a:xfrm>
+            <a:off x="8278368" y="2048256"/>
+            <a:ext cx="3261360" cy="566928"/>
+          </a:xfrm>
+          <a:prstGeom prst="rect">
+            <a:avLst/>
+          </a:prstGeom>
+          <a:noFill/>
+          <a:ln/>
+        </p:spPr>
+        <p:txBody>
+          <a:bodyPr wrap="square" lIns="0" tIns="0" rIns="0" bIns="0" rtlCol="0" anchor="t"/>
+          <a:lstStyle/>
+          <a:p>
+            <a:pPr algn="l" indent="0" marL="0">
+              <a:lnSpc>
+                <a:spcPct val="120000"/>
+              </a:lnSpc>
+              <a:buNone/>
+            </a:pPr>
+            <a:r>
+              <a:rPr lang="en-US" sz="950" b="1" dirty="0">
+                <a:solidFill>
+                  <a:srgbClr val="1F2933"/>
+                </a:solidFill>
+                <a:latin typeface="Arial" pitchFamily="34" charset="0"/>
+                <a:ea typeface="Arial" pitchFamily="34" charset="-122"/>
+                <a:cs typeface="Arial" pitchFamily="34" charset="-120"/>
+              </a:rPr>
+              <a:t>배치 결정의 재현성이 부분 미해소로 남는다</a:t>
+            </a:r>
+            <a:endParaRPr lang="en-US" sz="950" dirty="0"/>
+          </a:p>
+        </p:txBody>
+      </p:sp>
+      <p:sp>
+        <p:nvSpPr>
+          <p:cNvPr id="28" name="Text 26"/>
+          <p:cNvSpPr txBox="1"/>
+          <p:nvPr/>
+        </p:nvSpPr>
+        <p:spPr>
+          <a:xfrm>
+            <a:off x="8278368" y="2688336"/>
+            <a:ext cx="3261360" cy="219456"/>
+          </a:xfrm>
+          <a:prstGeom prst="rect">
+            <a:avLst/>
+          </a:prstGeom>
+          <a:noFill/>
+          <a:ln/>
+        </p:spPr>
+        <p:txBody>
+          <a:bodyPr wrap="square" lIns="0" tIns="0" rIns="0" bIns="0" rtlCol="0" anchor="t"/>
+          <a:lstStyle/>
+          <a:p>
+            <a:pPr algn="l" indent="0" marL="0">
+              <a:lnSpc>
+                <a:spcPct val="115000"/>
+              </a:lnSpc>
+              <a:buNone/>
+            </a:pPr>
+            <a:r>
+              <a:rPr lang="en-US" sz="850" b="1" dirty="0">
+                <a:solidFill>
+                  <a:srgbClr val="7B8794"/>
+                </a:solidFill>
+                <a:latin typeface="Arial" pitchFamily="34" charset="0"/>
+                <a:ea typeface="Arial" pitchFamily="34" charset="-122"/>
+                <a:cs typeface="Arial" pitchFamily="34" charset="-120"/>
+              </a:rPr>
+              <a:t>왜 여기서 못 푸는가</a:t>
+            </a:r>
+            <a:endParaRPr lang="en-US" sz="850" dirty="0"/>
+          </a:p>
+        </p:txBody>
+      </p:sp>
+      <p:sp>
+        <p:nvSpPr>
+          <p:cNvPr id="29" name="Text 27"/>
+          <p:cNvSpPr txBox="1"/>
+          <p:nvPr/>
+        </p:nvSpPr>
+        <p:spPr>
+          <a:xfrm>
+            <a:off x="8278368" y="2907792"/>
+            <a:ext cx="3261360" cy="548640"/>
+          </a:xfrm>
+          <a:prstGeom prst="rect">
+            <a:avLst/>
+          </a:prstGeom>
+          <a:noFill/>
+          <a:ln/>
+        </p:spPr>
+        <p:txBody>
+          <a:bodyPr wrap="square" lIns="0" tIns="0" rIns="0" bIns="0" rtlCol="0" anchor="t"/>
+          <a:lstStyle/>
+          <a:p>
+            <a:pPr algn="l" indent="0" marL="0">
+              <a:lnSpc>
+                <a:spcPct val="120000"/>
+              </a:lnSpc>
+              <a:buNone/>
+            </a:pPr>
+            <a:r>
+              <a:rPr lang="en-US" sz="900" dirty="0">
+                <a:solidFill>
+                  <a:srgbClr val="3E4C59"/>
+                </a:solidFill>
+                <a:latin typeface="Arial" pitchFamily="34" charset="0"/>
+                <a:ea typeface="Arial" pitchFamily="34" charset="-122"/>
+                <a:cs typeface="Arial" pitchFamily="34" charset="-120"/>
+              </a:rPr>
+              <a:t>결정 로그 설계는 결정 구조가 아니라 관측성 설계다</a:t>
+            </a:r>
+            <a:endParaRPr lang="en-US" sz="900" dirty="0"/>
+          </a:p>
+        </p:txBody>
+      </p:sp>
+      <p:sp>
+        <p:nvSpPr>
+          <p:cNvPr id="30" name="Text 28"/>
+          <p:cNvSpPr txBox="1"/>
+          <p:nvPr/>
+        </p:nvSpPr>
+        <p:spPr>
+          <a:xfrm>
+            <a:off x="8278368" y="3511296"/>
+            <a:ext cx="3261360" cy="219456"/>
+          </a:xfrm>
+          <a:prstGeom prst="rect">
+            <a:avLst/>
+          </a:prstGeom>
+          <a:noFill/>
+          <a:ln/>
+        </p:spPr>
+        <p:txBody>
+          <a:bodyPr wrap="square" lIns="0" tIns="0" rIns="0" bIns="0" rtlCol="0" anchor="t"/>
+          <a:lstStyle/>
+          <a:p>
+            <a:pPr algn="l" indent="0" marL="0">
+              <a:lnSpc>
+                <a:spcPct val="115000"/>
+              </a:lnSpc>
+              <a:buNone/>
+            </a:pPr>
+            <a:r>
+              <a:rPr lang="en-US" sz="850" b="1" dirty="0">
+                <a:solidFill>
+                  <a:srgbClr val="7B8794"/>
+                </a:solidFill>
+                <a:latin typeface="Arial" pitchFamily="34" charset="0"/>
+                <a:ea typeface="Arial" pitchFamily="34" charset="-122"/>
+                <a:cs typeface="Arial" pitchFamily="34" charset="-120"/>
+              </a:rPr>
+              <a:t>어디서 푸는가</a:t>
+            </a:r>
+            <a:endParaRPr lang="en-US" sz="850" dirty="0"/>
+          </a:p>
+        </p:txBody>
+      </p:sp>
+      <p:sp>
+        <p:nvSpPr>
+          <p:cNvPr id="31" name="Text 29"/>
+          <p:cNvSpPr txBox="1"/>
+          <p:nvPr/>
+        </p:nvSpPr>
+        <p:spPr>
+          <a:xfrm>
+            <a:off x="8278368" y="3730752"/>
+            <a:ext cx="3261360" cy="237744"/>
+          </a:xfrm>
+          <a:prstGeom prst="rect">
+            <a:avLst/>
+          </a:prstGeom>
+          <a:noFill/>
+          <a:ln/>
+        </p:spPr>
+        <p:txBody>
+          <a:bodyPr wrap="square" lIns="0" tIns="0" rIns="0" bIns="0" rtlCol="0" anchor="t"/>
+          <a:lstStyle/>
+          <a:p>
+            <a:pPr algn="l" indent="0" marL="0">
+              <a:lnSpc>
+                <a:spcPct val="115000"/>
+              </a:lnSpc>
+              <a:buNone/>
+            </a:pPr>
+            <a:r>
+              <a:rPr lang="en-US" sz="1000" b="1" dirty="0">
+                <a:solidFill>
+                  <a:srgbClr val="0B6E6E"/>
+                </a:solidFill>
+                <a:latin typeface="Arial" pitchFamily="34" charset="0"/>
+                <a:ea typeface="Arial" pitchFamily="34" charset="-122"/>
+                <a:cs typeface="Arial" pitchFamily="34" charset="-120"/>
+              </a:rPr>
+              <a:t>관측성 작업 (소규모)</a:t>
+            </a:r>
+            <a:endParaRPr lang="en-US" sz="1000" dirty="0"/>
+          </a:p>
+        </p:txBody>
+      </p:sp>
+      <p:sp>
+        <p:nvSpPr>
+          <p:cNvPr id="32" name="Text 30"/>
+          <p:cNvSpPr txBox="1"/>
+          <p:nvPr/>
+        </p:nvSpPr>
+        <p:spPr>
+          <a:xfrm>
+            <a:off x="8278368" y="4005072"/>
+            <a:ext cx="3261360" cy="274320"/>
+          </a:xfrm>
+          <a:prstGeom prst="rect">
+            <a:avLst/>
+          </a:prstGeom>
+          <a:noFill/>
+          <a:ln/>
+        </p:spPr>
+        <p:txBody>
+          <a:bodyPr wrap="square" lIns="0" tIns="0" rIns="0" bIns="0" rtlCol="0" anchor="t"/>
+          <a:lstStyle/>
+          <a:p>
+            <a:pPr algn="l" indent="0" marL="0">
+              <a:lnSpc>
+                <a:spcPct val="115000"/>
+              </a:lnSpc>
+              <a:buNone/>
+            </a:pPr>
+            <a:r>
+              <a:rPr lang="en-US" sz="850" dirty="0">
+                <a:solidFill>
+                  <a:srgbClr val="7B8794"/>
+                </a:solidFill>
+                <a:latin typeface="Arial" pitchFamily="34" charset="0"/>
+                <a:ea typeface="Arial" pitchFamily="34" charset="-122"/>
+                <a:cs typeface="Arial" pitchFamily="34" charset="-120"/>
+              </a:rPr>
+              <a:t>결합: DP1의 선택이 로그 스키마를 결정한다</a:t>
+            </a:r>
+            <a:endParaRPr lang="en-US" sz="850" dirty="0"/>
+          </a:p>
+        </p:txBody>
+      </p:sp>
+      <p:sp>
+        <p:nvSpPr>
+          <p:cNvPr id="33" name="Text 31"/>
+          <p:cNvSpPr txBox="1"/>
+          <p:nvPr/>
+        </p:nvSpPr>
+        <p:spPr>
+          <a:xfrm>
+            <a:off x="457200" y="4443984"/>
+            <a:ext cx="11247120" cy="237744"/>
+          </a:xfrm>
+          <a:prstGeom prst="rect">
+            <a:avLst/>
+          </a:prstGeom>
+          <a:noFill/>
+          <a:ln/>
+        </p:spPr>
+        <p:txBody>
+          <a:bodyPr wrap="square" lIns="0" tIns="0" rIns="0" bIns="0" rtlCol="0" anchor="t"/>
+          <a:lstStyle/>
+          <a:p>
+            <a:pPr algn="l" indent="0" marL="0">
+              <a:lnSpc>
+                <a:spcPct val="115000"/>
+              </a:lnSpc>
+              <a:buNone/>
+            </a:pPr>
+            <a:r>
               <a:rPr lang="en-US" sz="1100" b="1" dirty="0">
                 <a:solidFill>
                   <a:srgbClr val="7B8794"/>
@@ -16220,7 +20043,7 @@
       </p:sp>
       <p:graphicFrame>
         <p:nvGraphicFramePr>
-          <p:cNvPr id="17" name="Table 0"/>
+          <p:cNvPr id="19" name="Table 0"/>
           <p:cNvGraphicFramePr>
             <a:graphicFrameLocks noGrp="1"/>
           </p:cNvGraphicFramePr>
@@ -17251,9 +21074,9 @@
 </p:sld>
 </file>
 
-<file path=ppt/slides/slide17.xml><?xml version="1.0" encoding="utf-8"?>
+<file path=ppt/slides/slide19.xml><?xml version="1.0" encoding="utf-8"?>
 <p:sld xmlns:a="http://schemas.openxmlformats.org/drawingml/2006/main" xmlns:r="http://schemas.openxmlformats.org/officeDocument/2006/relationships" xmlns:p="http://schemas.openxmlformats.org/presentationml/2006/main">
-  <p:cSld name="Slide 17">
+  <p:cSld name="Slide 19">
     <p:bg>
       <p:bgPr>
         <a:solidFill>
@@ -18257,7 +22080,7 @@
                 <a:ea typeface="Arial" pitchFamily="34" charset="-122"/>
                 <a:cs typeface="Arial" pitchFamily="34" charset="-120"/>
               </a:rPr>
-              <a:t>DP1 · 1 / 17</a:t>
+              <a:t>DP1 · 1 / 19</a:t>
             </a:r>
             <a:endParaRPr lang="en-US" sz="850" dirty="0"/>
           </a:p>
@@ -19034,7 +22857,7 @@
                 <a:ea typeface="Arial" pitchFamily="34" charset="-122"/>
                 <a:cs typeface="Arial" pitchFamily="34" charset="-120"/>
               </a:rPr>
-              <a:t>Candidate 1 (Tier-Indexed) + 컨텍스트 길이 보강. C2의 이득이 미측정 예측 정확도에 전적으로 의존하기 때문</a:t>
+              <a:t>Candidate 1 (Tier-Indexed) + 컨텍스트 길이 보강. C2의 이득이 아직 알 수 없는 값 두 가지 — 수명 예측 정확도와 유보량 — 에 걸려 있기 때문</a:t>
             </a:r>
             <a:endParaRPr lang="en-US" sz="1050" dirty="0"/>
           </a:p>
@@ -19294,7 +23117,7 @@
                 <a:ea typeface="Arial" pitchFamily="34" charset="-122"/>
                 <a:cs typeface="Arial" pitchFamily="34" charset="-120"/>
               </a:rPr>
-              <a:t>DP1 · 2 / 17</a:t>
+              <a:t>DP1 · 2 / 19</a:t>
             </a:r>
             <a:endParaRPr lang="en-US" sz="850" dirty="0"/>
           </a:p>
@@ -20088,7 +23911,7 @@
                 <a:ea typeface="Arial" pitchFamily="34" charset="-122"/>
                 <a:cs typeface="Arial" pitchFamily="34" charset="-120"/>
               </a:rPr>
-              <a:t>DP1 · 3 / 17</a:t>
+              <a:t>DP1 · 3 / 19</a:t>
             </a:r>
             <a:endParaRPr lang="en-US" sz="850" dirty="0"/>
           </a:p>
@@ -21553,7 +25376,7 @@
                 <a:ea typeface="Arial" pitchFamily="34" charset="-122"/>
                 <a:cs typeface="Arial" pitchFamily="34" charset="-120"/>
               </a:rPr>
-              <a:t>DP1 · 4 / 17</a:t>
+              <a:t>DP1 · 4 / 19</a:t>
             </a:r>
             <a:endParaRPr lang="en-US" sz="850" dirty="0"/>
           </a:p>
@@ -22972,7 +26795,7 @@
                 <a:ea typeface="Arial" pitchFamily="34" charset="-122"/>
                 <a:cs typeface="Arial" pitchFamily="34" charset="-120"/>
               </a:rPr>
-              <a:t>DP1 · 5 / 17</a:t>
+              <a:t>DP1 · 5 / 19</a:t>
             </a:r>
             <a:endParaRPr lang="en-US" sz="850" dirty="0"/>
           </a:p>
@@ -23694,7 +27517,7 @@
                 <a:ea typeface="Arial" pitchFamily="34" charset="-122"/>
                 <a:cs typeface="Arial" pitchFamily="34" charset="-120"/>
               </a:rPr>
-              <a:t>DP1 · 6 / 17</a:t>
+              <a:t>DP1 · 6 / 19</a:t>
             </a:r>
             <a:endParaRPr lang="en-US" sz="850" dirty="0"/>
           </a:p>
@@ -24479,7 +28302,7 @@
                 <a:ea typeface="Arial" pitchFamily="34" charset="-122"/>
                 <a:cs typeface="Arial" pitchFamily="34" charset="-120"/>
               </a:rPr>
-              <a:t>DP1 · 7 / 17</a:t>
+              <a:t>DP1 · 7 / 19</a:t>
             </a:r>
             <a:endParaRPr lang="en-US" sz="850" dirty="0"/>
           </a:p>
@@ -26748,7 +30571,7 @@
                 <a:ea typeface="Arial" pitchFamily="34" charset="-122"/>
                 <a:cs typeface="Arial" pitchFamily="34" charset="-120"/>
               </a:rPr>
-              <a:t>DP1 · 8 / 17</a:t>
+              <a:t>DP1 · 8 / 19</a:t>
             </a:r>
             <a:endParaRPr lang="en-US" sz="850" dirty="0"/>
           </a:p>
